--- a/Boek 2 - Kosten, opbrengsten, elasticiteit en surplus/edities/chat-2026/bronnen/H1/paragrafen/2.1.2 Opbrengsten, winst en break-even/2.1.2 Opbrengsten, winst en break-even – presentatie.pptx
+++ b/Boek 2 - Kosten, opbrengsten, elasticiteit en surplus/edities/chat-2026/bronnen/H1/paragrafen/2.1.2 Opbrengsten, winst en break-even/2.1.2 Opbrengsten, winst en break-even – presentatie.pptx
@@ -2,40 +2,40 @@
 <file path=ppt/presentation.xml><?xml version="1.0" encoding="utf-8"?>
 <p:presentation xmlns:p="http://schemas.openxmlformats.org/presentationml/2006/main">
   <p:sldMasterIdLst>
-    <p:sldMasterId xmlns:r="http://schemas.openxmlformats.org/officeDocument/2006/relationships" id="2147483648" r:id="Rdfd473d0d0354e1b"/>
+    <p:sldMasterId xmlns:r="http://schemas.openxmlformats.org/officeDocument/2006/relationships" id="2147483648" r:id="R74b1dd10572c4bbe"/>
   </p:sldMasterIdLst>
   <p:notesMasterIdLst>
-    <p:notesMasterId xmlns:r="http://schemas.openxmlformats.org/officeDocument/2006/relationships" r:id="R91d814cdc03c497c"/>
+    <p:notesMasterId xmlns:r="http://schemas.openxmlformats.org/officeDocument/2006/relationships" r:id="R26155a9c91124184"/>
   </p:notesMasterIdLst>
   <p:sldIdLst>
-    <p:sldId xmlns:r="http://schemas.openxmlformats.org/officeDocument/2006/relationships" id="256" r:id="Rab076f5cbb9e4216"/>
-    <p:sldId xmlns:r="http://schemas.openxmlformats.org/officeDocument/2006/relationships" id="257" r:id="R3d459ca5f5f24cdb"/>
-    <p:sldId xmlns:r="http://schemas.openxmlformats.org/officeDocument/2006/relationships" id="258" r:id="R5537e4d013964c91"/>
-    <p:sldId xmlns:r="http://schemas.openxmlformats.org/officeDocument/2006/relationships" id="259" r:id="R4315c45a15304e55"/>
-    <p:sldId xmlns:r="http://schemas.openxmlformats.org/officeDocument/2006/relationships" id="260" r:id="Rcaa4798611984691"/>
-    <p:sldId xmlns:r="http://schemas.openxmlformats.org/officeDocument/2006/relationships" id="261" r:id="R31fb96f4ea104a43"/>
-    <p:sldId xmlns:r="http://schemas.openxmlformats.org/officeDocument/2006/relationships" id="262" r:id="Rb7d3c8d8f95f4046"/>
-    <p:sldId xmlns:r="http://schemas.openxmlformats.org/officeDocument/2006/relationships" id="263" r:id="R669f5bb438f944d8"/>
-    <p:sldId xmlns:r="http://schemas.openxmlformats.org/officeDocument/2006/relationships" id="264" r:id="Rba761da090af4df8"/>
-    <p:sldId xmlns:r="http://schemas.openxmlformats.org/officeDocument/2006/relationships" id="265" r:id="Rcbd575559b5245e1"/>
-    <p:sldId xmlns:r="http://schemas.openxmlformats.org/officeDocument/2006/relationships" id="266" r:id="R5b7cc87b83b64f7d"/>
-    <p:sldId xmlns:r="http://schemas.openxmlformats.org/officeDocument/2006/relationships" id="267" r:id="R44e39d721e08425d"/>
-    <p:sldId xmlns:r="http://schemas.openxmlformats.org/officeDocument/2006/relationships" id="268" r:id="R4947251cccdd494c"/>
-    <p:sldId xmlns:r="http://schemas.openxmlformats.org/officeDocument/2006/relationships" id="269" r:id="R3d3daf6794af4bd0"/>
-    <p:sldId xmlns:r="http://schemas.openxmlformats.org/officeDocument/2006/relationships" id="270" r:id="R3a644ad28d6c4ac3"/>
-    <p:sldId xmlns:r="http://schemas.openxmlformats.org/officeDocument/2006/relationships" id="271" r:id="Rf762f2974f114a22"/>
-    <p:sldId xmlns:r="http://schemas.openxmlformats.org/officeDocument/2006/relationships" id="272" r:id="Rc526eb2d9e0c4073"/>
-    <p:sldId xmlns:r="http://schemas.openxmlformats.org/officeDocument/2006/relationships" id="273" r:id="Rd06f402c45a14e13"/>
-    <p:sldId xmlns:r="http://schemas.openxmlformats.org/officeDocument/2006/relationships" id="274" r:id="R683faf9b25ea4669"/>
-    <p:sldId xmlns:r="http://schemas.openxmlformats.org/officeDocument/2006/relationships" id="275" r:id="R5b6efb02c54a4590"/>
-    <p:sldId xmlns:r="http://schemas.openxmlformats.org/officeDocument/2006/relationships" id="276" r:id="R01344f27ed3f472b"/>
-    <p:sldId xmlns:r="http://schemas.openxmlformats.org/officeDocument/2006/relationships" id="277" r:id="Rc4a1329606e94ab3"/>
-    <p:sldId xmlns:r="http://schemas.openxmlformats.org/officeDocument/2006/relationships" id="278" r:id="R098d9de6c9424172"/>
-    <p:sldId xmlns:r="http://schemas.openxmlformats.org/officeDocument/2006/relationships" id="279" r:id="R02033b438cc9493f"/>
-    <p:sldId xmlns:r="http://schemas.openxmlformats.org/officeDocument/2006/relationships" id="280" r:id="Rdddba4ff90bc40ea"/>
-    <p:sldId xmlns:r="http://schemas.openxmlformats.org/officeDocument/2006/relationships" id="281" r:id="Rd73fd072fa66460e"/>
-    <p:sldId xmlns:r="http://schemas.openxmlformats.org/officeDocument/2006/relationships" id="282" r:id="Rb875e65c6f3d421f"/>
-    <p:sldId xmlns:r="http://schemas.openxmlformats.org/officeDocument/2006/relationships" id="283" r:id="R0869151c197f4a79"/>
+    <p:sldId xmlns:r="http://schemas.openxmlformats.org/officeDocument/2006/relationships" id="256" r:id="R4551aefc37c84dbf"/>
+    <p:sldId xmlns:r="http://schemas.openxmlformats.org/officeDocument/2006/relationships" id="257" r:id="R3c0ec8140ef244a6"/>
+    <p:sldId xmlns:r="http://schemas.openxmlformats.org/officeDocument/2006/relationships" id="258" r:id="Rb9bd591a8ebd4fbb"/>
+    <p:sldId xmlns:r="http://schemas.openxmlformats.org/officeDocument/2006/relationships" id="259" r:id="R71c94e5847294876"/>
+    <p:sldId xmlns:r="http://schemas.openxmlformats.org/officeDocument/2006/relationships" id="260" r:id="Rbb8fb765cfd0462c"/>
+    <p:sldId xmlns:r="http://schemas.openxmlformats.org/officeDocument/2006/relationships" id="261" r:id="Re59d24128d4e4279"/>
+    <p:sldId xmlns:r="http://schemas.openxmlformats.org/officeDocument/2006/relationships" id="262" r:id="Rd26cddfc1baa48ed"/>
+    <p:sldId xmlns:r="http://schemas.openxmlformats.org/officeDocument/2006/relationships" id="263" r:id="R74810d8965a64229"/>
+    <p:sldId xmlns:r="http://schemas.openxmlformats.org/officeDocument/2006/relationships" id="264" r:id="R3107403dbbc34553"/>
+    <p:sldId xmlns:r="http://schemas.openxmlformats.org/officeDocument/2006/relationships" id="265" r:id="R16e8c6c09b574567"/>
+    <p:sldId xmlns:r="http://schemas.openxmlformats.org/officeDocument/2006/relationships" id="266" r:id="Rc7c14b0ed5984e0d"/>
+    <p:sldId xmlns:r="http://schemas.openxmlformats.org/officeDocument/2006/relationships" id="267" r:id="Ra5546da56ae543ef"/>
+    <p:sldId xmlns:r="http://schemas.openxmlformats.org/officeDocument/2006/relationships" id="268" r:id="R2f0cedb9692240ca"/>
+    <p:sldId xmlns:r="http://schemas.openxmlformats.org/officeDocument/2006/relationships" id="269" r:id="R711a7ffc10ed4726"/>
+    <p:sldId xmlns:r="http://schemas.openxmlformats.org/officeDocument/2006/relationships" id="270" r:id="R200083a5ff5247ad"/>
+    <p:sldId xmlns:r="http://schemas.openxmlformats.org/officeDocument/2006/relationships" id="271" r:id="Re4d166acc4c5442c"/>
+    <p:sldId xmlns:r="http://schemas.openxmlformats.org/officeDocument/2006/relationships" id="272" r:id="Ra02c4065366e42f2"/>
+    <p:sldId xmlns:r="http://schemas.openxmlformats.org/officeDocument/2006/relationships" id="273" r:id="R9a8ff622164f4d75"/>
+    <p:sldId xmlns:r="http://schemas.openxmlformats.org/officeDocument/2006/relationships" id="274" r:id="Ra1b3e1807b98412b"/>
+    <p:sldId xmlns:r="http://schemas.openxmlformats.org/officeDocument/2006/relationships" id="275" r:id="R974b82b01c8c4d0a"/>
+    <p:sldId xmlns:r="http://schemas.openxmlformats.org/officeDocument/2006/relationships" id="276" r:id="R24677d348e164063"/>
+    <p:sldId xmlns:r="http://schemas.openxmlformats.org/officeDocument/2006/relationships" id="277" r:id="R0fb1414351cc4932"/>
+    <p:sldId xmlns:r="http://schemas.openxmlformats.org/officeDocument/2006/relationships" id="278" r:id="R837dfbbf5a3b4630"/>
+    <p:sldId xmlns:r="http://schemas.openxmlformats.org/officeDocument/2006/relationships" id="279" r:id="Rb08a73c00fe74428"/>
+    <p:sldId xmlns:r="http://schemas.openxmlformats.org/officeDocument/2006/relationships" id="280" r:id="Rc44b792fc7024ba5"/>
+    <p:sldId xmlns:r="http://schemas.openxmlformats.org/officeDocument/2006/relationships" id="281" r:id="Rffb439727bad4b93"/>
+    <p:sldId xmlns:r="http://schemas.openxmlformats.org/officeDocument/2006/relationships" id="282" r:id="Rb198f736310140d0"/>
+    <p:sldId xmlns:r="http://schemas.openxmlformats.org/officeDocument/2006/relationships" id="283" r:id="R22503e3f1d5748b4"/>
   </p:sldIdLst>
   <p:sldSz cx="15240000" cy="8572500"/>
   <p:notesSz cx="6858000" cy="9144000"/>
@@ -494,6 +494,18 @@
           <a:p xmlns:a="http://schemas.openxmlformats.org/drawingml/2006/main">
             <a:r>
               <a:rPr sz="1400"/>
+              <a:t>Start en terugblik: Opgave 1 gebruikt de kostenfuncties en gemiddelde kosten uit §2.1.1, dia 4 en 7–9. TO, GO en winst zijn nieuwe formele begrippen. Lees voor opgave 2 de betekenis en formules op p. 10–11. Laat leerlingen bij deze verkenning aanwijzen welke uitleg zij gebruiken en hun twijfel noteren. Verwacht de nieuwe bewerking nog niet zonder steun. Bij terugkeer naar dit overzicht vóór het basiswerk: laat leerlingen opgave 2 opnieuw proberen na de uitleg, bespreek hun redenering en geef zo nodig extra steun. Dit is een verkennende start, geen toets van al beheerste nieuwe leerstof.</a:t>
+            </a:r>
+          </a:p>
+          <a:p xmlns:a="http://schemas.openxmlformats.org/drawingml/2006/main">
+            <a:r>
+              <a:rPr sz="1400"/>
+              <a:t/>
+            </a:r>
+          </a:p>
+          <a:p xmlns:a="http://schemas.openxmlformats.org/drawingml/2006/main">
+            <a:r>
+              <a:rPr sz="1400"/>
               <a:t>Misvatting: Het gedrukte paginanummer 14 staat op fysieke PDF-pagina 16. Omzet is nog geen winst.</a:t>
             </a:r>
           </a:p>
@@ -1149,6 +1161,18 @@
           <a:p xmlns:a="http://schemas.openxmlformats.org/drawingml/2006/main">
             <a:r>
               <a:rPr sz="1400"/>
+              <a:t>Start en terugblik: Opgave 1 gebruikt de kostenfuncties en gemiddelde kosten uit §2.1.1, dia 4 en 7–9. TO, GO en winst zijn nieuwe formele begrippen. Lees voor opgave 2 de betekenis en formules op p. 10–11. Laat leerlingen bij deze verkenning aanwijzen welke uitleg zij gebruiken en hun twijfel noteren. Verwacht de nieuwe bewerking nog niet zonder steun. Bij terugkeer naar dit overzicht vóór het basiswerk: laat leerlingen opgave 2 opnieuw proberen na de uitleg, bespreek hun redenering en geef zo nodig extra steun. Dit is een verkennende start, geen toets van al beheerste nieuwe leerstof.</a:t>
+            </a:r>
+          </a:p>
+          <a:p xmlns:a="http://schemas.openxmlformats.org/drawingml/2006/main">
+            <a:r>
+              <a:rPr sz="1400"/>
+              <a:t/>
+            </a:r>
+          </a:p>
+          <a:p xmlns:a="http://schemas.openxmlformats.org/drawingml/2006/main">
+            <a:r>
+              <a:rPr sz="1400"/>
               <a:t>Misvatting: Het gedrukte paginanummer 14 staat op fysieke PDF-pagina 16. Omzet is nog geen winst.</a:t>
             </a:r>
           </a:p>
@@ -3103,6 +3127,18 @@
             <a:r>
               <a:rPr sz="1400"/>
               <a:t>Uitleg: Laat deze dia staan tijdens afsluiting / huiswerk. Start: 1 en 2 op pagina 14. Basis: alle begeleide opgaven 3, 4 en 5 op pagina 14–16. Zelfstandig: 6 en 7 op pagina 16. Doel: 8 op pagina 17. Huiswerk: opgaven 3, 4, 5, 6, 7 en 8 maken en nakijken. Bonus 9 en herhaling 10–11 zijn extra. Plan vervolgwerktijd als de volledige route meer dan één les vraagt.</a:t>
+            </a:r>
+          </a:p>
+          <a:p xmlns:a="http://schemas.openxmlformats.org/drawingml/2006/main">
+            <a:r>
+              <a:rPr sz="1400"/>
+              <a:t/>
+            </a:r>
+          </a:p>
+          <a:p xmlns:a="http://schemas.openxmlformats.org/drawingml/2006/main">
+            <a:r>
+              <a:rPr sz="1400"/>
+              <a:t>Start en terugblik: Opgave 1 gebruikt de kostenfuncties en gemiddelde kosten uit §2.1.1, dia 4 en 7–9. TO, GO en winst zijn nieuwe formele begrippen. Lees voor opgave 2 de betekenis en formules op p. 10–11. Laat leerlingen bij deze verkenning aanwijzen welke uitleg zij gebruiken en hun twijfel noteren. Verwacht de nieuwe bewerking nog niet zonder steun. Bij terugkeer naar dit overzicht vóór het basiswerk: laat leerlingen opgave 2 opnieuw proberen na de uitleg, bespreek hun redenering en geef zo nodig extra steun. Dit is een verkennende start, geen toets van al beheerste nieuwe leerstof.</a:t>
             </a:r>
           </a:p>
           <a:p xmlns:a="http://schemas.openxmlformats.org/drawingml/2006/main">
@@ -4135,7 +4171,7 @@
   </p:cSld>
   <p:clrMap bg1="lt1" tx1="dk1" bg2="lt2" tx2="dk2" accent1="accent1" accent2="accent2" accent3="accent3" accent4="accent4" accent5="accent5" accent6="accent6" hlink="hlink" folHlink="folHlink"/>
   <p:sldLayoutIdLst>
-    <p:sldLayoutId xmlns:r="http://schemas.openxmlformats.org/officeDocument/2006/relationships" id="2147483649" r:id="R2d276239a72846af"/>
+    <p:sldLayoutId xmlns:r="http://schemas.openxmlformats.org/officeDocument/2006/relationships" id="2147483649" r:id="Ra6b5292e206d45ff"/>
   </p:sldLayoutIdLst>
   <p:txStyles>
     <p:titleStyle>
@@ -7212,7 +7248,7 @@
           <p:cNvPr id="29" name="Deze les: §2.1.2 Opbrengsten, winst en break-even">
             <a:extLst xmlns:a="http://schemas.openxmlformats.org/drawingml/2006/main">
               <a:ext uri="{FF2B5EF4-FFF2-40B4-BE49-F238E27FC236}">
-                <a16:creationId xmlns:a16="http://schemas.microsoft.com/office/drawing/2014/main" id="{D6F85537-8347-4A6F-A8A1-045C9030513D}"/>
+                <a16:creationId xmlns:a16="http://schemas.microsoft.com/office/drawing/2014/main" id="{FC49CDE6-4E1C-4195-A059-F97598B222CE}"/>
               </a:ext>
             </a:extLst>
           </p:cNvPr>
@@ -7269,7 +7305,7 @@
           <p:cNvPr id="2" name="">
             <a:extLst xmlns:a="http://schemas.openxmlformats.org/drawingml/2006/main">
               <a:ext uri="{FF2B5EF4-FFF2-40B4-BE49-F238E27FC236}">
-                <a16:creationId xmlns:a16="http://schemas.microsoft.com/office/drawing/2014/main" id="{702F8C9C-979A-4A87-9C1A-A1A443AC3ED0}"/>
+                <a16:creationId xmlns:a16="http://schemas.microsoft.com/office/drawing/2014/main" id="{E3C75D04-8AB8-46AE-9265-0C65F111240D}"/>
               </a:ext>
             </a:extLst>
           </p:cNvPr>
@@ -7298,7 +7334,7 @@
           <p:cNvPr id="3" name="§2.1.2 Opbrengsten, winst en break-even">
             <a:extLst xmlns:a="http://schemas.openxmlformats.org/drawingml/2006/main">
               <a:ext uri="{FF2B5EF4-FFF2-40B4-BE49-F238E27FC236}">
-                <a16:creationId xmlns:a16="http://schemas.microsoft.com/office/drawing/2014/main" id="{DD8CFC6E-7405-482C-9ADA-CB9690C4D756}"/>
+                <a16:creationId xmlns:a16="http://schemas.microsoft.com/office/drawing/2014/main" id="{F0977787-B454-4D6D-857D-0A04448FFC5C}"/>
               </a:ext>
             </a:extLst>
           </p:cNvPr>
@@ -7355,7 +7391,7 @@
           <p:cNvPr id="4" name="1">
             <a:extLst xmlns:a="http://schemas.openxmlformats.org/drawingml/2006/main">
               <a:ext uri="{FF2B5EF4-FFF2-40B4-BE49-F238E27FC236}">
-                <a16:creationId xmlns:a16="http://schemas.microsoft.com/office/drawing/2014/main" id="{1C999364-95BA-4413-B66C-3DE9FB2E4FB4}"/>
+                <a16:creationId xmlns:a16="http://schemas.microsoft.com/office/drawing/2014/main" id="{E3E2CFDD-EB4E-4443-B60B-3D43B0FFAF3B}"/>
               </a:ext>
             </a:extLst>
           </p:cNvPr>
@@ -7412,7 +7448,7 @@
           <p:cNvPr id="5" name="phase">
             <a:extLst xmlns:a="http://schemas.openxmlformats.org/drawingml/2006/main">
               <a:ext uri="{FF2B5EF4-FFF2-40B4-BE49-F238E27FC236}">
-                <a16:creationId xmlns:a16="http://schemas.microsoft.com/office/drawing/2014/main" id="{262ED1A4-EAEE-4AD2-A44B-28486E045FE7}"/>
+                <a16:creationId xmlns:a16="http://schemas.microsoft.com/office/drawing/2014/main" id="{20341A39-E76C-426E-B148-7CCC369E1902}"/>
               </a:ext>
             </a:extLst>
           </p:cNvPr>
@@ -7469,7 +7505,7 @@
           <p:cNvPr id="6" name="Lesroute">
             <a:extLst xmlns:a="http://schemas.openxmlformats.org/drawingml/2006/main">
               <a:ext uri="{FF2B5EF4-FFF2-40B4-BE49-F238E27FC236}">
-                <a16:creationId xmlns:a16="http://schemas.microsoft.com/office/drawing/2014/main" id="{034D1B6D-4D73-49A5-9420-5E27F8F3D222}"/>
+                <a16:creationId xmlns:a16="http://schemas.microsoft.com/office/drawing/2014/main" id="{1D2D1DD1-2724-4469-8CFE-E409BA70D74E}"/>
               </a:ext>
             </a:extLst>
           </p:cNvPr>
@@ -7526,7 +7562,7 @@
           <p:cNvPr id="7" name="route-number-1">
             <a:extLst xmlns:a="http://schemas.openxmlformats.org/drawingml/2006/main">
               <a:ext uri="{FF2B5EF4-FFF2-40B4-BE49-F238E27FC236}">
-                <a16:creationId xmlns:a16="http://schemas.microsoft.com/office/drawing/2014/main" id="{750B876E-A772-4019-B10E-C557325AD927}"/>
+                <a16:creationId xmlns:a16="http://schemas.microsoft.com/office/drawing/2014/main" id="{0168889F-835B-42E1-A7FC-3346D874A802}"/>
               </a:ext>
             </a:extLst>
           </p:cNvPr>
@@ -7583,7 +7619,7 @@
           <p:cNvPr id="8" name="route-1">
             <a:extLst xmlns:a="http://schemas.openxmlformats.org/drawingml/2006/main">
               <a:ext uri="{FF2B5EF4-FFF2-40B4-BE49-F238E27FC236}">
-                <a16:creationId xmlns:a16="http://schemas.microsoft.com/office/drawing/2014/main" id="{4AB2BC46-86F3-4934-B3D9-1A8054BADDA8}"/>
+                <a16:creationId xmlns:a16="http://schemas.microsoft.com/office/drawing/2014/main" id="{F4936A56-10AE-403B-BFE7-354585366B84}"/>
               </a:ext>
             </a:extLst>
           </p:cNvPr>
@@ -7640,7 +7676,7 @@
           <p:cNvPr id="9" name="route-number-2">
             <a:extLst xmlns:a="http://schemas.openxmlformats.org/drawingml/2006/main">
               <a:ext uri="{FF2B5EF4-FFF2-40B4-BE49-F238E27FC236}">
-                <a16:creationId xmlns:a16="http://schemas.microsoft.com/office/drawing/2014/main" id="{1F0F0F81-279B-4BA8-8D6B-3E21CC2666E3}"/>
+                <a16:creationId xmlns:a16="http://schemas.microsoft.com/office/drawing/2014/main" id="{C6C64A2E-E2C2-4FCC-BA01-2F7B2CF174B2}"/>
               </a:ext>
             </a:extLst>
           </p:cNvPr>
@@ -7697,7 +7733,7 @@
           <p:cNvPr id="10" name="route-2">
             <a:extLst xmlns:a="http://schemas.openxmlformats.org/drawingml/2006/main">
               <a:ext uri="{FF2B5EF4-FFF2-40B4-BE49-F238E27FC236}">
-                <a16:creationId xmlns:a16="http://schemas.microsoft.com/office/drawing/2014/main" id="{F6FACC09-FEFE-4964-BBE5-77D1984C8157}"/>
+                <a16:creationId xmlns:a16="http://schemas.microsoft.com/office/drawing/2014/main" id="{C2BB806B-2158-4F6F-AC13-030C63CE2B8A}"/>
               </a:ext>
             </a:extLst>
           </p:cNvPr>
@@ -7754,7 +7790,7 @@
           <p:cNvPr id="11" name="route-number-3">
             <a:extLst xmlns:a="http://schemas.openxmlformats.org/drawingml/2006/main">
               <a:ext uri="{FF2B5EF4-FFF2-40B4-BE49-F238E27FC236}">
-                <a16:creationId xmlns:a16="http://schemas.microsoft.com/office/drawing/2014/main" id="{A1BCBA37-2C45-4678-A525-8350ECE325E1}"/>
+                <a16:creationId xmlns:a16="http://schemas.microsoft.com/office/drawing/2014/main" id="{57F65D76-2049-4D12-9D0B-1F50B0A48CBE}"/>
               </a:ext>
             </a:extLst>
           </p:cNvPr>
@@ -7811,7 +7847,7 @@
           <p:cNvPr id="12" name="route-3">
             <a:extLst xmlns:a="http://schemas.openxmlformats.org/drawingml/2006/main">
               <a:ext uri="{FF2B5EF4-FFF2-40B4-BE49-F238E27FC236}">
-                <a16:creationId xmlns:a16="http://schemas.microsoft.com/office/drawing/2014/main" id="{1049A539-8B38-48C3-92A8-723A4C86B8A4}"/>
+                <a16:creationId xmlns:a16="http://schemas.microsoft.com/office/drawing/2014/main" id="{21EBCDB4-43B3-49F4-B00C-45C1F1363F72}"/>
               </a:ext>
             </a:extLst>
           </p:cNvPr>
@@ -7868,7 +7904,7 @@
           <p:cNvPr id="13" name="route-number-4">
             <a:extLst xmlns:a="http://schemas.openxmlformats.org/drawingml/2006/main">
               <a:ext uri="{FF2B5EF4-FFF2-40B4-BE49-F238E27FC236}">
-                <a16:creationId xmlns:a16="http://schemas.microsoft.com/office/drawing/2014/main" id="{C1A4A9EA-5604-4FFD-BE6D-7809CEA5C753}"/>
+                <a16:creationId xmlns:a16="http://schemas.microsoft.com/office/drawing/2014/main" id="{039B1EB8-1336-4FFF-8CBD-6237E4E7ABCC}"/>
               </a:ext>
             </a:extLst>
           </p:cNvPr>
@@ -7925,7 +7961,7 @@
           <p:cNvPr id="14" name="route-4">
             <a:extLst xmlns:a="http://schemas.openxmlformats.org/drawingml/2006/main">
               <a:ext uri="{FF2B5EF4-FFF2-40B4-BE49-F238E27FC236}">
-                <a16:creationId xmlns:a16="http://schemas.microsoft.com/office/drawing/2014/main" id="{1C0C7B7A-CF18-438E-9B8A-1EFC7F79922A}"/>
+                <a16:creationId xmlns:a16="http://schemas.microsoft.com/office/drawing/2014/main" id="{82F7C80B-D516-436E-831A-78AA85E2D8A8}"/>
               </a:ext>
             </a:extLst>
           </p:cNvPr>
@@ -7982,7 +8018,7 @@
           <p:cNvPr id="15" name="route-number-5">
             <a:extLst xmlns:a="http://schemas.openxmlformats.org/drawingml/2006/main">
               <a:ext uri="{FF2B5EF4-FFF2-40B4-BE49-F238E27FC236}">
-                <a16:creationId xmlns:a16="http://schemas.microsoft.com/office/drawing/2014/main" id="{EF8B3DBF-B734-4183-BF73-8E815BD1F919}"/>
+                <a16:creationId xmlns:a16="http://schemas.microsoft.com/office/drawing/2014/main" id="{6D8FA938-37F8-4C13-83FF-AE6CBAA6FB54}"/>
               </a:ext>
             </a:extLst>
           </p:cNvPr>
@@ -8039,7 +8075,7 @@
           <p:cNvPr id="16" name="route-5">
             <a:extLst xmlns:a="http://schemas.openxmlformats.org/drawingml/2006/main">
               <a:ext uri="{FF2B5EF4-FFF2-40B4-BE49-F238E27FC236}">
-                <a16:creationId xmlns:a16="http://schemas.microsoft.com/office/drawing/2014/main" id="{CBE67149-F84D-49CA-B6A4-B0DE8D9B9407}"/>
+                <a16:creationId xmlns:a16="http://schemas.microsoft.com/office/drawing/2014/main" id="{D6FEEF37-7191-4831-B4E7-2C23A19268F7}"/>
               </a:ext>
             </a:extLst>
           </p:cNvPr>
@@ -8096,7 +8132,7 @@
           <p:cNvPr id="17" name="route-number-6">
             <a:extLst xmlns:a="http://schemas.openxmlformats.org/drawingml/2006/main">
               <a:ext uri="{FF2B5EF4-FFF2-40B4-BE49-F238E27FC236}">
-                <a16:creationId xmlns:a16="http://schemas.microsoft.com/office/drawing/2014/main" id="{2E1CA623-F31B-4754-A195-367D485CF1C6}"/>
+                <a16:creationId xmlns:a16="http://schemas.microsoft.com/office/drawing/2014/main" id="{135105A2-9343-4F03-9EEA-822B2C597AC7}"/>
               </a:ext>
             </a:extLst>
           </p:cNvPr>
@@ -8153,7 +8189,7 @@
           <p:cNvPr id="18" name="route-6">
             <a:extLst xmlns:a="http://schemas.openxmlformats.org/drawingml/2006/main">
               <a:ext uri="{FF2B5EF4-FFF2-40B4-BE49-F238E27FC236}">
-                <a16:creationId xmlns:a16="http://schemas.microsoft.com/office/drawing/2014/main" id="{27687CD2-9722-4663-96B6-E9AE4CA1CBC3}"/>
+                <a16:creationId xmlns:a16="http://schemas.microsoft.com/office/drawing/2014/main" id="{36EECB6E-30D5-4BD2-A65A-BBEF7AF326D4}"/>
               </a:ext>
             </a:extLst>
           </p:cNvPr>
@@ -8210,7 +8246,7 @@
           <p:cNvPr id="19" name="route-number-7">
             <a:extLst xmlns:a="http://schemas.openxmlformats.org/drawingml/2006/main">
               <a:ext uri="{FF2B5EF4-FFF2-40B4-BE49-F238E27FC236}">
-                <a16:creationId xmlns:a16="http://schemas.microsoft.com/office/drawing/2014/main" id="{CD6FE685-4ECA-4C81-8276-CF895D70FC41}"/>
+                <a16:creationId xmlns:a16="http://schemas.microsoft.com/office/drawing/2014/main" id="{32C76BA8-D124-4209-9B16-D99BAA5BD92C}"/>
               </a:ext>
             </a:extLst>
           </p:cNvPr>
@@ -8267,7 +8303,7 @@
           <p:cNvPr id="20" name="route-7">
             <a:extLst xmlns:a="http://schemas.openxmlformats.org/drawingml/2006/main">
               <a:ext uri="{FF2B5EF4-FFF2-40B4-BE49-F238E27FC236}">
-                <a16:creationId xmlns:a16="http://schemas.microsoft.com/office/drawing/2014/main" id="{A36A38BD-9CAF-41F2-9E8C-17C8C4ACDCF8}"/>
+                <a16:creationId xmlns:a16="http://schemas.microsoft.com/office/drawing/2014/main" id="{8809C486-BC09-45C6-9351-09364D5FD6DC}"/>
               </a:ext>
             </a:extLst>
           </p:cNvPr>
@@ -8324,7 +8360,7 @@
           <p:cNvPr id="21" name="Lesdoelen">
             <a:extLst xmlns:a="http://schemas.openxmlformats.org/drawingml/2006/main">
               <a:ext uri="{FF2B5EF4-FFF2-40B4-BE49-F238E27FC236}">
-                <a16:creationId xmlns:a16="http://schemas.microsoft.com/office/drawing/2014/main" id="{4AA3334D-799D-4C89-B8C4-FF2393E7FB3E}"/>
+                <a16:creationId xmlns:a16="http://schemas.microsoft.com/office/drawing/2014/main" id="{2DFEFB0D-7B2E-4C98-B21F-C00340E8DAD1}"/>
               </a:ext>
             </a:extLst>
           </p:cNvPr>
@@ -8381,7 +8417,7 @@
           <p:cNvPr id="22" name="overview-goals">
             <a:extLst xmlns:a="http://schemas.openxmlformats.org/drawingml/2006/main">
               <a:ext uri="{FF2B5EF4-FFF2-40B4-BE49-F238E27FC236}">
-                <a16:creationId xmlns:a16="http://schemas.microsoft.com/office/drawing/2014/main" id="{3F195551-C28E-4B2D-B379-100E121051E4}"/>
+                <a16:creationId xmlns:a16="http://schemas.microsoft.com/office/drawing/2014/main" id="{5E402966-B09C-4A7C-BA3D-772F6F75D7F3}"/>
               </a:ext>
             </a:extLst>
           </p:cNvPr>
@@ -8484,7 +8520,7 @@
           <p:cNvPr id="23" name="">
             <a:extLst xmlns:a="http://schemas.openxmlformats.org/drawingml/2006/main">
               <a:ext uri="{FF2B5EF4-FFF2-40B4-BE49-F238E27FC236}">
-                <a16:creationId xmlns:a16="http://schemas.microsoft.com/office/drawing/2014/main" id="{97B2EB87-6619-4682-8813-9EA8B03A281E}"/>
+                <a16:creationId xmlns:a16="http://schemas.microsoft.com/office/drawing/2014/main" id="{DA88C55F-2C36-49FA-80B1-59D9D2CC1952}"/>
               </a:ext>
             </a:extLst>
           </p:cNvPr>
@@ -8513,7 +8549,7 @@
           <p:cNvPr id="24" name="Startopdracht">
             <a:extLst xmlns:a="http://schemas.openxmlformats.org/drawingml/2006/main">
               <a:ext uri="{FF2B5EF4-FFF2-40B4-BE49-F238E27FC236}">
-                <a16:creationId xmlns:a16="http://schemas.microsoft.com/office/drawing/2014/main" id="{3D405C8A-4A0C-41A0-A8F8-4D51821B763A}"/>
+                <a16:creationId xmlns:a16="http://schemas.microsoft.com/office/drawing/2014/main" id="{F288DF6D-D4B7-4C1D-8C4D-C86E01B908EB}"/>
               </a:ext>
             </a:extLst>
           </p:cNvPr>
@@ -8570,7 +8606,7 @@
           <p:cNvPr id="25" name="overview-start">
             <a:extLst xmlns:a="http://schemas.openxmlformats.org/drawingml/2006/main">
               <a:ext uri="{FF2B5EF4-FFF2-40B4-BE49-F238E27FC236}">
-                <a16:creationId xmlns:a16="http://schemas.microsoft.com/office/drawing/2014/main" id="{029B08C0-6C6F-4A38-AF54-19AF80805147}"/>
+                <a16:creationId xmlns:a16="http://schemas.microsoft.com/office/drawing/2014/main" id="{9E16580E-B91C-47A5-9B58-C798C57C31A8}"/>
               </a:ext>
             </a:extLst>
           </p:cNvPr>
@@ -8599,48 +8635,48 @@
           <a:lstStyle xmlns:a="http://schemas.openxmlformats.org/drawingml/2006/main"/>
           <a:p xmlns:a="http://schemas.openxmlformats.org/drawingml/2006/main">
             <a:pPr algn="l">
-              <a:defRPr sz="2475" b="1">
-                <a:solidFill>
-                  <a:srgbClr val="183247"/>
-                </a:solidFill>
-                <a:latin typeface="Arial"/>
-                <a:ea typeface="Arial"/>
-                <a:cs typeface="Arial"/>
-              </a:defRPr>
-            </a:pPr>
-            <a:r>
-              <a:rPr sz="2475" b="1">
-                <a:solidFill>
-                  <a:srgbClr val="183247"/>
-                </a:solidFill>
-                <a:latin typeface="Arial"/>
-                <a:ea typeface="Arial"/>
-                <a:cs typeface="Arial"/>
-              </a:rPr>
-              <a:t>Pagina 14</a:t>
-            </a:r>
-          </a:p>
-          <a:p xmlns:a="http://schemas.openxmlformats.org/drawingml/2006/main">
-            <a:pPr algn="l">
-              <a:defRPr sz="2475" b="1">
-                <a:solidFill>
-                  <a:srgbClr val="183247"/>
-                </a:solidFill>
-                <a:latin typeface="Arial"/>
-                <a:ea typeface="Arial"/>
-                <a:cs typeface="Arial"/>
-              </a:defRPr>
-            </a:pPr>
-            <a:r>
-              <a:rPr sz="2475" b="1">
-                <a:solidFill>
-                  <a:srgbClr val="183247"/>
-                </a:solidFill>
-                <a:latin typeface="Arial"/>
-                <a:ea typeface="Arial"/>
-                <a:cs typeface="Arial"/>
-              </a:rPr>
-              <a:t>Opgaven 1 en 2</a:t>
+              <a:defRPr sz="2250" b="1">
+                <a:solidFill>
+                  <a:srgbClr val="183247"/>
+                </a:solidFill>
+                <a:latin typeface="Arial"/>
+                <a:ea typeface="Arial"/>
+                <a:cs typeface="Arial"/>
+              </a:defRPr>
+            </a:pPr>
+            <a:r>
+              <a:rPr sz="2250" b="1">
+                <a:solidFill>
+                  <a:srgbClr val="183247"/>
+                </a:solidFill>
+                <a:latin typeface="Arial"/>
+                <a:ea typeface="Arial"/>
+                <a:cs typeface="Arial"/>
+              </a:rPr>
+              <a:t>Pagina 14 · Opgaven 1 en 2</a:t>
+            </a:r>
+          </a:p>
+          <a:p xmlns:a="http://schemas.openxmlformats.org/drawingml/2006/main">
+            <a:pPr algn="l">
+              <a:defRPr sz="2250" b="1">
+                <a:solidFill>
+                  <a:srgbClr val="183247"/>
+                </a:solidFill>
+                <a:latin typeface="Arial"/>
+                <a:ea typeface="Arial"/>
+                <a:cs typeface="Arial"/>
+              </a:defRPr>
+            </a:pPr>
+            <a:r>
+              <a:rPr sz="2250" b="1">
+                <a:solidFill>
+                  <a:srgbClr val="183247"/>
+                </a:solidFill>
+                <a:latin typeface="Arial"/>
+                <a:ea typeface="Arial"/>
+                <a:cs typeface="Arial"/>
+              </a:rPr>
+              <a:t>2: verkennen, theorie p. 10–11</a:t>
             </a:r>
           </a:p>
         </p:txBody>
@@ -8650,7 +8686,7 @@
           <p:cNvPr id="26" name="">
             <a:extLst xmlns:a="http://schemas.openxmlformats.org/drawingml/2006/main">
               <a:ext uri="{FF2B5EF4-FFF2-40B4-BE49-F238E27FC236}">
-                <a16:creationId xmlns:a16="http://schemas.microsoft.com/office/drawing/2014/main" id="{5503C262-D992-4E2C-96AB-E6E3E2A00010}"/>
+                <a16:creationId xmlns:a16="http://schemas.microsoft.com/office/drawing/2014/main" id="{0F4E1A07-DC20-4875-87B1-4F4E74D68405}"/>
               </a:ext>
             </a:extLst>
           </p:cNvPr>
@@ -8679,7 +8715,7 @@
           <p:cNvPr id="27" name="Huiswerk">
             <a:extLst xmlns:a="http://schemas.openxmlformats.org/drawingml/2006/main">
               <a:ext uri="{FF2B5EF4-FFF2-40B4-BE49-F238E27FC236}">
-                <a16:creationId xmlns:a16="http://schemas.microsoft.com/office/drawing/2014/main" id="{C11BD5F4-8338-4EC9-AED4-A7B4263AA6E2}"/>
+                <a16:creationId xmlns:a16="http://schemas.microsoft.com/office/drawing/2014/main" id="{B34A1B08-F586-4604-AC48-A2471611AA20}"/>
               </a:ext>
             </a:extLst>
           </p:cNvPr>
@@ -8736,7 +8772,7 @@
           <p:cNvPr id="28" name="overview-homework">
             <a:extLst xmlns:a="http://schemas.openxmlformats.org/drawingml/2006/main">
               <a:ext uri="{FF2B5EF4-FFF2-40B4-BE49-F238E27FC236}">
-                <a16:creationId xmlns:a16="http://schemas.microsoft.com/office/drawing/2014/main" id="{AEF039B5-B541-4F1F-A640-85119446EFBC}"/>
+                <a16:creationId xmlns:a16="http://schemas.microsoft.com/office/drawing/2014/main" id="{34B2E990-4208-4593-91CE-DA6271F77494}"/>
               </a:ext>
             </a:extLst>
           </p:cNvPr>
@@ -8883,7 +8919,7 @@
     </p:spTree>
     <p:extLst>
       <p:ext uri="{BB962C8B-B14F-4D97-AF65-F5344CB8AC3E}">
-        <p14:creationId xmlns:p14="http://schemas.microsoft.com/office/powerpoint/2010/main" val="333584881"/>
+        <p14:creationId xmlns:p14="http://schemas.microsoft.com/office/powerpoint/2010/main" val="1075931549"/>
       </p:ext>
     </p:extLst>
   </p:cSld>
@@ -8914,7 +8950,7 @@
           <p:cNvPr id="9" name="WafelWagen: opbrengst en break-even">
             <a:extLst xmlns:a="http://schemas.openxmlformats.org/drawingml/2006/main">
               <a:ext uri="{FF2B5EF4-FFF2-40B4-BE49-F238E27FC236}">
-                <a16:creationId xmlns:a16="http://schemas.microsoft.com/office/drawing/2014/main" id="{687CAE58-8AAA-4AF4-9452-BA36D19C39A7}"/>
+                <a16:creationId xmlns:a16="http://schemas.microsoft.com/office/drawing/2014/main" id="{AD8FA54D-131E-42E5-880E-950B1DD6FB3A}"/>
               </a:ext>
             </a:extLst>
           </p:cNvPr>
@@ -8971,7 +9007,7 @@
           <p:cNvPr id="2" name="">
             <a:extLst xmlns:a="http://schemas.openxmlformats.org/drawingml/2006/main">
               <a:ext uri="{FF2B5EF4-FFF2-40B4-BE49-F238E27FC236}">
-                <a16:creationId xmlns:a16="http://schemas.microsoft.com/office/drawing/2014/main" id="{ADE39AFD-0D57-4223-8DC5-33E4EBA55BBB}"/>
+                <a16:creationId xmlns:a16="http://schemas.microsoft.com/office/drawing/2014/main" id="{D2927D41-5F6B-4425-8574-22E3538C7A23}"/>
               </a:ext>
             </a:extLst>
           </p:cNvPr>
@@ -9000,7 +9036,7 @@
           <p:cNvPr id="3" name="§2.1.2 Opbrengsten, winst en break-even">
             <a:extLst xmlns:a="http://schemas.openxmlformats.org/drawingml/2006/main">
               <a:ext uri="{FF2B5EF4-FFF2-40B4-BE49-F238E27FC236}">
-                <a16:creationId xmlns:a16="http://schemas.microsoft.com/office/drawing/2014/main" id="{DE864CCA-DF2F-4BFF-8F3A-352BD67C365A}"/>
+                <a16:creationId xmlns:a16="http://schemas.microsoft.com/office/drawing/2014/main" id="{9D63CA3E-AA1D-41A2-84EA-878391DA87D9}"/>
               </a:ext>
             </a:extLst>
           </p:cNvPr>
@@ -9057,7 +9093,7 @@
           <p:cNvPr id="4" name="10">
             <a:extLst xmlns:a="http://schemas.openxmlformats.org/drawingml/2006/main">
               <a:ext uri="{FF2B5EF4-FFF2-40B4-BE49-F238E27FC236}">
-                <a16:creationId xmlns:a16="http://schemas.microsoft.com/office/drawing/2014/main" id="{8B899F82-D51F-4229-9873-3039A4D33852}"/>
+                <a16:creationId xmlns:a16="http://schemas.microsoft.com/office/drawing/2014/main" id="{617104F9-3429-4BB8-A1D8-0CA5A032663F}"/>
               </a:ext>
             </a:extLst>
           </p:cNvPr>
@@ -9121,7 +9157,7 @@
         </p:xfrm>
         <a:graphic xmlns:a="http://schemas.openxmlformats.org/drawingml/2006/main">
           <a:graphicData uri="http://schemas.openxmlformats.org/drawingml/2006/chart">
-            <c:chart xmlns:r="http://schemas.openxmlformats.org/officeDocument/2006/relationships" xmlns:c="http://schemas.openxmlformats.org/drawingml/2006/chart" r:id="Rb0bf9ad96ac9496d"/>
+            <c:chart xmlns:r="http://schemas.openxmlformats.org/officeDocument/2006/relationships" xmlns:c="http://schemas.openxmlformats.org/drawingml/2006/chart" r:id="R3fd031c70237407f"/>
           </a:graphicData>
         </a:graphic>
       </p:graphicFrame>
@@ -9130,7 +9166,7 @@
           <p:cNvPr id="6" name="Break-even">
             <a:extLst xmlns:a="http://schemas.openxmlformats.org/drawingml/2006/main">
               <a:ext uri="{FF2B5EF4-FFF2-40B4-BE49-F238E27FC236}">
-                <a16:creationId xmlns:a16="http://schemas.microsoft.com/office/drawing/2014/main" id="{3822D610-DCF7-4754-AE30-4F363EA22E52}"/>
+                <a16:creationId xmlns:a16="http://schemas.microsoft.com/office/drawing/2014/main" id="{1FB4914F-204A-47CF-A701-F53FD80D8EF3}"/>
               </a:ext>
             </a:extLst>
           </p:cNvPr>
@@ -9187,7 +9223,7 @@
           <p:cNvPr id="7" name="Q ≈ 83,33&#10;TO = TK&#10;≈ € 416,67">
             <a:extLst xmlns:a="http://schemas.openxmlformats.org/drawingml/2006/main">
               <a:ext uri="{FF2B5EF4-FFF2-40B4-BE49-F238E27FC236}">
-                <a16:creationId xmlns:a16="http://schemas.microsoft.com/office/drawing/2014/main" id="{70DF2D1E-6E3A-4F7C-A35A-A049D4FD2C4A}"/>
+                <a16:creationId xmlns:a16="http://schemas.microsoft.com/office/drawing/2014/main" id="{7F144421-E35E-47AB-AEC1-545026A4480D}"/>
               </a:ext>
             </a:extLst>
           </p:cNvPr>
@@ -9290,7 +9326,7 @@
           <p:cNvPr id="8" name="Links: verlies&#10;TO &lt; TK&#10;&#10;Rechts: winst&#10;TO &gt; TK">
             <a:extLst xmlns:a="http://schemas.openxmlformats.org/drawingml/2006/main">
               <a:ext uri="{FF2B5EF4-FFF2-40B4-BE49-F238E27FC236}">
-                <a16:creationId xmlns:a16="http://schemas.microsoft.com/office/drawing/2014/main" id="{017372E9-2CD5-43AA-9BFF-2617B5033271}"/>
+                <a16:creationId xmlns:a16="http://schemas.microsoft.com/office/drawing/2014/main" id="{F2CA39D8-836B-478C-9F18-F60252ECFC9D}"/>
               </a:ext>
             </a:extLst>
           </p:cNvPr>
@@ -9419,7 +9455,7 @@
     </p:spTree>
     <p:extLst>
       <p:ext uri="{BB962C8B-B14F-4D97-AF65-F5344CB8AC3E}">
-        <p14:creationId xmlns:p14="http://schemas.microsoft.com/office/powerpoint/2010/main" val="55029923"/>
+        <p14:creationId xmlns:p14="http://schemas.microsoft.com/office/powerpoint/2010/main" val="342787546"/>
       </p:ext>
     </p:extLst>
   </p:cSld>
@@ -9450,7 +9486,7 @@
           <p:cNvPr id="9" name="WafelWagen: winst en verlies aflezen">
             <a:extLst xmlns:a="http://schemas.openxmlformats.org/drawingml/2006/main">
               <a:ext uri="{FF2B5EF4-FFF2-40B4-BE49-F238E27FC236}">
-                <a16:creationId xmlns:a16="http://schemas.microsoft.com/office/drawing/2014/main" id="{FA6586A9-320F-4803-A9B5-20C44EC64384}"/>
+                <a16:creationId xmlns:a16="http://schemas.microsoft.com/office/drawing/2014/main" id="{AA73B4F9-E095-4D9E-9B1A-3CB2A16CA1E4}"/>
               </a:ext>
             </a:extLst>
           </p:cNvPr>
@@ -9507,7 +9543,7 @@
           <p:cNvPr id="2" name="">
             <a:extLst xmlns:a="http://schemas.openxmlformats.org/drawingml/2006/main">
               <a:ext uri="{FF2B5EF4-FFF2-40B4-BE49-F238E27FC236}">
-                <a16:creationId xmlns:a16="http://schemas.microsoft.com/office/drawing/2014/main" id="{15347729-407C-4466-8800-3EC4D97A07F6}"/>
+                <a16:creationId xmlns:a16="http://schemas.microsoft.com/office/drawing/2014/main" id="{F65073D2-9B38-4635-9F60-083556C7271E}"/>
               </a:ext>
             </a:extLst>
           </p:cNvPr>
@@ -9536,7 +9572,7 @@
           <p:cNvPr id="3" name="§2.1.2 Opbrengsten, winst en break-even">
             <a:extLst xmlns:a="http://schemas.openxmlformats.org/drawingml/2006/main">
               <a:ext uri="{FF2B5EF4-FFF2-40B4-BE49-F238E27FC236}">
-                <a16:creationId xmlns:a16="http://schemas.microsoft.com/office/drawing/2014/main" id="{170AEEA5-8804-40F1-92E1-8F132FD38B0F}"/>
+                <a16:creationId xmlns:a16="http://schemas.microsoft.com/office/drawing/2014/main" id="{BCD2779C-554B-4F83-8ADC-66BE2D17DAA0}"/>
               </a:ext>
             </a:extLst>
           </p:cNvPr>
@@ -9593,7 +9629,7 @@
           <p:cNvPr id="4" name="11">
             <a:extLst xmlns:a="http://schemas.openxmlformats.org/drawingml/2006/main">
               <a:ext uri="{FF2B5EF4-FFF2-40B4-BE49-F238E27FC236}">
-                <a16:creationId xmlns:a16="http://schemas.microsoft.com/office/drawing/2014/main" id="{192BF88F-6A4D-4B7D-A0FE-0CD93F669B89}"/>
+                <a16:creationId xmlns:a16="http://schemas.microsoft.com/office/drawing/2014/main" id="{C358FDA3-7DDD-4904-99F3-74461A06FEA2}"/>
               </a:ext>
             </a:extLst>
           </p:cNvPr>
@@ -9657,7 +9693,7 @@
         </p:xfrm>
         <a:graphic xmlns:a="http://schemas.openxmlformats.org/drawingml/2006/main">
           <a:graphicData uri="http://schemas.openxmlformats.org/drawingml/2006/chart">
-            <c:chart xmlns:r="http://schemas.openxmlformats.org/officeDocument/2006/relationships" xmlns:c="http://schemas.openxmlformats.org/drawingml/2006/chart" r:id="R2a2b712232ce45f2"/>
+            <c:chart xmlns:r="http://schemas.openxmlformats.org/officeDocument/2006/relationships" xmlns:c="http://schemas.openxmlformats.org/drawingml/2006/chart" r:id="R911596b180dd489e"/>
           </a:graphicData>
         </a:graphic>
       </p:graphicFrame>
@@ -9666,7 +9702,7 @@
           <p:cNvPr id="6" name="Bij Q = 100">
             <a:extLst xmlns:a="http://schemas.openxmlformats.org/drawingml/2006/main">
               <a:ext uri="{FF2B5EF4-FFF2-40B4-BE49-F238E27FC236}">
-                <a16:creationId xmlns:a16="http://schemas.microsoft.com/office/drawing/2014/main" id="{AAA39A39-29BC-466C-B8D3-97EC1654C3C1}"/>
+                <a16:creationId xmlns:a16="http://schemas.microsoft.com/office/drawing/2014/main" id="{66631E29-AE83-4D12-A2B7-0485CE5A717D}"/>
               </a:ext>
             </a:extLst>
           </p:cNvPr>
@@ -9723,7 +9759,7 @@
           <p:cNvPr id="7" name="TO = € 500&#10;TK = € 450&#10;Winst = € 50">
             <a:extLst xmlns:a="http://schemas.openxmlformats.org/drawingml/2006/main">
               <a:ext uri="{FF2B5EF4-FFF2-40B4-BE49-F238E27FC236}">
-                <a16:creationId xmlns:a16="http://schemas.microsoft.com/office/drawing/2014/main" id="{2DA28512-7D33-461B-A8ED-069F2EEB8D96}"/>
+                <a16:creationId xmlns:a16="http://schemas.microsoft.com/office/drawing/2014/main" id="{6B88BEB8-8C02-476E-87E9-C9184A3CE3C7}"/>
               </a:ext>
             </a:extLst>
           </p:cNvPr>
@@ -9826,7 +9862,7 @@
           <p:cNvPr id="8" name="Bij Q = 50:&#10;€ 250 − € 350&#10;= −€ 100 per dag.">
             <a:extLst xmlns:a="http://schemas.openxmlformats.org/drawingml/2006/main">
               <a:ext uri="{FF2B5EF4-FFF2-40B4-BE49-F238E27FC236}">
-                <a16:creationId xmlns:a16="http://schemas.microsoft.com/office/drawing/2014/main" id="{FA4A26AC-D803-42AB-B6AA-AE2A780B0EBC}"/>
+                <a16:creationId xmlns:a16="http://schemas.microsoft.com/office/drawing/2014/main" id="{31C9E123-1FCA-43B7-AAA3-B83438C08EF9}"/>
               </a:ext>
             </a:extLst>
           </p:cNvPr>
@@ -9927,7 +9963,7 @@
     </p:spTree>
     <p:extLst>
       <p:ext uri="{BB962C8B-B14F-4D97-AF65-F5344CB8AC3E}">
-        <p14:creationId xmlns:p14="http://schemas.microsoft.com/office/powerpoint/2010/main" val="365407447"/>
+        <p14:creationId xmlns:p14="http://schemas.microsoft.com/office/powerpoint/2010/main" val="755535436"/>
       </p:ext>
     </p:extLst>
   </p:cSld>
@@ -9958,7 +9994,7 @@
           <p:cNvPr id="7" name="Korte controle: 84 wafels">
             <a:extLst xmlns:a="http://schemas.openxmlformats.org/drawingml/2006/main">
               <a:ext uri="{FF2B5EF4-FFF2-40B4-BE49-F238E27FC236}">
-                <a16:creationId xmlns:a16="http://schemas.microsoft.com/office/drawing/2014/main" id="{D7EEC051-92FE-43A5-A3C1-FDECAE561FD4}"/>
+                <a16:creationId xmlns:a16="http://schemas.microsoft.com/office/drawing/2014/main" id="{90FFF796-2310-47E2-9009-F3B4F0DEA178}"/>
               </a:ext>
             </a:extLst>
           </p:cNvPr>
@@ -10015,7 +10051,7 @@
           <p:cNvPr id="2" name="">
             <a:extLst xmlns:a="http://schemas.openxmlformats.org/drawingml/2006/main">
               <a:ext uri="{FF2B5EF4-FFF2-40B4-BE49-F238E27FC236}">
-                <a16:creationId xmlns:a16="http://schemas.microsoft.com/office/drawing/2014/main" id="{4B2F866D-508B-40FB-A9DE-F762244C6893}"/>
+                <a16:creationId xmlns:a16="http://schemas.microsoft.com/office/drawing/2014/main" id="{1492638A-32F0-479F-81F7-B0F52DCD0D69}"/>
               </a:ext>
             </a:extLst>
           </p:cNvPr>
@@ -10044,7 +10080,7 @@
           <p:cNvPr id="3" name="§2.1.2 Opbrengsten, winst en break-even">
             <a:extLst xmlns:a="http://schemas.openxmlformats.org/drawingml/2006/main">
               <a:ext uri="{FF2B5EF4-FFF2-40B4-BE49-F238E27FC236}">
-                <a16:creationId xmlns:a16="http://schemas.microsoft.com/office/drawing/2014/main" id="{1B5307F0-EB6A-4347-B323-9CA5558B15D5}"/>
+                <a16:creationId xmlns:a16="http://schemas.microsoft.com/office/drawing/2014/main" id="{76E6F673-A4CB-4738-BBB9-D1004D52E73D}"/>
               </a:ext>
             </a:extLst>
           </p:cNvPr>
@@ -10101,7 +10137,7 @@
           <p:cNvPr id="4" name="12">
             <a:extLst xmlns:a="http://schemas.openxmlformats.org/drawingml/2006/main">
               <a:ext uri="{FF2B5EF4-FFF2-40B4-BE49-F238E27FC236}">
-                <a16:creationId xmlns:a16="http://schemas.microsoft.com/office/drawing/2014/main" id="{0A412667-0C78-4540-ABFE-44D674DC0925}"/>
+                <a16:creationId xmlns:a16="http://schemas.microsoft.com/office/drawing/2014/main" id="{76D7B728-B96B-47E2-8CA4-B111BF84980C}"/>
               </a:ext>
             </a:extLst>
           </p:cNvPr>
@@ -10158,7 +10194,7 @@
           <p:cNvPr id="5" name="“Bij 84 wafels is WafelWagen precies break-even.”">
             <a:extLst xmlns:a="http://schemas.openxmlformats.org/drawingml/2006/main">
               <a:ext uri="{FF2B5EF4-FFF2-40B4-BE49-F238E27FC236}">
-                <a16:creationId xmlns:a16="http://schemas.microsoft.com/office/drawing/2014/main" id="{6A94E5FC-10CB-4FB8-BDBE-859B8EEA5562}"/>
+                <a16:creationId xmlns:a16="http://schemas.microsoft.com/office/drawing/2014/main" id="{03D5B004-258E-4712-BBF0-35C5637D6DEF}"/>
               </a:ext>
             </a:extLst>
           </p:cNvPr>
@@ -10215,7 +10251,7 @@
           <p:cNvPr id="6" name="Klopt dit?&#10;Gebruik TO en TK om je antwoord uit te leggen.">
             <a:extLst xmlns:a="http://schemas.openxmlformats.org/drawingml/2006/main">
               <a:ext uri="{FF2B5EF4-FFF2-40B4-BE49-F238E27FC236}">
-                <a16:creationId xmlns:a16="http://schemas.microsoft.com/office/drawing/2014/main" id="{7B71496A-04AD-4CE9-AA4A-77BA74168CCC}"/>
+                <a16:creationId xmlns:a16="http://schemas.microsoft.com/office/drawing/2014/main" id="{FFFF4D5E-DE64-4DDA-A71F-9920E926CB27}"/>
               </a:ext>
             </a:extLst>
           </p:cNvPr>
@@ -10293,7 +10329,7 @@
     </p:spTree>
     <p:extLst>
       <p:ext uri="{BB962C8B-B14F-4D97-AF65-F5344CB8AC3E}">
-        <p14:creationId xmlns:p14="http://schemas.microsoft.com/office/powerpoint/2010/main" val="1323131312"/>
+        <p14:creationId xmlns:p14="http://schemas.microsoft.com/office/powerpoint/2010/main" val="1191774972"/>
       </p:ext>
     </p:extLst>
   </p:cSld>
@@ -10324,7 +10360,7 @@
           <p:cNvPr id="10" name="Korte controle: 84 wafels">
             <a:extLst xmlns:a="http://schemas.openxmlformats.org/drawingml/2006/main">
               <a:ext uri="{FF2B5EF4-FFF2-40B4-BE49-F238E27FC236}">
-                <a16:creationId xmlns:a16="http://schemas.microsoft.com/office/drawing/2014/main" id="{9EE564C8-0A9B-4F08-B79C-D2D199DF7342}"/>
+                <a16:creationId xmlns:a16="http://schemas.microsoft.com/office/drawing/2014/main" id="{135AEF4E-F965-4B78-B61B-3722B892ED95}"/>
               </a:ext>
             </a:extLst>
           </p:cNvPr>
@@ -10381,7 +10417,7 @@
           <p:cNvPr id="2" name="">
             <a:extLst xmlns:a="http://schemas.openxmlformats.org/drawingml/2006/main">
               <a:ext uri="{FF2B5EF4-FFF2-40B4-BE49-F238E27FC236}">
-                <a16:creationId xmlns:a16="http://schemas.microsoft.com/office/drawing/2014/main" id="{18F6F40C-A410-4D6E-A264-0043774C2DF6}"/>
+                <a16:creationId xmlns:a16="http://schemas.microsoft.com/office/drawing/2014/main" id="{E22D3773-8A66-42E8-B821-925F6C6CCBB8}"/>
               </a:ext>
             </a:extLst>
           </p:cNvPr>
@@ -10410,7 +10446,7 @@
           <p:cNvPr id="3" name="§2.1.2 Opbrengsten, winst en break-even">
             <a:extLst xmlns:a="http://schemas.openxmlformats.org/drawingml/2006/main">
               <a:ext uri="{FF2B5EF4-FFF2-40B4-BE49-F238E27FC236}">
-                <a16:creationId xmlns:a16="http://schemas.microsoft.com/office/drawing/2014/main" id="{978C282A-0DA2-4F80-8DAC-20B8C167CF7F}"/>
+                <a16:creationId xmlns:a16="http://schemas.microsoft.com/office/drawing/2014/main" id="{DC550D16-05F7-4540-BC52-768DBE0F241B}"/>
               </a:ext>
             </a:extLst>
           </p:cNvPr>
@@ -10467,7 +10503,7 @@
           <p:cNvPr id="4" name="13">
             <a:extLst xmlns:a="http://schemas.openxmlformats.org/drawingml/2006/main">
               <a:ext uri="{FF2B5EF4-FFF2-40B4-BE49-F238E27FC236}">
-                <a16:creationId xmlns:a16="http://schemas.microsoft.com/office/drawing/2014/main" id="{EA7727FF-48EF-410C-BD88-19993DA9AE55}"/>
+                <a16:creationId xmlns:a16="http://schemas.microsoft.com/office/drawing/2014/main" id="{D279382D-8153-4390-9FE8-46560DAAB8D2}"/>
               </a:ext>
             </a:extLst>
           </p:cNvPr>
@@ -10524,7 +10560,7 @@
           <p:cNvPr id="5" name="“Bij 84 wafels is WafelWagen precies break-even.”">
             <a:extLst xmlns:a="http://schemas.openxmlformats.org/drawingml/2006/main">
               <a:ext uri="{FF2B5EF4-FFF2-40B4-BE49-F238E27FC236}">
-                <a16:creationId xmlns:a16="http://schemas.microsoft.com/office/drawing/2014/main" id="{1F1039DE-94BB-40F9-84CD-1DA7F81BE454}"/>
+                <a16:creationId xmlns:a16="http://schemas.microsoft.com/office/drawing/2014/main" id="{17FEF159-95EA-4087-BC56-FE0CD2945246}"/>
               </a:ext>
             </a:extLst>
           </p:cNvPr>
@@ -10581,7 +10617,7 @@
           <p:cNvPr id="6" name="TO = 5 × 84 = € 420 per dag">
             <a:extLst xmlns:a="http://schemas.openxmlformats.org/drawingml/2006/main">
               <a:ext uri="{FF2B5EF4-FFF2-40B4-BE49-F238E27FC236}">
-                <a16:creationId xmlns:a16="http://schemas.microsoft.com/office/drawing/2014/main" id="{E0018EBF-F778-4B1C-B474-B47E7A8CB372}"/>
+                <a16:creationId xmlns:a16="http://schemas.microsoft.com/office/drawing/2014/main" id="{63FA3B58-35E1-4A3B-A0FE-571D20325F11}"/>
               </a:ext>
             </a:extLst>
           </p:cNvPr>
@@ -10638,7 +10674,7 @@
           <p:cNvPr id="7" name="TK = 250 + 2 × 84 = € 418 per dag">
             <a:extLst xmlns:a="http://schemas.openxmlformats.org/drawingml/2006/main">
               <a:ext uri="{FF2B5EF4-FFF2-40B4-BE49-F238E27FC236}">
-                <a16:creationId xmlns:a16="http://schemas.microsoft.com/office/drawing/2014/main" id="{BBE9CA3F-C8DD-4364-A377-650EE4537084}"/>
+                <a16:creationId xmlns:a16="http://schemas.microsoft.com/office/drawing/2014/main" id="{1E7E19CD-D752-4DE2-A225-F017B4ED1843}"/>
               </a:ext>
             </a:extLst>
           </p:cNvPr>
@@ -10695,7 +10731,7 @@
           <p:cNvPr id="8" name="Winst = € 2 per dag">
             <a:extLst xmlns:a="http://schemas.openxmlformats.org/drawingml/2006/main">
               <a:ext uri="{FF2B5EF4-FFF2-40B4-BE49-F238E27FC236}">
-                <a16:creationId xmlns:a16="http://schemas.microsoft.com/office/drawing/2014/main" id="{071F2C36-3D01-4FB1-8F09-E3CB922338B7}"/>
+                <a16:creationId xmlns:a16="http://schemas.microsoft.com/office/drawing/2014/main" id="{1D88081D-F853-4C40-885A-8D5F62DF0651}"/>
               </a:ext>
             </a:extLst>
           </p:cNvPr>
@@ -10752,7 +10788,7 @@
           <p:cNvPr id="9" name="84 is het eerste gehele aantal zonder verlies.">
             <a:extLst xmlns:a="http://schemas.openxmlformats.org/drawingml/2006/main">
               <a:ext uri="{FF2B5EF4-FFF2-40B4-BE49-F238E27FC236}">
-                <a16:creationId xmlns:a16="http://schemas.microsoft.com/office/drawing/2014/main" id="{5FF146D4-D9D9-454C-8592-59D0A8C62638}"/>
+                <a16:creationId xmlns:a16="http://schemas.microsoft.com/office/drawing/2014/main" id="{B208BC7B-AB95-4AFE-BB88-E2A522BBB8E2}"/>
               </a:ext>
             </a:extLst>
           </p:cNvPr>
@@ -10807,7 +10843,7 @@
     </p:spTree>
     <p:extLst>
       <p:ext uri="{BB962C8B-B14F-4D97-AF65-F5344CB8AC3E}">
-        <p14:creationId xmlns:p14="http://schemas.microsoft.com/office/powerpoint/2010/main" val="555880180"/>
+        <p14:creationId xmlns:p14="http://schemas.microsoft.com/office/powerpoint/2010/main" val="377786872"/>
       </p:ext>
     </p:extLst>
   </p:cSld>
@@ -10838,7 +10874,7 @@
           <p:cNvPr id="29" name="Deze les: §2.1.2 Opbrengsten, winst en break-even">
             <a:extLst xmlns:a="http://schemas.openxmlformats.org/drawingml/2006/main">
               <a:ext uri="{FF2B5EF4-FFF2-40B4-BE49-F238E27FC236}">
-                <a16:creationId xmlns:a16="http://schemas.microsoft.com/office/drawing/2014/main" id="{3D9BDCD8-7C81-4773-9914-ED6D18524E7B}"/>
+                <a16:creationId xmlns:a16="http://schemas.microsoft.com/office/drawing/2014/main" id="{0737142D-AF07-4A58-A5D9-A8FE01250565}"/>
               </a:ext>
             </a:extLst>
           </p:cNvPr>
@@ -10895,7 +10931,7 @@
           <p:cNvPr id="2" name="">
             <a:extLst xmlns:a="http://schemas.openxmlformats.org/drawingml/2006/main">
               <a:ext uri="{FF2B5EF4-FFF2-40B4-BE49-F238E27FC236}">
-                <a16:creationId xmlns:a16="http://schemas.microsoft.com/office/drawing/2014/main" id="{D46CE547-7351-4BA0-A118-93545809B593}"/>
+                <a16:creationId xmlns:a16="http://schemas.microsoft.com/office/drawing/2014/main" id="{C23E558E-74FB-4D2E-8263-A53F78BE991F}"/>
               </a:ext>
             </a:extLst>
           </p:cNvPr>
@@ -10924,7 +10960,7 @@
           <p:cNvPr id="3" name="§2.1.2 Opbrengsten, winst en break-even">
             <a:extLst xmlns:a="http://schemas.openxmlformats.org/drawingml/2006/main">
               <a:ext uri="{FF2B5EF4-FFF2-40B4-BE49-F238E27FC236}">
-                <a16:creationId xmlns:a16="http://schemas.microsoft.com/office/drawing/2014/main" id="{066029DB-5B59-4683-93BA-CBF998859BD6}"/>
+                <a16:creationId xmlns:a16="http://schemas.microsoft.com/office/drawing/2014/main" id="{16D09E93-B4B9-4552-AA4D-D1D84A30DAE1}"/>
               </a:ext>
             </a:extLst>
           </p:cNvPr>
@@ -10981,7 +11017,7 @@
           <p:cNvPr id="4" name="14">
             <a:extLst xmlns:a="http://schemas.openxmlformats.org/drawingml/2006/main">
               <a:ext uri="{FF2B5EF4-FFF2-40B4-BE49-F238E27FC236}">
-                <a16:creationId xmlns:a16="http://schemas.microsoft.com/office/drawing/2014/main" id="{CF97AD03-C092-4849-BE32-75892BB347A1}"/>
+                <a16:creationId xmlns:a16="http://schemas.microsoft.com/office/drawing/2014/main" id="{5D23C887-037D-4A35-BA4C-FF8DD0204DC8}"/>
               </a:ext>
             </a:extLst>
           </p:cNvPr>
@@ -11038,7 +11074,7 @@
           <p:cNvPr id="5" name="phase">
             <a:extLst xmlns:a="http://schemas.openxmlformats.org/drawingml/2006/main">
               <a:ext uri="{FF2B5EF4-FFF2-40B4-BE49-F238E27FC236}">
-                <a16:creationId xmlns:a16="http://schemas.microsoft.com/office/drawing/2014/main" id="{280237A8-B136-4524-BFA4-CA01765B18AE}"/>
+                <a16:creationId xmlns:a16="http://schemas.microsoft.com/office/drawing/2014/main" id="{35C997F4-C4C8-4062-B038-B4B9A81B07D6}"/>
               </a:ext>
             </a:extLst>
           </p:cNvPr>
@@ -11095,7 +11131,7 @@
           <p:cNvPr id="6" name="Lesroute">
             <a:extLst xmlns:a="http://schemas.openxmlformats.org/drawingml/2006/main">
               <a:ext uri="{FF2B5EF4-FFF2-40B4-BE49-F238E27FC236}">
-                <a16:creationId xmlns:a16="http://schemas.microsoft.com/office/drawing/2014/main" id="{5CB30900-6C16-46CD-BCA8-2603119A1F5E}"/>
+                <a16:creationId xmlns:a16="http://schemas.microsoft.com/office/drawing/2014/main" id="{C87B0365-230D-4785-B97B-4F2088645A7D}"/>
               </a:ext>
             </a:extLst>
           </p:cNvPr>
@@ -11152,7 +11188,7 @@
           <p:cNvPr id="7" name="route-number-1">
             <a:extLst xmlns:a="http://schemas.openxmlformats.org/drawingml/2006/main">
               <a:ext uri="{FF2B5EF4-FFF2-40B4-BE49-F238E27FC236}">
-                <a16:creationId xmlns:a16="http://schemas.microsoft.com/office/drawing/2014/main" id="{D8037D0A-B16C-4264-920D-B053D01DD50F}"/>
+                <a16:creationId xmlns:a16="http://schemas.microsoft.com/office/drawing/2014/main" id="{29C2EC83-54B7-434E-A9A0-7878F6EBDEF1}"/>
               </a:ext>
             </a:extLst>
           </p:cNvPr>
@@ -11209,7 +11245,7 @@
           <p:cNvPr id="8" name="route-1">
             <a:extLst xmlns:a="http://schemas.openxmlformats.org/drawingml/2006/main">
               <a:ext uri="{FF2B5EF4-FFF2-40B4-BE49-F238E27FC236}">
-                <a16:creationId xmlns:a16="http://schemas.microsoft.com/office/drawing/2014/main" id="{85EA3BCD-C8E7-4364-BDD7-41F374D1C48A}"/>
+                <a16:creationId xmlns:a16="http://schemas.microsoft.com/office/drawing/2014/main" id="{EFBD0E99-8670-4868-B018-261893ABC2D2}"/>
               </a:ext>
             </a:extLst>
           </p:cNvPr>
@@ -11266,7 +11302,7 @@
           <p:cNvPr id="9" name="route-number-2">
             <a:extLst xmlns:a="http://schemas.openxmlformats.org/drawingml/2006/main">
               <a:ext uri="{FF2B5EF4-FFF2-40B4-BE49-F238E27FC236}">
-                <a16:creationId xmlns:a16="http://schemas.microsoft.com/office/drawing/2014/main" id="{9381063C-DF8C-4165-8A52-99DFD8AD4682}"/>
+                <a16:creationId xmlns:a16="http://schemas.microsoft.com/office/drawing/2014/main" id="{7F47E2CE-3850-4BB0-93FB-3E89DCE18818}"/>
               </a:ext>
             </a:extLst>
           </p:cNvPr>
@@ -11323,7 +11359,7 @@
           <p:cNvPr id="10" name="route-2">
             <a:extLst xmlns:a="http://schemas.openxmlformats.org/drawingml/2006/main">
               <a:ext uri="{FF2B5EF4-FFF2-40B4-BE49-F238E27FC236}">
-                <a16:creationId xmlns:a16="http://schemas.microsoft.com/office/drawing/2014/main" id="{D3BD644C-B9D6-4077-B06B-220D32260BF9}"/>
+                <a16:creationId xmlns:a16="http://schemas.microsoft.com/office/drawing/2014/main" id="{5C38F328-7798-4997-A7F4-12EC98DFA256}"/>
               </a:ext>
             </a:extLst>
           </p:cNvPr>
@@ -11380,7 +11416,7 @@
           <p:cNvPr id="11" name="route-number-3">
             <a:extLst xmlns:a="http://schemas.openxmlformats.org/drawingml/2006/main">
               <a:ext uri="{FF2B5EF4-FFF2-40B4-BE49-F238E27FC236}">
-                <a16:creationId xmlns:a16="http://schemas.microsoft.com/office/drawing/2014/main" id="{F32F5B08-F852-4AD8-9019-68216D3E86B1}"/>
+                <a16:creationId xmlns:a16="http://schemas.microsoft.com/office/drawing/2014/main" id="{68519F22-95AE-4238-A0CC-16003FB75D1A}"/>
               </a:ext>
             </a:extLst>
           </p:cNvPr>
@@ -11437,7 +11473,7 @@
           <p:cNvPr id="12" name="route-3">
             <a:extLst xmlns:a="http://schemas.openxmlformats.org/drawingml/2006/main">
               <a:ext uri="{FF2B5EF4-FFF2-40B4-BE49-F238E27FC236}">
-                <a16:creationId xmlns:a16="http://schemas.microsoft.com/office/drawing/2014/main" id="{B20445B0-572A-47AC-9EBA-0B0FEBDD6CC8}"/>
+                <a16:creationId xmlns:a16="http://schemas.microsoft.com/office/drawing/2014/main" id="{4AEEFD8B-FA1A-463C-AB29-E7D269553638}"/>
               </a:ext>
             </a:extLst>
           </p:cNvPr>
@@ -11494,7 +11530,7 @@
           <p:cNvPr id="13" name="route-number-4">
             <a:extLst xmlns:a="http://schemas.openxmlformats.org/drawingml/2006/main">
               <a:ext uri="{FF2B5EF4-FFF2-40B4-BE49-F238E27FC236}">
-                <a16:creationId xmlns:a16="http://schemas.microsoft.com/office/drawing/2014/main" id="{C3E9797C-D949-483B-9A92-1EAD3E860BE2}"/>
+                <a16:creationId xmlns:a16="http://schemas.microsoft.com/office/drawing/2014/main" id="{7812E469-4CAA-4DB8-BB4C-E34232E79468}"/>
               </a:ext>
             </a:extLst>
           </p:cNvPr>
@@ -11551,7 +11587,7 @@
           <p:cNvPr id="14" name="route-4">
             <a:extLst xmlns:a="http://schemas.openxmlformats.org/drawingml/2006/main">
               <a:ext uri="{FF2B5EF4-FFF2-40B4-BE49-F238E27FC236}">
-                <a16:creationId xmlns:a16="http://schemas.microsoft.com/office/drawing/2014/main" id="{48D382E3-1F97-4B7E-9DA1-A9AB13E13DC2}"/>
+                <a16:creationId xmlns:a16="http://schemas.microsoft.com/office/drawing/2014/main" id="{514B486A-084E-4901-A975-26F595EA785E}"/>
               </a:ext>
             </a:extLst>
           </p:cNvPr>
@@ -11608,7 +11644,7 @@
           <p:cNvPr id="15" name="route-number-5">
             <a:extLst xmlns:a="http://schemas.openxmlformats.org/drawingml/2006/main">
               <a:ext uri="{FF2B5EF4-FFF2-40B4-BE49-F238E27FC236}">
-                <a16:creationId xmlns:a16="http://schemas.microsoft.com/office/drawing/2014/main" id="{6EB4082A-202C-4ED5-ADBB-A27F43177FF1}"/>
+                <a16:creationId xmlns:a16="http://schemas.microsoft.com/office/drawing/2014/main" id="{DD14B34C-04D5-438A-A012-ACDA6829A7B8}"/>
               </a:ext>
             </a:extLst>
           </p:cNvPr>
@@ -11665,7 +11701,7 @@
           <p:cNvPr id="16" name="route-5">
             <a:extLst xmlns:a="http://schemas.openxmlformats.org/drawingml/2006/main">
               <a:ext uri="{FF2B5EF4-FFF2-40B4-BE49-F238E27FC236}">
-                <a16:creationId xmlns:a16="http://schemas.microsoft.com/office/drawing/2014/main" id="{AF757E35-1C57-43CE-8A66-2DA9A190669D}"/>
+                <a16:creationId xmlns:a16="http://schemas.microsoft.com/office/drawing/2014/main" id="{925981E4-EB70-4B23-84AD-9E1DC6B45A66}"/>
               </a:ext>
             </a:extLst>
           </p:cNvPr>
@@ -11722,7 +11758,7 @@
           <p:cNvPr id="17" name="route-number-6">
             <a:extLst xmlns:a="http://schemas.openxmlformats.org/drawingml/2006/main">
               <a:ext uri="{FF2B5EF4-FFF2-40B4-BE49-F238E27FC236}">
-                <a16:creationId xmlns:a16="http://schemas.microsoft.com/office/drawing/2014/main" id="{2A439627-21C1-44D5-8284-050DC6A57D40}"/>
+                <a16:creationId xmlns:a16="http://schemas.microsoft.com/office/drawing/2014/main" id="{9008BDEC-3113-4DE4-B781-9261C7E16069}"/>
               </a:ext>
             </a:extLst>
           </p:cNvPr>
@@ -11779,7 +11815,7 @@
           <p:cNvPr id="18" name="route-6">
             <a:extLst xmlns:a="http://schemas.openxmlformats.org/drawingml/2006/main">
               <a:ext uri="{FF2B5EF4-FFF2-40B4-BE49-F238E27FC236}">
-                <a16:creationId xmlns:a16="http://schemas.microsoft.com/office/drawing/2014/main" id="{5EBE8984-56E8-47B5-AE76-C537D46AAD50}"/>
+                <a16:creationId xmlns:a16="http://schemas.microsoft.com/office/drawing/2014/main" id="{A698EF97-B997-4363-9DFD-1D52AE783E7D}"/>
               </a:ext>
             </a:extLst>
           </p:cNvPr>
@@ -11836,7 +11872,7 @@
           <p:cNvPr id="19" name="route-number-7">
             <a:extLst xmlns:a="http://schemas.openxmlformats.org/drawingml/2006/main">
               <a:ext uri="{FF2B5EF4-FFF2-40B4-BE49-F238E27FC236}">
-                <a16:creationId xmlns:a16="http://schemas.microsoft.com/office/drawing/2014/main" id="{4A77BAA3-446B-484B-8335-C9D0D4F8A833}"/>
+                <a16:creationId xmlns:a16="http://schemas.microsoft.com/office/drawing/2014/main" id="{93FD16F0-64DB-4010-8EBA-FC9D7882019A}"/>
               </a:ext>
             </a:extLst>
           </p:cNvPr>
@@ -11893,7 +11929,7 @@
           <p:cNvPr id="20" name="route-7">
             <a:extLst xmlns:a="http://schemas.openxmlformats.org/drawingml/2006/main">
               <a:ext uri="{FF2B5EF4-FFF2-40B4-BE49-F238E27FC236}">
-                <a16:creationId xmlns:a16="http://schemas.microsoft.com/office/drawing/2014/main" id="{10B4FD50-826D-4E6D-BF80-49424B01E803}"/>
+                <a16:creationId xmlns:a16="http://schemas.microsoft.com/office/drawing/2014/main" id="{901E1F51-E97A-4BB6-9B7D-9E109BF2A407}"/>
               </a:ext>
             </a:extLst>
           </p:cNvPr>
@@ -11950,7 +11986,7 @@
           <p:cNvPr id="21" name="Lesdoelen">
             <a:extLst xmlns:a="http://schemas.openxmlformats.org/drawingml/2006/main">
               <a:ext uri="{FF2B5EF4-FFF2-40B4-BE49-F238E27FC236}">
-                <a16:creationId xmlns:a16="http://schemas.microsoft.com/office/drawing/2014/main" id="{27D7B137-79D6-4416-9C4D-954680A6A38A}"/>
+                <a16:creationId xmlns:a16="http://schemas.microsoft.com/office/drawing/2014/main" id="{C7DDF4D0-F1A5-40CD-82A1-3F33CF5245B1}"/>
               </a:ext>
             </a:extLst>
           </p:cNvPr>
@@ -12007,7 +12043,7 @@
           <p:cNvPr id="22" name="overview-goals">
             <a:extLst xmlns:a="http://schemas.openxmlformats.org/drawingml/2006/main">
               <a:ext uri="{FF2B5EF4-FFF2-40B4-BE49-F238E27FC236}">
-                <a16:creationId xmlns:a16="http://schemas.microsoft.com/office/drawing/2014/main" id="{E106162D-7273-4F71-B4FC-066D59F9590E}"/>
+                <a16:creationId xmlns:a16="http://schemas.microsoft.com/office/drawing/2014/main" id="{2682C4A5-A79F-40AC-BD10-00F7893D1806}"/>
               </a:ext>
             </a:extLst>
           </p:cNvPr>
@@ -12110,7 +12146,7 @@
           <p:cNvPr id="23" name="">
             <a:extLst xmlns:a="http://schemas.openxmlformats.org/drawingml/2006/main">
               <a:ext uri="{FF2B5EF4-FFF2-40B4-BE49-F238E27FC236}">
-                <a16:creationId xmlns:a16="http://schemas.microsoft.com/office/drawing/2014/main" id="{4F86822C-C6E9-43BF-BD6B-31E58A63B66E}"/>
+                <a16:creationId xmlns:a16="http://schemas.microsoft.com/office/drawing/2014/main" id="{1CD9AD1C-47F9-4B52-A4A9-579827626540}"/>
               </a:ext>
             </a:extLst>
           </p:cNvPr>
@@ -12139,7 +12175,7 @@
           <p:cNvPr id="24" name="Startopdracht">
             <a:extLst xmlns:a="http://schemas.openxmlformats.org/drawingml/2006/main">
               <a:ext uri="{FF2B5EF4-FFF2-40B4-BE49-F238E27FC236}">
-                <a16:creationId xmlns:a16="http://schemas.microsoft.com/office/drawing/2014/main" id="{49809538-8B07-4823-89FE-18CE76C3F1C9}"/>
+                <a16:creationId xmlns:a16="http://schemas.microsoft.com/office/drawing/2014/main" id="{B523E932-1A86-4317-9BA6-1DE92759D1B2}"/>
               </a:ext>
             </a:extLst>
           </p:cNvPr>
@@ -12196,7 +12232,7 @@
           <p:cNvPr id="25" name="overview-start">
             <a:extLst xmlns:a="http://schemas.openxmlformats.org/drawingml/2006/main">
               <a:ext uri="{FF2B5EF4-FFF2-40B4-BE49-F238E27FC236}">
-                <a16:creationId xmlns:a16="http://schemas.microsoft.com/office/drawing/2014/main" id="{3A4847A7-0D44-4DFC-8E89-F2B06968EED8}"/>
+                <a16:creationId xmlns:a16="http://schemas.microsoft.com/office/drawing/2014/main" id="{1004E716-AB05-411E-8F71-0A0B7A080B18}"/>
               </a:ext>
             </a:extLst>
           </p:cNvPr>
@@ -12225,48 +12261,48 @@
           <a:lstStyle xmlns:a="http://schemas.openxmlformats.org/drawingml/2006/main"/>
           <a:p xmlns:a="http://schemas.openxmlformats.org/drawingml/2006/main">
             <a:pPr algn="l">
-              <a:defRPr sz="2475" b="0">
-                <a:solidFill>
-                  <a:srgbClr val="183247"/>
-                </a:solidFill>
-                <a:latin typeface="Arial"/>
-                <a:ea typeface="Arial"/>
-                <a:cs typeface="Arial"/>
-              </a:defRPr>
-            </a:pPr>
-            <a:r>
-              <a:rPr sz="2475" b="0">
-                <a:solidFill>
-                  <a:srgbClr val="183247"/>
-                </a:solidFill>
-                <a:latin typeface="Arial"/>
-                <a:ea typeface="Arial"/>
-                <a:cs typeface="Arial"/>
-              </a:rPr>
-              <a:t>Pagina 14</a:t>
-            </a:r>
-          </a:p>
-          <a:p xmlns:a="http://schemas.openxmlformats.org/drawingml/2006/main">
-            <a:pPr algn="l">
-              <a:defRPr sz="2475" b="0">
-                <a:solidFill>
-                  <a:srgbClr val="183247"/>
-                </a:solidFill>
-                <a:latin typeface="Arial"/>
-                <a:ea typeface="Arial"/>
-                <a:cs typeface="Arial"/>
-              </a:defRPr>
-            </a:pPr>
-            <a:r>
-              <a:rPr sz="2475" b="0">
-                <a:solidFill>
-                  <a:srgbClr val="183247"/>
-                </a:solidFill>
-                <a:latin typeface="Arial"/>
-                <a:ea typeface="Arial"/>
-                <a:cs typeface="Arial"/>
-              </a:rPr>
-              <a:t>Opgaven 1 en 2</a:t>
+              <a:defRPr sz="2250" b="0">
+                <a:solidFill>
+                  <a:srgbClr val="183247"/>
+                </a:solidFill>
+                <a:latin typeface="Arial"/>
+                <a:ea typeface="Arial"/>
+                <a:cs typeface="Arial"/>
+              </a:defRPr>
+            </a:pPr>
+            <a:r>
+              <a:rPr sz="2250" b="0">
+                <a:solidFill>
+                  <a:srgbClr val="183247"/>
+                </a:solidFill>
+                <a:latin typeface="Arial"/>
+                <a:ea typeface="Arial"/>
+                <a:cs typeface="Arial"/>
+              </a:rPr>
+              <a:t>Pagina 14 · Opgaven 1 en 2</a:t>
+            </a:r>
+          </a:p>
+          <a:p xmlns:a="http://schemas.openxmlformats.org/drawingml/2006/main">
+            <a:pPr algn="l">
+              <a:defRPr sz="2250" b="0">
+                <a:solidFill>
+                  <a:srgbClr val="183247"/>
+                </a:solidFill>
+                <a:latin typeface="Arial"/>
+                <a:ea typeface="Arial"/>
+                <a:cs typeface="Arial"/>
+              </a:defRPr>
+            </a:pPr>
+            <a:r>
+              <a:rPr sz="2250" b="0">
+                <a:solidFill>
+                  <a:srgbClr val="183247"/>
+                </a:solidFill>
+                <a:latin typeface="Arial"/>
+                <a:ea typeface="Arial"/>
+                <a:cs typeface="Arial"/>
+              </a:rPr>
+              <a:t>2: verkennen, theorie p. 10–11</a:t>
             </a:r>
           </a:p>
         </p:txBody>
@@ -12276,7 +12312,7 @@
           <p:cNvPr id="26" name="">
             <a:extLst xmlns:a="http://schemas.openxmlformats.org/drawingml/2006/main">
               <a:ext uri="{FF2B5EF4-FFF2-40B4-BE49-F238E27FC236}">
-                <a16:creationId xmlns:a16="http://schemas.microsoft.com/office/drawing/2014/main" id="{401F0B95-CA72-4EB6-BA09-A847C56BCA27}"/>
+                <a16:creationId xmlns:a16="http://schemas.microsoft.com/office/drawing/2014/main" id="{B66A3B9B-CC41-4B3B-AB89-E0E41D3BB92F}"/>
               </a:ext>
             </a:extLst>
           </p:cNvPr>
@@ -12305,7 +12341,7 @@
           <p:cNvPr id="27" name="Huiswerk">
             <a:extLst xmlns:a="http://schemas.openxmlformats.org/drawingml/2006/main">
               <a:ext uri="{FF2B5EF4-FFF2-40B4-BE49-F238E27FC236}">
-                <a16:creationId xmlns:a16="http://schemas.microsoft.com/office/drawing/2014/main" id="{E0C834FA-5928-4008-86B3-C41703BDCEB9}"/>
+                <a16:creationId xmlns:a16="http://schemas.microsoft.com/office/drawing/2014/main" id="{CA362967-8284-4992-A81D-3BF074F5002B}"/>
               </a:ext>
             </a:extLst>
           </p:cNvPr>
@@ -12362,7 +12398,7 @@
           <p:cNvPr id="28" name="overview-homework">
             <a:extLst xmlns:a="http://schemas.openxmlformats.org/drawingml/2006/main">
               <a:ext uri="{FF2B5EF4-FFF2-40B4-BE49-F238E27FC236}">
-                <a16:creationId xmlns:a16="http://schemas.microsoft.com/office/drawing/2014/main" id="{CC29E74F-65DB-424D-A03A-2F0DA96E7EF3}"/>
+                <a16:creationId xmlns:a16="http://schemas.microsoft.com/office/drawing/2014/main" id="{56E988BE-9803-4BF2-9D18-0815D85AF244}"/>
               </a:ext>
             </a:extLst>
           </p:cNvPr>
@@ -12509,7 +12545,7 @@
     </p:spTree>
     <p:extLst>
       <p:ext uri="{BB962C8B-B14F-4D97-AF65-F5344CB8AC3E}">
-        <p14:creationId xmlns:p14="http://schemas.microsoft.com/office/powerpoint/2010/main" val="2059177257"/>
+        <p14:creationId xmlns:p14="http://schemas.microsoft.com/office/powerpoint/2010/main" val="1036086744"/>
       </p:ext>
     </p:extLst>
   </p:cSld>
@@ -12540,7 +12576,7 @@
           <p:cNvPr id="10" name="Opgave 8 · Bakkerij De Korenaar">
             <a:extLst xmlns:a="http://schemas.openxmlformats.org/drawingml/2006/main">
               <a:ext uri="{FF2B5EF4-FFF2-40B4-BE49-F238E27FC236}">
-                <a16:creationId xmlns:a16="http://schemas.microsoft.com/office/drawing/2014/main" id="{C9EEEE49-2664-4394-BC97-CC380491B981}"/>
+                <a16:creationId xmlns:a16="http://schemas.microsoft.com/office/drawing/2014/main" id="{961F0DA8-5951-4BAD-8037-4876549C5AD8}"/>
               </a:ext>
             </a:extLst>
           </p:cNvPr>
@@ -12597,7 +12633,7 @@
           <p:cNvPr id="2" name="">
             <a:extLst xmlns:a="http://schemas.openxmlformats.org/drawingml/2006/main">
               <a:ext uri="{FF2B5EF4-FFF2-40B4-BE49-F238E27FC236}">
-                <a16:creationId xmlns:a16="http://schemas.microsoft.com/office/drawing/2014/main" id="{C0C4B810-C938-4071-86B7-56B0C5147280}"/>
+                <a16:creationId xmlns:a16="http://schemas.microsoft.com/office/drawing/2014/main" id="{87A89637-6426-4969-98F3-CF77E6575E39}"/>
               </a:ext>
             </a:extLst>
           </p:cNvPr>
@@ -12626,7 +12662,7 @@
           <p:cNvPr id="3" name="§2.1.2 Opbrengsten, winst en break-even · Opgave 8 · Boekpag">
             <a:extLst xmlns:a="http://schemas.openxmlformats.org/drawingml/2006/main">
               <a:ext uri="{FF2B5EF4-FFF2-40B4-BE49-F238E27FC236}">
-                <a16:creationId xmlns:a16="http://schemas.microsoft.com/office/drawing/2014/main" id="{93446005-437D-4AC7-BD61-21ECEE9FDECD}"/>
+                <a16:creationId xmlns:a16="http://schemas.microsoft.com/office/drawing/2014/main" id="{370FAC39-6437-4777-8737-897A030D12BF}"/>
               </a:ext>
             </a:extLst>
           </p:cNvPr>
@@ -12683,7 +12719,7 @@
           <p:cNvPr id="4" name="15">
             <a:extLst xmlns:a="http://schemas.openxmlformats.org/drawingml/2006/main">
               <a:ext uri="{FF2B5EF4-FFF2-40B4-BE49-F238E27FC236}">
-                <a16:creationId xmlns:a16="http://schemas.microsoft.com/office/drawing/2014/main" id="{63E8723B-E6BB-4009-A2EB-37EB97FA4019}"/>
+                <a16:creationId xmlns:a16="http://schemas.microsoft.com/office/drawing/2014/main" id="{800C7E93-021F-4C86-8EFE-729173DCC05C}"/>
               </a:ext>
             </a:extLst>
           </p:cNvPr>
@@ -12740,7 +12776,7 @@
           <p:cNvPr id="5" name="De Korenaar heeft de kostenfunctie TK = 500 + 0,80Q.">
             <a:extLst xmlns:a="http://schemas.openxmlformats.org/drawingml/2006/main">
               <a:ext uri="{FF2B5EF4-FFF2-40B4-BE49-F238E27FC236}">
-                <a16:creationId xmlns:a16="http://schemas.microsoft.com/office/drawing/2014/main" id="{998039DB-6D53-4CFB-8645-BC61A2780B83}"/>
+                <a16:creationId xmlns:a16="http://schemas.microsoft.com/office/drawing/2014/main" id="{B561085E-206C-45E8-BABD-B0266D1913FB}"/>
               </a:ext>
             </a:extLst>
           </p:cNvPr>
@@ -12797,7 +12833,7 @@
           <p:cNvPr id="6" name="Ieder brood wordt verkocht voor een vaste prijs van € 1,50.">
             <a:extLst xmlns:a="http://schemas.openxmlformats.org/drawingml/2006/main">
               <a:ext uri="{FF2B5EF4-FFF2-40B4-BE49-F238E27FC236}">
-                <a16:creationId xmlns:a16="http://schemas.microsoft.com/office/drawing/2014/main" id="{69FC71E6-620B-44D1-9D96-49C0252D72EC}"/>
+                <a16:creationId xmlns:a16="http://schemas.microsoft.com/office/drawing/2014/main" id="{D9C9A816-1593-4C0A-B410-E6FAAB3ADD64}"/>
               </a:ext>
             </a:extLst>
           </p:cNvPr>
@@ -12854,7 +12890,7 @@
           <p:cNvPr id="7" name="De capaciteit is 1.000 broden per maand.">
             <a:extLst xmlns:a="http://schemas.openxmlformats.org/drawingml/2006/main">
               <a:ext uri="{FF2B5EF4-FFF2-40B4-BE49-F238E27FC236}">
-                <a16:creationId xmlns:a16="http://schemas.microsoft.com/office/drawing/2014/main" id="{BAC89B9F-8BE4-40D0-BA63-0A5889790608}"/>
+                <a16:creationId xmlns:a16="http://schemas.microsoft.com/office/drawing/2014/main" id="{9C3713ED-5F5D-488C-B562-DE0D07AE0519}"/>
               </a:ext>
             </a:extLst>
           </p:cNvPr>
@@ -12911,7 +12947,7 @@
           <p:cNvPr id="8" name="">
             <a:extLst xmlns:a="http://schemas.openxmlformats.org/drawingml/2006/main">
               <a:ext uri="{FF2B5EF4-FFF2-40B4-BE49-F238E27FC236}">
-                <a16:creationId xmlns:a16="http://schemas.microsoft.com/office/drawing/2014/main" id="{FC6EB9C9-0077-46E0-B6E0-C46D166ED273}"/>
+                <a16:creationId xmlns:a16="http://schemas.microsoft.com/office/drawing/2014/main" id="{B4EE34A2-660E-495D-9A04-F32862AA90B9}"/>
               </a:ext>
             </a:extLst>
           </p:cNvPr>
@@ -12940,7 +12976,7 @@
           <p:cNvPr id="9" name="Q is het aantal broden per maand.&#10;Totale bedragen zijn in eu">
             <a:extLst xmlns:a="http://schemas.openxmlformats.org/drawingml/2006/main">
               <a:ext uri="{FF2B5EF4-FFF2-40B4-BE49-F238E27FC236}">
-                <a16:creationId xmlns:a16="http://schemas.microsoft.com/office/drawing/2014/main" id="{B9780BB2-A7DA-40D4-9CDE-C295D7F249AC}"/>
+                <a16:creationId xmlns:a16="http://schemas.microsoft.com/office/drawing/2014/main" id="{6F78AC77-5F93-4ADD-86BE-2A24B5E19C10}"/>
               </a:ext>
             </a:extLst>
           </p:cNvPr>
@@ -13018,7 +13054,7 @@
     </p:spTree>
     <p:extLst>
       <p:ext uri="{BB962C8B-B14F-4D97-AF65-F5344CB8AC3E}">
-        <p14:creationId xmlns:p14="http://schemas.microsoft.com/office/powerpoint/2010/main" val="582518770"/>
+        <p14:creationId xmlns:p14="http://schemas.microsoft.com/office/powerpoint/2010/main" val="286464372"/>
       </p:ext>
     </p:extLst>
   </p:cSld>
@@ -13049,7 +13085,7 @@
           <p:cNvPr id="8" name="Opgave 8 · Deelvragen a en b">
             <a:extLst xmlns:a="http://schemas.openxmlformats.org/drawingml/2006/main">
               <a:ext uri="{FF2B5EF4-FFF2-40B4-BE49-F238E27FC236}">
-                <a16:creationId xmlns:a16="http://schemas.microsoft.com/office/drawing/2014/main" id="{AA73F73B-21DA-4FCD-8A52-C6208216F112}"/>
+                <a16:creationId xmlns:a16="http://schemas.microsoft.com/office/drawing/2014/main" id="{0702EAD6-B56D-46CE-8703-731FD6642E3A}"/>
               </a:ext>
             </a:extLst>
           </p:cNvPr>
@@ -13106,7 +13142,7 @@
           <p:cNvPr id="2" name="">
             <a:extLst xmlns:a="http://schemas.openxmlformats.org/drawingml/2006/main">
               <a:ext uri="{FF2B5EF4-FFF2-40B4-BE49-F238E27FC236}">
-                <a16:creationId xmlns:a16="http://schemas.microsoft.com/office/drawing/2014/main" id="{17C511D7-868D-4DBC-BAB6-5FE53FD9D4B0}"/>
+                <a16:creationId xmlns:a16="http://schemas.microsoft.com/office/drawing/2014/main" id="{4822B4A9-11A1-43C8-94E4-A59F79259926}"/>
               </a:ext>
             </a:extLst>
           </p:cNvPr>
@@ -13135,7 +13171,7 @@
           <p:cNvPr id="3" name="§2.1.2 Opbrengsten, winst en break-even · Opgave 8 · Boekpag">
             <a:extLst xmlns:a="http://schemas.openxmlformats.org/drawingml/2006/main">
               <a:ext uri="{FF2B5EF4-FFF2-40B4-BE49-F238E27FC236}">
-                <a16:creationId xmlns:a16="http://schemas.microsoft.com/office/drawing/2014/main" id="{6E151416-84B7-4807-9288-28B329AFDBF1}"/>
+                <a16:creationId xmlns:a16="http://schemas.microsoft.com/office/drawing/2014/main" id="{D014C7CD-206C-4131-BD95-E32F7D6C5F8A}"/>
               </a:ext>
             </a:extLst>
           </p:cNvPr>
@@ -13192,7 +13228,7 @@
           <p:cNvPr id="4" name="16">
             <a:extLst xmlns:a="http://schemas.openxmlformats.org/drawingml/2006/main">
               <a:ext uri="{FF2B5EF4-FFF2-40B4-BE49-F238E27FC236}">
-                <a16:creationId xmlns:a16="http://schemas.microsoft.com/office/drawing/2014/main" id="{0A46D5AC-1FBD-4DF3-9C8F-FD4366F21DE7}"/>
+                <a16:creationId xmlns:a16="http://schemas.microsoft.com/office/drawing/2014/main" id="{22687AA6-F0F7-47F1-9E6A-C7C2EBA1FC1D}"/>
               </a:ext>
             </a:extLst>
           </p:cNvPr>
@@ -13249,7 +13285,7 @@
           <p:cNvPr id="5" name="a) Stel de functie voor TO op.&#10;Leg voor Q &gt; 0 uit waarom GO ">
             <a:extLst xmlns:a="http://schemas.openxmlformats.org/drawingml/2006/main">
               <a:ext uri="{FF2B5EF4-FFF2-40B4-BE49-F238E27FC236}">
-                <a16:creationId xmlns:a16="http://schemas.microsoft.com/office/drawing/2014/main" id="{53906A00-D2AA-45D8-AD65-14BF1186BD6E}"/>
+                <a16:creationId xmlns:a16="http://schemas.microsoft.com/office/drawing/2014/main" id="{DDBCA0EA-21C6-43F8-8522-DC96E76A44C9}"/>
               </a:ext>
             </a:extLst>
           </p:cNvPr>
@@ -13329,7 +13365,7 @@
           <p:cNvPr id="6" name="">
             <a:extLst xmlns:a="http://schemas.openxmlformats.org/drawingml/2006/main">
               <a:ext uri="{FF2B5EF4-FFF2-40B4-BE49-F238E27FC236}">
-                <a16:creationId xmlns:a16="http://schemas.microsoft.com/office/drawing/2014/main" id="{4A2D4B36-27B2-4F7A-B66A-CF9825269F16}"/>
+                <a16:creationId xmlns:a16="http://schemas.microsoft.com/office/drawing/2014/main" id="{3F204E9E-1D48-4A51-B20A-A84BFF7691D9}"/>
               </a:ext>
             </a:extLst>
           </p:cNvPr>
@@ -13358,7 +13394,7 @@
           <p:cNvPr id="7" name="b) Bereken de winst bij Q = 500 en bij Q = 1.000.">
             <a:extLst xmlns:a="http://schemas.openxmlformats.org/drawingml/2006/main">
               <a:ext uri="{FF2B5EF4-FFF2-40B4-BE49-F238E27FC236}">
-                <a16:creationId xmlns:a16="http://schemas.microsoft.com/office/drawing/2014/main" id="{25742F0B-C917-4D07-9AC0-BD4D3113FB30}"/>
+                <a16:creationId xmlns:a16="http://schemas.microsoft.com/office/drawing/2014/main" id="{BBE4AB93-F1BE-46D4-A1A8-465EFAC85BB5}"/>
               </a:ext>
             </a:extLst>
           </p:cNvPr>
@@ -13413,7 +13449,7 @@
     </p:spTree>
     <p:extLst>
       <p:ext uri="{BB962C8B-B14F-4D97-AF65-F5344CB8AC3E}">
-        <p14:creationId xmlns:p14="http://schemas.microsoft.com/office/powerpoint/2010/main" val="1472319712"/>
+        <p14:creationId xmlns:p14="http://schemas.microsoft.com/office/powerpoint/2010/main" val="208392267"/>
       </p:ext>
     </p:extLst>
   </p:cSld>
@@ -13444,7 +13480,7 @@
           <p:cNvPr id="8" name="Opgave 8 · Deelvragen c en d">
             <a:extLst xmlns:a="http://schemas.openxmlformats.org/drawingml/2006/main">
               <a:ext uri="{FF2B5EF4-FFF2-40B4-BE49-F238E27FC236}">
-                <a16:creationId xmlns:a16="http://schemas.microsoft.com/office/drawing/2014/main" id="{A64787EC-6654-447D-B87D-E07A1247BE40}"/>
+                <a16:creationId xmlns:a16="http://schemas.microsoft.com/office/drawing/2014/main" id="{81849280-2A3A-478F-B885-34FDB9DD0692}"/>
               </a:ext>
             </a:extLst>
           </p:cNvPr>
@@ -13501,7 +13537,7 @@
           <p:cNvPr id="2" name="">
             <a:extLst xmlns:a="http://schemas.openxmlformats.org/drawingml/2006/main">
               <a:ext uri="{FF2B5EF4-FFF2-40B4-BE49-F238E27FC236}">
-                <a16:creationId xmlns:a16="http://schemas.microsoft.com/office/drawing/2014/main" id="{82EBBF54-A1E5-4808-AED8-4AAFF11CFA97}"/>
+                <a16:creationId xmlns:a16="http://schemas.microsoft.com/office/drawing/2014/main" id="{33A90AB9-7BE6-4B2F-AD41-F9B959917CD5}"/>
               </a:ext>
             </a:extLst>
           </p:cNvPr>
@@ -13530,7 +13566,7 @@
           <p:cNvPr id="3" name="§2.1.2 Opbrengsten, winst en break-even · Opgave 8 · Boekpag">
             <a:extLst xmlns:a="http://schemas.openxmlformats.org/drawingml/2006/main">
               <a:ext uri="{FF2B5EF4-FFF2-40B4-BE49-F238E27FC236}">
-                <a16:creationId xmlns:a16="http://schemas.microsoft.com/office/drawing/2014/main" id="{5CB0EA69-B89E-40C2-B55B-CFBD85923738}"/>
+                <a16:creationId xmlns:a16="http://schemas.microsoft.com/office/drawing/2014/main" id="{7C23F34A-1137-478E-B908-F95A5F456011}"/>
               </a:ext>
             </a:extLst>
           </p:cNvPr>
@@ -13587,7 +13623,7 @@
           <p:cNvPr id="4" name="17">
             <a:extLst xmlns:a="http://schemas.openxmlformats.org/drawingml/2006/main">
               <a:ext uri="{FF2B5EF4-FFF2-40B4-BE49-F238E27FC236}">
-                <a16:creationId xmlns:a16="http://schemas.microsoft.com/office/drawing/2014/main" id="{11D879F2-5232-4A55-8449-B1C5183BD929}"/>
+                <a16:creationId xmlns:a16="http://schemas.microsoft.com/office/drawing/2014/main" id="{B009DF0D-8F41-4C34-8FD8-BF6B8470FA9C}"/>
               </a:ext>
             </a:extLst>
           </p:cNvPr>
@@ -13644,7 +13680,7 @@
           <p:cNvPr id="5" name="c) Los algebraïsch TO = TK op. Noteer zowel de break-even-af">
             <a:extLst xmlns:a="http://schemas.openxmlformats.org/drawingml/2006/main">
               <a:ext uri="{FF2B5EF4-FFF2-40B4-BE49-F238E27FC236}">
-                <a16:creationId xmlns:a16="http://schemas.microsoft.com/office/drawing/2014/main" id="{9259FE33-8E0D-4F0C-BB46-25B06796C9BA}"/>
+                <a16:creationId xmlns:a16="http://schemas.microsoft.com/office/drawing/2014/main" id="{084CB6B2-6665-42D4-A28F-431168CE89A4}"/>
               </a:ext>
             </a:extLst>
           </p:cNvPr>
@@ -13701,7 +13737,7 @@
           <p:cNvPr id="6" name="">
             <a:extLst xmlns:a="http://schemas.openxmlformats.org/drawingml/2006/main">
               <a:ext uri="{FF2B5EF4-FFF2-40B4-BE49-F238E27FC236}">
-                <a16:creationId xmlns:a16="http://schemas.microsoft.com/office/drawing/2014/main" id="{CDE1CA2F-6EC9-4D5B-B378-DAD08851897F}"/>
+                <a16:creationId xmlns:a16="http://schemas.microsoft.com/office/drawing/2014/main" id="{DB072827-E26F-4AFD-B6D8-39B0592A6B23}"/>
               </a:ext>
             </a:extLst>
           </p:cNvPr>
@@ -13730,7 +13766,7 @@
           <p:cNvPr id="7" name="d) Teken TK en TO in één assenstelsel. Benoem beide assen me">
             <a:extLst xmlns:a="http://schemas.openxmlformats.org/drawingml/2006/main">
               <a:ext uri="{FF2B5EF4-FFF2-40B4-BE49-F238E27FC236}">
-                <a16:creationId xmlns:a16="http://schemas.microsoft.com/office/drawing/2014/main" id="{E32EC9E8-1AA9-48E4-BD6F-83A4A2B4550A}"/>
+                <a16:creationId xmlns:a16="http://schemas.microsoft.com/office/drawing/2014/main" id="{997DAEDC-F60B-490B-8817-31CC758C61AE}"/>
               </a:ext>
             </a:extLst>
           </p:cNvPr>
@@ -13785,7 +13821,7 @@
     </p:spTree>
     <p:extLst>
       <p:ext uri="{BB962C8B-B14F-4D97-AF65-F5344CB8AC3E}">
-        <p14:creationId xmlns:p14="http://schemas.microsoft.com/office/powerpoint/2010/main" val="1109253095"/>
+        <p14:creationId xmlns:p14="http://schemas.microsoft.com/office/powerpoint/2010/main" val="1422213557"/>
       </p:ext>
     </p:extLst>
   </p:cSld>
@@ -13816,7 +13852,7 @@
           <p:cNvPr id="10" name="Opgave 8a · TO en GO">
             <a:extLst xmlns:a="http://schemas.openxmlformats.org/drawingml/2006/main">
               <a:ext uri="{FF2B5EF4-FFF2-40B4-BE49-F238E27FC236}">
-                <a16:creationId xmlns:a16="http://schemas.microsoft.com/office/drawing/2014/main" id="{5E33A88B-4A2C-4EB0-9D7F-F78BF184A88E}"/>
+                <a16:creationId xmlns:a16="http://schemas.microsoft.com/office/drawing/2014/main" id="{14C6B6DE-E775-4AC3-A55A-927510A5B841}"/>
               </a:ext>
             </a:extLst>
           </p:cNvPr>
@@ -13873,7 +13909,7 @@
           <p:cNvPr id="2" name="">
             <a:extLst xmlns:a="http://schemas.openxmlformats.org/drawingml/2006/main">
               <a:ext uri="{FF2B5EF4-FFF2-40B4-BE49-F238E27FC236}">
-                <a16:creationId xmlns:a16="http://schemas.microsoft.com/office/drawing/2014/main" id="{20F9F262-7749-45C0-9D3E-20B7A4F3F832}"/>
+                <a16:creationId xmlns:a16="http://schemas.microsoft.com/office/drawing/2014/main" id="{0F73DA0C-E88B-4F61-A770-CE0CBA8B819D}"/>
               </a:ext>
             </a:extLst>
           </p:cNvPr>
@@ -13902,7 +13938,7 @@
           <p:cNvPr id="3" name="§2.1.2 Opbrengsten, winst en break-even · Opgave 8 · Boekpag">
             <a:extLst xmlns:a="http://schemas.openxmlformats.org/drawingml/2006/main">
               <a:ext uri="{FF2B5EF4-FFF2-40B4-BE49-F238E27FC236}">
-                <a16:creationId xmlns:a16="http://schemas.microsoft.com/office/drawing/2014/main" id="{1C1CA120-5792-4130-A7F1-1949D5D5E3E2}"/>
+                <a16:creationId xmlns:a16="http://schemas.microsoft.com/office/drawing/2014/main" id="{E76E92F6-3222-4E1A-8BE1-B57D5EEE22FB}"/>
               </a:ext>
             </a:extLst>
           </p:cNvPr>
@@ -13959,7 +13995,7 @@
           <p:cNvPr id="4" name="18">
             <a:extLst xmlns:a="http://schemas.openxmlformats.org/drawingml/2006/main">
               <a:ext uri="{FF2B5EF4-FFF2-40B4-BE49-F238E27FC236}">
-                <a16:creationId xmlns:a16="http://schemas.microsoft.com/office/drawing/2014/main" id="{DB3D159F-42E4-48FF-A530-1F25CB0A4B3D}"/>
+                <a16:creationId xmlns:a16="http://schemas.microsoft.com/office/drawing/2014/main" id="{01C6E534-DAAF-437C-BE8A-6F24D1C71CDA}"/>
               </a:ext>
             </a:extLst>
           </p:cNvPr>
@@ -14016,7 +14052,7 @@
           <p:cNvPr id="5" name="TO = P × Q = 1,50Q">
             <a:extLst xmlns:a="http://schemas.openxmlformats.org/drawingml/2006/main">
               <a:ext uri="{FF2B5EF4-FFF2-40B4-BE49-F238E27FC236}">
-                <a16:creationId xmlns:a16="http://schemas.microsoft.com/office/drawing/2014/main" id="{0A0AF42B-1F5C-44BF-9D34-B82A13AEE173}"/>
+                <a16:creationId xmlns:a16="http://schemas.microsoft.com/office/drawing/2014/main" id="{4EC023B0-D55B-42FB-8726-C0A58C1F003A}"/>
               </a:ext>
             </a:extLst>
           </p:cNvPr>
@@ -14073,7 +14109,7 @@
           <p:cNvPr id="6" name="Totale opbrengst in euro per maand">
             <a:extLst xmlns:a="http://schemas.openxmlformats.org/drawingml/2006/main">
               <a:ext uri="{FF2B5EF4-FFF2-40B4-BE49-F238E27FC236}">
-                <a16:creationId xmlns:a16="http://schemas.microsoft.com/office/drawing/2014/main" id="{975E333F-A518-4643-8E10-7F70E6A8C263}"/>
+                <a16:creationId xmlns:a16="http://schemas.microsoft.com/office/drawing/2014/main" id="{A7F7B655-037C-458C-9AB3-8540FB42E2F2}"/>
               </a:ext>
             </a:extLst>
           </p:cNvPr>
@@ -14130,7 +14166,7 @@
           <p:cNvPr id="7" name="">
             <a:extLst xmlns:a="http://schemas.openxmlformats.org/drawingml/2006/main">
               <a:ext uri="{FF2B5EF4-FFF2-40B4-BE49-F238E27FC236}">
-                <a16:creationId xmlns:a16="http://schemas.microsoft.com/office/drawing/2014/main" id="{4D07FFCE-0482-4D66-9CEF-A630FC9EFE4B}"/>
+                <a16:creationId xmlns:a16="http://schemas.microsoft.com/office/drawing/2014/main" id="{A5623898-34EF-4EF8-A7D1-4EEF1CCAB774}"/>
               </a:ext>
             </a:extLst>
           </p:cNvPr>
@@ -14159,7 +14195,7 @@
           <p:cNvPr id="8" name="GO = TO / Q = 1,50Q / Q = € 1,50 per brood">
             <a:extLst xmlns:a="http://schemas.openxmlformats.org/drawingml/2006/main">
               <a:ext uri="{FF2B5EF4-FFF2-40B4-BE49-F238E27FC236}">
-                <a16:creationId xmlns:a16="http://schemas.microsoft.com/office/drawing/2014/main" id="{D82F53C9-55B8-4CBE-AD68-AC710901EF5E}"/>
+                <a16:creationId xmlns:a16="http://schemas.microsoft.com/office/drawing/2014/main" id="{376C351B-A789-426A-932B-3B5DB4CDB777}"/>
               </a:ext>
             </a:extLst>
           </p:cNvPr>
@@ -14216,7 +14252,7 @@
           <p:cNvPr id="9" name="Bij Q &gt; 0. Ieder brood brengt dezelfde prijs op.">
             <a:extLst xmlns:a="http://schemas.openxmlformats.org/drawingml/2006/main">
               <a:ext uri="{FF2B5EF4-FFF2-40B4-BE49-F238E27FC236}">
-                <a16:creationId xmlns:a16="http://schemas.microsoft.com/office/drawing/2014/main" id="{FCB6E6FD-59B5-43B0-B6E8-CF5F449126FA}"/>
+                <a16:creationId xmlns:a16="http://schemas.microsoft.com/office/drawing/2014/main" id="{970F4BF6-47AE-4171-8896-824BB9A6EC33}"/>
               </a:ext>
             </a:extLst>
           </p:cNvPr>
@@ -14271,7 +14307,7 @@
     </p:spTree>
     <p:extLst>
       <p:ext uri="{BB962C8B-B14F-4D97-AF65-F5344CB8AC3E}">
-        <p14:creationId xmlns:p14="http://schemas.microsoft.com/office/powerpoint/2010/main" val="470486803"/>
+        <p14:creationId xmlns:p14="http://schemas.microsoft.com/office/powerpoint/2010/main" val="1862775406"/>
       </p:ext>
     </p:extLst>
   </p:cSld>
@@ -14302,7 +14338,7 @@
           <p:cNvPr id="11" name="Opgave 8b · 500 broden">
             <a:extLst xmlns:a="http://schemas.openxmlformats.org/drawingml/2006/main">
               <a:ext uri="{FF2B5EF4-FFF2-40B4-BE49-F238E27FC236}">
-                <a16:creationId xmlns:a16="http://schemas.microsoft.com/office/drawing/2014/main" id="{026A9885-4CAF-4EB4-8F53-F773201DE026}"/>
+                <a16:creationId xmlns:a16="http://schemas.microsoft.com/office/drawing/2014/main" id="{8E9D34F6-A1BF-43CD-A7E3-62E09C4DEF8F}"/>
               </a:ext>
             </a:extLst>
           </p:cNvPr>
@@ -14359,7 +14395,7 @@
           <p:cNvPr id="2" name="">
             <a:extLst xmlns:a="http://schemas.openxmlformats.org/drawingml/2006/main">
               <a:ext uri="{FF2B5EF4-FFF2-40B4-BE49-F238E27FC236}">
-                <a16:creationId xmlns:a16="http://schemas.microsoft.com/office/drawing/2014/main" id="{DD9B4F7C-9F4C-4F58-A0FC-5C25818A5488}"/>
+                <a16:creationId xmlns:a16="http://schemas.microsoft.com/office/drawing/2014/main" id="{BB52E9FA-3AAD-49E5-B904-410B5FEC1B95}"/>
               </a:ext>
             </a:extLst>
           </p:cNvPr>
@@ -14388,7 +14424,7 @@
           <p:cNvPr id="3" name="§2.1.2 Opbrengsten, winst en break-even · Opgave 8 · Boekpag">
             <a:extLst xmlns:a="http://schemas.openxmlformats.org/drawingml/2006/main">
               <a:ext uri="{FF2B5EF4-FFF2-40B4-BE49-F238E27FC236}">
-                <a16:creationId xmlns:a16="http://schemas.microsoft.com/office/drawing/2014/main" id="{B1E538CA-8C3B-4DAE-9EA9-B7054974306B}"/>
+                <a16:creationId xmlns:a16="http://schemas.microsoft.com/office/drawing/2014/main" id="{2FB99C62-D3F0-489C-9A70-86619AFBE8ED}"/>
               </a:ext>
             </a:extLst>
           </p:cNvPr>
@@ -14445,7 +14481,7 @@
           <p:cNvPr id="4" name="19">
             <a:extLst xmlns:a="http://schemas.openxmlformats.org/drawingml/2006/main">
               <a:ext uri="{FF2B5EF4-FFF2-40B4-BE49-F238E27FC236}">
-                <a16:creationId xmlns:a16="http://schemas.microsoft.com/office/drawing/2014/main" id="{71BE325C-461D-42ED-B23C-81C9414F3C4A}"/>
+                <a16:creationId xmlns:a16="http://schemas.microsoft.com/office/drawing/2014/main" id="{7091B35D-6F8E-4538-8427-60AD4843EFA3}"/>
               </a:ext>
             </a:extLst>
           </p:cNvPr>
@@ -14502,7 +14538,7 @@
           <p:cNvPr id="5" name="Q = 500 broden per maand">
             <a:extLst xmlns:a="http://schemas.openxmlformats.org/drawingml/2006/main">
               <a:ext uri="{FF2B5EF4-FFF2-40B4-BE49-F238E27FC236}">
-                <a16:creationId xmlns:a16="http://schemas.microsoft.com/office/drawing/2014/main" id="{DFDA08E1-9CAC-47FB-A2B2-3652D6FB170E}"/>
+                <a16:creationId xmlns:a16="http://schemas.microsoft.com/office/drawing/2014/main" id="{E9FF006B-D860-4586-A511-62AFB4829900}"/>
               </a:ext>
             </a:extLst>
           </p:cNvPr>
@@ -14559,7 +14595,7 @@
           <p:cNvPr id="6" name="TO = 1,50 × 500 = € 750">
             <a:extLst xmlns:a="http://schemas.openxmlformats.org/drawingml/2006/main">
               <a:ext uri="{FF2B5EF4-FFF2-40B4-BE49-F238E27FC236}">
-                <a16:creationId xmlns:a16="http://schemas.microsoft.com/office/drawing/2014/main" id="{6766D754-4A9A-4416-932A-45BF85476013}"/>
+                <a16:creationId xmlns:a16="http://schemas.microsoft.com/office/drawing/2014/main" id="{AADCCFC3-D434-4518-939F-6690ED8E2616}"/>
               </a:ext>
             </a:extLst>
           </p:cNvPr>
@@ -14616,7 +14652,7 @@
           <p:cNvPr id="7" name="TK = 500 + 0,80 × 500 = € 900">
             <a:extLst xmlns:a="http://schemas.openxmlformats.org/drawingml/2006/main">
               <a:ext uri="{FF2B5EF4-FFF2-40B4-BE49-F238E27FC236}">
-                <a16:creationId xmlns:a16="http://schemas.microsoft.com/office/drawing/2014/main" id="{4BBEB04D-69F2-47FD-B703-8E07A4788568}"/>
+                <a16:creationId xmlns:a16="http://schemas.microsoft.com/office/drawing/2014/main" id="{BAE6EC25-0B38-4A5C-B0EF-21177C9B0543}"/>
               </a:ext>
             </a:extLst>
           </p:cNvPr>
@@ -14673,7 +14709,7 @@
           <p:cNvPr id="8" name="">
             <a:extLst xmlns:a="http://schemas.openxmlformats.org/drawingml/2006/main">
               <a:ext uri="{FF2B5EF4-FFF2-40B4-BE49-F238E27FC236}">
-                <a16:creationId xmlns:a16="http://schemas.microsoft.com/office/drawing/2014/main" id="{82359D71-5AAA-4F1C-B7C1-0AA142544DEC}"/>
+                <a16:creationId xmlns:a16="http://schemas.microsoft.com/office/drawing/2014/main" id="{EAF8CBE5-9A80-488E-ABEE-C4004FEA7B69}"/>
               </a:ext>
             </a:extLst>
           </p:cNvPr>
@@ -14702,7 +14738,7 @@
           <p:cNvPr id="9" name="Winst = 750 − 900 = −€ 150 per maand">
             <a:extLst xmlns:a="http://schemas.openxmlformats.org/drawingml/2006/main">
               <a:ext uri="{FF2B5EF4-FFF2-40B4-BE49-F238E27FC236}">
-                <a16:creationId xmlns:a16="http://schemas.microsoft.com/office/drawing/2014/main" id="{ACE477B8-E347-49E2-AE8F-0E199A7BC9DF}"/>
+                <a16:creationId xmlns:a16="http://schemas.microsoft.com/office/drawing/2014/main" id="{F15D3397-5FE7-4613-B59A-DA357AA1DAFA}"/>
               </a:ext>
             </a:extLst>
           </p:cNvPr>
@@ -14759,7 +14795,7 @@
           <p:cNvPr id="10" name="De opbrengst dekt niet alle kosten: € 150 verlies.">
             <a:extLst xmlns:a="http://schemas.openxmlformats.org/drawingml/2006/main">
               <a:ext uri="{FF2B5EF4-FFF2-40B4-BE49-F238E27FC236}">
-                <a16:creationId xmlns:a16="http://schemas.microsoft.com/office/drawing/2014/main" id="{A70A8056-514A-4100-B041-B5E3F347D8B3}"/>
+                <a16:creationId xmlns:a16="http://schemas.microsoft.com/office/drawing/2014/main" id="{97CC551F-8B30-44EE-8BB9-23683E133BD4}"/>
               </a:ext>
             </a:extLst>
           </p:cNvPr>
@@ -14814,7 +14850,7 @@
     </p:spTree>
     <p:extLst>
       <p:ext uri="{BB962C8B-B14F-4D97-AF65-F5344CB8AC3E}">
-        <p14:creationId xmlns:p14="http://schemas.microsoft.com/office/powerpoint/2010/main" val="287536542"/>
+        <p14:creationId xmlns:p14="http://schemas.microsoft.com/office/powerpoint/2010/main" val="213321070"/>
       </p:ext>
     </p:extLst>
   </p:cSld>
@@ -14845,7 +14881,7 @@
           <p:cNvPr id="13" name="Wat kun je na deze les?">
             <a:extLst xmlns:a="http://schemas.openxmlformats.org/drawingml/2006/main">
               <a:ext uri="{FF2B5EF4-FFF2-40B4-BE49-F238E27FC236}">
-                <a16:creationId xmlns:a16="http://schemas.microsoft.com/office/drawing/2014/main" id="{A0CA34B6-11D5-449B-B12E-FA8A78E5853D}"/>
+                <a16:creationId xmlns:a16="http://schemas.microsoft.com/office/drawing/2014/main" id="{5459F838-C9BB-4D2D-AAD4-71C6ED7AEB54}"/>
               </a:ext>
             </a:extLst>
           </p:cNvPr>
@@ -14902,7 +14938,7 @@
           <p:cNvPr id="2" name="">
             <a:extLst xmlns:a="http://schemas.openxmlformats.org/drawingml/2006/main">
               <a:ext uri="{FF2B5EF4-FFF2-40B4-BE49-F238E27FC236}">
-                <a16:creationId xmlns:a16="http://schemas.microsoft.com/office/drawing/2014/main" id="{A0C5C9FB-232C-4B6C-9D33-C83A60BAB029}"/>
+                <a16:creationId xmlns:a16="http://schemas.microsoft.com/office/drawing/2014/main" id="{6BB7F196-798F-495C-90D3-2AF18FBBA4CC}"/>
               </a:ext>
             </a:extLst>
           </p:cNvPr>
@@ -14931,7 +14967,7 @@
           <p:cNvPr id="3" name="§2.1.2 Opbrengsten, winst en break-even">
             <a:extLst xmlns:a="http://schemas.openxmlformats.org/drawingml/2006/main">
               <a:ext uri="{FF2B5EF4-FFF2-40B4-BE49-F238E27FC236}">
-                <a16:creationId xmlns:a16="http://schemas.microsoft.com/office/drawing/2014/main" id="{03206D9E-9FC9-4C1A-AE26-046339A13FC4}"/>
+                <a16:creationId xmlns:a16="http://schemas.microsoft.com/office/drawing/2014/main" id="{7BA57DE6-8C35-4F50-A448-687A967578D6}"/>
               </a:ext>
             </a:extLst>
           </p:cNvPr>
@@ -14988,7 +15024,7 @@
           <p:cNvPr id="4" name="2">
             <a:extLst xmlns:a="http://schemas.openxmlformats.org/drawingml/2006/main">
               <a:ext uri="{FF2B5EF4-FFF2-40B4-BE49-F238E27FC236}">
-                <a16:creationId xmlns:a16="http://schemas.microsoft.com/office/drawing/2014/main" id="{D821CA73-C05B-42A6-BEE8-EC7959F15644}"/>
+                <a16:creationId xmlns:a16="http://schemas.microsoft.com/office/drawing/2014/main" id="{2C61C44F-0203-4B7D-BE4A-446FF9B4D8FB}"/>
               </a:ext>
             </a:extLst>
           </p:cNvPr>
@@ -15045,7 +15081,7 @@
           <p:cNvPr id="5" name="Opbrengsten en winst">
             <a:extLst xmlns:a="http://schemas.openxmlformats.org/drawingml/2006/main">
               <a:ext uri="{FF2B5EF4-FFF2-40B4-BE49-F238E27FC236}">
-                <a16:creationId xmlns:a16="http://schemas.microsoft.com/office/drawing/2014/main" id="{35F207F5-CB57-4CAE-8396-E750A2B1CE4B}"/>
+                <a16:creationId xmlns:a16="http://schemas.microsoft.com/office/drawing/2014/main" id="{7592BDEC-58AB-4A1B-8002-8191A3D43BBE}"/>
               </a:ext>
             </a:extLst>
           </p:cNvPr>
@@ -15102,7 +15138,7 @@
           <p:cNvPr id="6" name="TO en GO berekenen, GO = P verklaren en kosten aftrekken.">
             <a:extLst xmlns:a="http://schemas.openxmlformats.org/drawingml/2006/main">
               <a:ext uri="{FF2B5EF4-FFF2-40B4-BE49-F238E27FC236}">
-                <a16:creationId xmlns:a16="http://schemas.microsoft.com/office/drawing/2014/main" id="{69FAB872-973D-427C-AB23-31CCA4C9BEE4}"/>
+                <a16:creationId xmlns:a16="http://schemas.microsoft.com/office/drawing/2014/main" id="{9063C2B7-7B62-480A-8B49-D57FF8260B47}"/>
               </a:ext>
             </a:extLst>
           </p:cNvPr>
@@ -15159,7 +15195,7 @@
           <p:cNvPr id="7" name="">
             <a:extLst xmlns:a="http://schemas.openxmlformats.org/drawingml/2006/main">
               <a:ext uri="{FF2B5EF4-FFF2-40B4-BE49-F238E27FC236}">
-                <a16:creationId xmlns:a16="http://schemas.microsoft.com/office/drawing/2014/main" id="{CF2A06A7-EB1E-4ACB-8F2D-1B11CFAF6A99}"/>
+                <a16:creationId xmlns:a16="http://schemas.microsoft.com/office/drawing/2014/main" id="{C2886075-D053-4F6A-8F76-60D9E261E28C}"/>
               </a:ext>
             </a:extLst>
           </p:cNvPr>
@@ -15188,7 +15224,7 @@
           <p:cNvPr id="8" name="Break-even">
             <a:extLst xmlns:a="http://schemas.openxmlformats.org/drawingml/2006/main">
               <a:ext uri="{FF2B5EF4-FFF2-40B4-BE49-F238E27FC236}">
-                <a16:creationId xmlns:a16="http://schemas.microsoft.com/office/drawing/2014/main" id="{50FC3B1A-D271-4F2B-A86B-E5CAF0EC63C9}"/>
+                <a16:creationId xmlns:a16="http://schemas.microsoft.com/office/drawing/2014/main" id="{743A11B3-CBF1-4EC2-86A4-934A5CD55143}"/>
               </a:ext>
             </a:extLst>
           </p:cNvPr>
@@ -15245,7 +15281,7 @@
           <p:cNvPr id="9" name="TO = TK oplossen en de uitkomst vertalen naar hele producten">
             <a:extLst xmlns:a="http://schemas.openxmlformats.org/drawingml/2006/main">
               <a:ext uri="{FF2B5EF4-FFF2-40B4-BE49-F238E27FC236}">
-                <a16:creationId xmlns:a16="http://schemas.microsoft.com/office/drawing/2014/main" id="{A7D1BDA7-614F-4A90-A151-774A7D1626C3}"/>
+                <a16:creationId xmlns:a16="http://schemas.microsoft.com/office/drawing/2014/main" id="{848BAB96-454D-4BFB-A54A-9F11A152B54F}"/>
               </a:ext>
             </a:extLst>
           </p:cNvPr>
@@ -15302,7 +15338,7 @@
           <p:cNvPr id="10" name="">
             <a:extLst xmlns:a="http://schemas.openxmlformats.org/drawingml/2006/main">
               <a:ext uri="{FF2B5EF4-FFF2-40B4-BE49-F238E27FC236}">
-                <a16:creationId xmlns:a16="http://schemas.microsoft.com/office/drawing/2014/main" id="{3A3A159C-966A-49DB-8F96-D69380643296}"/>
+                <a16:creationId xmlns:a16="http://schemas.microsoft.com/office/drawing/2014/main" id="{CE3F9099-74BB-4E8A-AEC8-88450F4043A4}"/>
               </a:ext>
             </a:extLst>
           </p:cNvPr>
@@ -15331,7 +15367,7 @@
           <p:cNvPr id="11" name="Tekenen en aflezen">
             <a:extLst xmlns:a="http://schemas.openxmlformats.org/drawingml/2006/main">
               <a:ext uri="{FF2B5EF4-FFF2-40B4-BE49-F238E27FC236}">
-                <a16:creationId xmlns:a16="http://schemas.microsoft.com/office/drawing/2014/main" id="{93147D7C-B5FA-4A03-9EAA-FA75A8DC9C34}"/>
+                <a16:creationId xmlns:a16="http://schemas.microsoft.com/office/drawing/2014/main" id="{15EA414D-3D7F-4DFA-BC3E-DC457C2B030C}"/>
               </a:ext>
             </a:extLst>
           </p:cNvPr>
@@ -15388,7 +15424,7 @@
           <p:cNvPr id="12" name="TK en TO tekenen, het snijpunt markeren&#10;en winst als vertica">
             <a:extLst xmlns:a="http://schemas.openxmlformats.org/drawingml/2006/main">
               <a:ext uri="{FF2B5EF4-FFF2-40B4-BE49-F238E27FC236}">
-                <a16:creationId xmlns:a16="http://schemas.microsoft.com/office/drawing/2014/main" id="{C9BA41CC-A22B-47FA-B506-9743B94B39F7}"/>
+                <a16:creationId xmlns:a16="http://schemas.microsoft.com/office/drawing/2014/main" id="{2F6CACDB-3108-434E-8CEB-1E47189FF512}"/>
               </a:ext>
             </a:extLst>
           </p:cNvPr>
@@ -15466,7 +15502,7 @@
     </p:spTree>
     <p:extLst>
       <p:ext uri="{BB962C8B-B14F-4D97-AF65-F5344CB8AC3E}">
-        <p14:creationId xmlns:p14="http://schemas.microsoft.com/office/powerpoint/2010/main" val="457290448"/>
+        <p14:creationId xmlns:p14="http://schemas.microsoft.com/office/powerpoint/2010/main" val="254951723"/>
       </p:ext>
     </p:extLst>
   </p:cSld>
@@ -15497,7 +15533,7 @@
           <p:cNvPr id="11" name="Opgave 8b · 1.000 broden">
             <a:extLst xmlns:a="http://schemas.openxmlformats.org/drawingml/2006/main">
               <a:ext uri="{FF2B5EF4-FFF2-40B4-BE49-F238E27FC236}">
-                <a16:creationId xmlns:a16="http://schemas.microsoft.com/office/drawing/2014/main" id="{7C32EEC1-67FA-48B6-AB3A-826D5870B48A}"/>
+                <a16:creationId xmlns:a16="http://schemas.microsoft.com/office/drawing/2014/main" id="{FB27234C-CD75-4C15-8B51-9359B4DB9CD9}"/>
               </a:ext>
             </a:extLst>
           </p:cNvPr>
@@ -15554,7 +15590,7 @@
           <p:cNvPr id="2" name="">
             <a:extLst xmlns:a="http://schemas.openxmlformats.org/drawingml/2006/main">
               <a:ext uri="{FF2B5EF4-FFF2-40B4-BE49-F238E27FC236}">
-                <a16:creationId xmlns:a16="http://schemas.microsoft.com/office/drawing/2014/main" id="{79D680F0-91CC-4A60-B6CF-03FB1F2841C1}"/>
+                <a16:creationId xmlns:a16="http://schemas.microsoft.com/office/drawing/2014/main" id="{D917C1E2-41FD-40B9-9B9B-14372C1B9BFF}"/>
               </a:ext>
             </a:extLst>
           </p:cNvPr>
@@ -15583,7 +15619,7 @@
           <p:cNvPr id="3" name="§2.1.2 Opbrengsten, winst en break-even · Opgave 8 · Boekpag">
             <a:extLst xmlns:a="http://schemas.openxmlformats.org/drawingml/2006/main">
               <a:ext uri="{FF2B5EF4-FFF2-40B4-BE49-F238E27FC236}">
-                <a16:creationId xmlns:a16="http://schemas.microsoft.com/office/drawing/2014/main" id="{5433EDA4-0547-4CD9-8172-AB5859DA03CC}"/>
+                <a16:creationId xmlns:a16="http://schemas.microsoft.com/office/drawing/2014/main" id="{CC65587A-8C84-41C3-B061-D25EA348B2CD}"/>
               </a:ext>
             </a:extLst>
           </p:cNvPr>
@@ -15640,7 +15676,7 @@
           <p:cNvPr id="4" name="20">
             <a:extLst xmlns:a="http://schemas.openxmlformats.org/drawingml/2006/main">
               <a:ext uri="{FF2B5EF4-FFF2-40B4-BE49-F238E27FC236}">
-                <a16:creationId xmlns:a16="http://schemas.microsoft.com/office/drawing/2014/main" id="{0CB1DF86-2597-4264-B3E0-C731D654D878}"/>
+                <a16:creationId xmlns:a16="http://schemas.microsoft.com/office/drawing/2014/main" id="{E7A9558B-0B1C-4EC0-9C49-3A4F74800AD2}"/>
               </a:ext>
             </a:extLst>
           </p:cNvPr>
@@ -15697,7 +15733,7 @@
           <p:cNvPr id="5" name="Q = 1.000 broden per maand">
             <a:extLst xmlns:a="http://schemas.openxmlformats.org/drawingml/2006/main">
               <a:ext uri="{FF2B5EF4-FFF2-40B4-BE49-F238E27FC236}">
-                <a16:creationId xmlns:a16="http://schemas.microsoft.com/office/drawing/2014/main" id="{646D35D0-C38F-4D0D-B658-FBD48DE5C218}"/>
+                <a16:creationId xmlns:a16="http://schemas.microsoft.com/office/drawing/2014/main" id="{23CB2D5C-B632-4847-9472-741285D8D503}"/>
               </a:ext>
             </a:extLst>
           </p:cNvPr>
@@ -15754,7 +15790,7 @@
           <p:cNvPr id="6" name="TO = 1,50 × 1.000 = € 1.500">
             <a:extLst xmlns:a="http://schemas.openxmlformats.org/drawingml/2006/main">
               <a:ext uri="{FF2B5EF4-FFF2-40B4-BE49-F238E27FC236}">
-                <a16:creationId xmlns:a16="http://schemas.microsoft.com/office/drawing/2014/main" id="{8CC982C7-A3E6-465C-88C5-BBCE5481286E}"/>
+                <a16:creationId xmlns:a16="http://schemas.microsoft.com/office/drawing/2014/main" id="{7164573D-02E3-4FBF-8F47-76BA0B54407A}"/>
               </a:ext>
             </a:extLst>
           </p:cNvPr>
@@ -15811,7 +15847,7 @@
           <p:cNvPr id="7" name="TK = 500 + 0,80 × 1.000 = € 1.300">
             <a:extLst xmlns:a="http://schemas.openxmlformats.org/drawingml/2006/main">
               <a:ext uri="{FF2B5EF4-FFF2-40B4-BE49-F238E27FC236}">
-                <a16:creationId xmlns:a16="http://schemas.microsoft.com/office/drawing/2014/main" id="{723D2F70-36D9-4283-A1A7-7007D18D33A0}"/>
+                <a16:creationId xmlns:a16="http://schemas.microsoft.com/office/drawing/2014/main" id="{1DAA4FB2-CDE8-4EC0-AA60-91125DB857B2}"/>
               </a:ext>
             </a:extLst>
           </p:cNvPr>
@@ -15868,7 +15904,7 @@
           <p:cNvPr id="8" name="">
             <a:extLst xmlns:a="http://schemas.openxmlformats.org/drawingml/2006/main">
               <a:ext uri="{FF2B5EF4-FFF2-40B4-BE49-F238E27FC236}">
-                <a16:creationId xmlns:a16="http://schemas.microsoft.com/office/drawing/2014/main" id="{F26ADBB5-BDEA-4324-838C-DDC1A5A42E2B}"/>
+                <a16:creationId xmlns:a16="http://schemas.microsoft.com/office/drawing/2014/main" id="{45EB6C05-8706-4D95-B7B1-AF46C90BBA7A}"/>
               </a:ext>
             </a:extLst>
           </p:cNvPr>
@@ -15897,7 +15933,7 @@
           <p:cNvPr id="9" name="Winst = 1.500 − 1.300 = € 200 per maand">
             <a:extLst xmlns:a="http://schemas.openxmlformats.org/drawingml/2006/main">
               <a:ext uri="{FF2B5EF4-FFF2-40B4-BE49-F238E27FC236}">
-                <a16:creationId xmlns:a16="http://schemas.microsoft.com/office/drawing/2014/main" id="{6B39E318-CDF7-45EB-9C68-4B3FC7942869}"/>
+                <a16:creationId xmlns:a16="http://schemas.microsoft.com/office/drawing/2014/main" id="{8B7F9E48-52B7-420B-96C6-D37581237AE4}"/>
               </a:ext>
             </a:extLst>
           </p:cNvPr>
@@ -15954,7 +15990,7 @@
           <p:cNvPr id="10" name="De opbrengst dekt alle kosten en laat € 200 over.">
             <a:extLst xmlns:a="http://schemas.openxmlformats.org/drawingml/2006/main">
               <a:ext uri="{FF2B5EF4-FFF2-40B4-BE49-F238E27FC236}">
-                <a16:creationId xmlns:a16="http://schemas.microsoft.com/office/drawing/2014/main" id="{4E7B4A62-F74F-4ACD-AE4F-FA29762CDF76}"/>
+                <a16:creationId xmlns:a16="http://schemas.microsoft.com/office/drawing/2014/main" id="{EFB37D3B-1F5F-4BCD-9387-5CC693EAA93A}"/>
               </a:ext>
             </a:extLst>
           </p:cNvPr>
@@ -16009,7 +16045,7 @@
     </p:spTree>
     <p:extLst>
       <p:ext uri="{BB962C8B-B14F-4D97-AF65-F5344CB8AC3E}">
-        <p14:creationId xmlns:p14="http://schemas.microsoft.com/office/powerpoint/2010/main" val="720459087"/>
+        <p14:creationId xmlns:p14="http://schemas.microsoft.com/office/powerpoint/2010/main" val="1277621342"/>
       </p:ext>
     </p:extLst>
   </p:cSld>
@@ -16040,7 +16076,7 @@
           <p:cNvPr id="14" name="Opgave 8c · De exacte break-evengrens">
             <a:extLst xmlns:a="http://schemas.openxmlformats.org/drawingml/2006/main">
               <a:ext uri="{FF2B5EF4-FFF2-40B4-BE49-F238E27FC236}">
-                <a16:creationId xmlns:a16="http://schemas.microsoft.com/office/drawing/2014/main" id="{9C36217D-5824-4B46-BAD6-985652006866}"/>
+                <a16:creationId xmlns:a16="http://schemas.microsoft.com/office/drawing/2014/main" id="{2F440E4E-FB10-45FA-86B0-10ACD027563A}"/>
               </a:ext>
             </a:extLst>
           </p:cNvPr>
@@ -16097,7 +16133,7 @@
           <p:cNvPr id="2" name="">
             <a:extLst xmlns:a="http://schemas.openxmlformats.org/drawingml/2006/main">
               <a:ext uri="{FF2B5EF4-FFF2-40B4-BE49-F238E27FC236}">
-                <a16:creationId xmlns:a16="http://schemas.microsoft.com/office/drawing/2014/main" id="{72B8C1E2-21B3-493E-B740-42CE34F41E13}"/>
+                <a16:creationId xmlns:a16="http://schemas.microsoft.com/office/drawing/2014/main" id="{B1D42498-CB63-49D3-94DF-33021A266932}"/>
               </a:ext>
             </a:extLst>
           </p:cNvPr>
@@ -16126,7 +16162,7 @@
           <p:cNvPr id="3" name="§2.1.2 Opbrengsten, winst en break-even · Opgave 8 · Boekpag">
             <a:extLst xmlns:a="http://schemas.openxmlformats.org/drawingml/2006/main">
               <a:ext uri="{FF2B5EF4-FFF2-40B4-BE49-F238E27FC236}">
-                <a16:creationId xmlns:a16="http://schemas.microsoft.com/office/drawing/2014/main" id="{049CA7D9-243D-4705-A0DD-4D6FB22FEF06}"/>
+                <a16:creationId xmlns:a16="http://schemas.microsoft.com/office/drawing/2014/main" id="{FF137DDE-5B0D-4D05-B35B-0E472DB6B9D4}"/>
               </a:ext>
             </a:extLst>
           </p:cNvPr>
@@ -16183,7 +16219,7 @@
           <p:cNvPr id="4" name="21">
             <a:extLst xmlns:a="http://schemas.openxmlformats.org/drawingml/2006/main">
               <a:ext uri="{FF2B5EF4-FFF2-40B4-BE49-F238E27FC236}">
-                <a16:creationId xmlns:a16="http://schemas.microsoft.com/office/drawing/2014/main" id="{70524C99-987D-43EF-B562-BEBDCEE8EFB6}"/>
+                <a16:creationId xmlns:a16="http://schemas.microsoft.com/office/drawing/2014/main" id="{EBC6F3DD-0CD3-47BD-8482-7147B9B7B2B1}"/>
               </a:ext>
             </a:extLst>
           </p:cNvPr>
@@ -16240,7 +16276,7 @@
           <p:cNvPr id="5" name="TO = TK">
             <a:extLst xmlns:a="http://schemas.openxmlformats.org/drawingml/2006/main">
               <a:ext uri="{FF2B5EF4-FFF2-40B4-BE49-F238E27FC236}">
-                <a16:creationId xmlns:a16="http://schemas.microsoft.com/office/drawing/2014/main" id="{4A764406-10AE-4A93-B84E-9BEEBD5F1607}"/>
+                <a16:creationId xmlns:a16="http://schemas.microsoft.com/office/drawing/2014/main" id="{864B491B-C182-4D5F-B530-6B70F73A6B71}"/>
               </a:ext>
             </a:extLst>
           </p:cNvPr>
@@ -16297,7 +16333,7 @@
           <p:cNvPr id="6" name="Opbrengst gelijk aan kosten">
             <a:extLst xmlns:a="http://schemas.openxmlformats.org/drawingml/2006/main">
               <a:ext uri="{FF2B5EF4-FFF2-40B4-BE49-F238E27FC236}">
-                <a16:creationId xmlns:a16="http://schemas.microsoft.com/office/drawing/2014/main" id="{0A12BBF1-88FF-46E5-B205-3364DD07833C}"/>
+                <a16:creationId xmlns:a16="http://schemas.microsoft.com/office/drawing/2014/main" id="{447A0C1F-3F16-41C0-82AD-AEDD19616DD9}"/>
               </a:ext>
             </a:extLst>
           </p:cNvPr>
@@ -16354,7 +16390,7 @@
           <p:cNvPr id="7" name="1,50Q = 500 + 0,80Q">
             <a:extLst xmlns:a="http://schemas.openxmlformats.org/drawingml/2006/main">
               <a:ext uri="{FF2B5EF4-FFF2-40B4-BE49-F238E27FC236}">
-                <a16:creationId xmlns:a16="http://schemas.microsoft.com/office/drawing/2014/main" id="{BD3A5A6A-BC1A-4CE8-941D-3E402A081ADF}"/>
+                <a16:creationId xmlns:a16="http://schemas.microsoft.com/office/drawing/2014/main" id="{6C8467E6-3422-4811-8EA8-98C48BDD13EF}"/>
               </a:ext>
             </a:extLst>
           </p:cNvPr>
@@ -16411,7 +16447,7 @@
           <p:cNvPr id="8" name="Functies invullen">
             <a:extLst xmlns:a="http://schemas.openxmlformats.org/drawingml/2006/main">
               <a:ext uri="{FF2B5EF4-FFF2-40B4-BE49-F238E27FC236}">
-                <a16:creationId xmlns:a16="http://schemas.microsoft.com/office/drawing/2014/main" id="{E00CE49A-0C00-4F6E-8A1E-3CF654F8C7C6}"/>
+                <a16:creationId xmlns:a16="http://schemas.microsoft.com/office/drawing/2014/main" id="{E7611424-5A36-4A23-9A66-F091EE86E8A2}"/>
               </a:ext>
             </a:extLst>
           </p:cNvPr>
@@ -16468,7 +16504,7 @@
           <p:cNvPr id="9" name="0,70Q = 500">
             <a:extLst xmlns:a="http://schemas.openxmlformats.org/drawingml/2006/main">
               <a:ext uri="{FF2B5EF4-FFF2-40B4-BE49-F238E27FC236}">
-                <a16:creationId xmlns:a16="http://schemas.microsoft.com/office/drawing/2014/main" id="{10BE53AC-545E-4260-99BF-D31328CCA424}"/>
+                <a16:creationId xmlns:a16="http://schemas.microsoft.com/office/drawing/2014/main" id="{9F0275E4-A538-42D4-9E1F-E90A4977C8C8}"/>
               </a:ext>
             </a:extLst>
           </p:cNvPr>
@@ -16525,7 +16561,7 @@
           <p:cNvPr id="10" name="Aan beide kanten 0,80Q aftrekken">
             <a:extLst xmlns:a="http://schemas.openxmlformats.org/drawingml/2006/main">
               <a:ext uri="{FF2B5EF4-FFF2-40B4-BE49-F238E27FC236}">
-                <a16:creationId xmlns:a16="http://schemas.microsoft.com/office/drawing/2014/main" id="{F39E9EEF-984A-4282-B904-F45B5B4B0024}"/>
+                <a16:creationId xmlns:a16="http://schemas.microsoft.com/office/drawing/2014/main" id="{C38BEDC0-D258-43ED-90FB-C1FC476B4343}"/>
               </a:ext>
             </a:extLst>
           </p:cNvPr>
@@ -16582,7 +16618,7 @@
           <p:cNvPr id="11" name="Q = 500 / 0,70 = 714,285714…">
             <a:extLst xmlns:a="http://schemas.openxmlformats.org/drawingml/2006/main">
               <a:ext uri="{FF2B5EF4-FFF2-40B4-BE49-F238E27FC236}">
-                <a16:creationId xmlns:a16="http://schemas.microsoft.com/office/drawing/2014/main" id="{1525DC48-1B75-4F92-A17D-25150B6CB5E7}"/>
+                <a16:creationId xmlns:a16="http://schemas.microsoft.com/office/drawing/2014/main" id="{0029FBBB-2431-4436-B533-4B5365B0906E}"/>
               </a:ext>
             </a:extLst>
           </p:cNvPr>
@@ -16639,7 +16675,7 @@
           <p:cNvPr id="12" name="Delen door 0,70">
             <a:extLst xmlns:a="http://schemas.openxmlformats.org/drawingml/2006/main">
               <a:ext uri="{FF2B5EF4-FFF2-40B4-BE49-F238E27FC236}">
-                <a16:creationId xmlns:a16="http://schemas.microsoft.com/office/drawing/2014/main" id="{F8F41C7C-0DFE-4F6A-8478-51D4282FD8B2}"/>
+                <a16:creationId xmlns:a16="http://schemas.microsoft.com/office/drawing/2014/main" id="{D8475D0B-0AC3-4045-9093-4CA0973437D3}"/>
               </a:ext>
             </a:extLst>
           </p:cNvPr>
@@ -16696,7 +16732,7 @@
           <p:cNvPr id="13" name="Volgens de rechte lijnen: ongeveer 714,29 broden per maand">
             <a:extLst xmlns:a="http://schemas.openxmlformats.org/drawingml/2006/main">
               <a:ext uri="{FF2B5EF4-FFF2-40B4-BE49-F238E27FC236}">
-                <a16:creationId xmlns:a16="http://schemas.microsoft.com/office/drawing/2014/main" id="{44CE3FC7-D9D1-438E-B781-C48E6EA0CAE7}"/>
+                <a16:creationId xmlns:a16="http://schemas.microsoft.com/office/drawing/2014/main" id="{FE609EB2-4507-4AA3-937B-B61FDCCD0CB5}"/>
               </a:ext>
             </a:extLst>
           </p:cNvPr>
@@ -16751,7 +16787,7 @@
     </p:spTree>
     <p:extLst>
       <p:ext uri="{BB962C8B-B14F-4D97-AF65-F5344CB8AC3E}">
-        <p14:creationId xmlns:p14="http://schemas.microsoft.com/office/powerpoint/2010/main" val="592084016"/>
+        <p14:creationId xmlns:p14="http://schemas.microsoft.com/office/powerpoint/2010/main" val="283544736"/>
       </p:ext>
     </p:extLst>
   </p:cSld>
@@ -16782,7 +16818,7 @@
           <p:cNvPr id="9" name="Opgave 8c · Het eerste gehele aantal">
             <a:extLst xmlns:a="http://schemas.openxmlformats.org/drawingml/2006/main">
               <a:ext uri="{FF2B5EF4-FFF2-40B4-BE49-F238E27FC236}">
-                <a16:creationId xmlns:a16="http://schemas.microsoft.com/office/drawing/2014/main" id="{10FD62F4-73F3-46D1-9F69-ABB99BBFB6CE}"/>
+                <a16:creationId xmlns:a16="http://schemas.microsoft.com/office/drawing/2014/main" id="{10DF8E35-614B-4C18-84B5-BF6E77640504}"/>
               </a:ext>
             </a:extLst>
           </p:cNvPr>
@@ -16839,7 +16875,7 @@
           <p:cNvPr id="2" name="">
             <a:extLst xmlns:a="http://schemas.openxmlformats.org/drawingml/2006/main">
               <a:ext uri="{FF2B5EF4-FFF2-40B4-BE49-F238E27FC236}">
-                <a16:creationId xmlns:a16="http://schemas.microsoft.com/office/drawing/2014/main" id="{8E69D06A-3FA6-4951-86E4-F979908D3C10}"/>
+                <a16:creationId xmlns:a16="http://schemas.microsoft.com/office/drawing/2014/main" id="{B8097A31-7273-4274-A6AE-D77BED512C78}"/>
               </a:ext>
             </a:extLst>
           </p:cNvPr>
@@ -16868,7 +16904,7 @@
           <p:cNvPr id="3" name="§2.1.2 Opbrengsten, winst en break-even · Opgave 8 · Boekpag">
             <a:extLst xmlns:a="http://schemas.openxmlformats.org/drawingml/2006/main">
               <a:ext uri="{FF2B5EF4-FFF2-40B4-BE49-F238E27FC236}">
-                <a16:creationId xmlns:a16="http://schemas.microsoft.com/office/drawing/2014/main" id="{DB2CE713-630B-435C-8078-A937F3CE4C76}"/>
+                <a16:creationId xmlns:a16="http://schemas.microsoft.com/office/drawing/2014/main" id="{34B88BC3-3723-45D1-BB5B-D1D563C95886}"/>
               </a:ext>
             </a:extLst>
           </p:cNvPr>
@@ -16925,7 +16961,7 @@
           <p:cNvPr id="4" name="22">
             <a:extLst xmlns:a="http://schemas.openxmlformats.org/drawingml/2006/main">
               <a:ext uri="{FF2B5EF4-FFF2-40B4-BE49-F238E27FC236}">
-                <a16:creationId xmlns:a16="http://schemas.microsoft.com/office/drawing/2014/main" id="{3213ADE6-A8CA-496A-BA61-3CD7C6CA6889}"/>
+                <a16:creationId xmlns:a16="http://schemas.microsoft.com/office/drawing/2014/main" id="{0F7FA01B-7E23-4439-B402-B0E11C990743}"/>
               </a:ext>
             </a:extLst>
           </p:cNvPr>
@@ -16982,7 +17018,7 @@
           <p:cNvPr id="5" name="Winst = TO − TK = 0,70Q − 500">
             <a:extLst xmlns:a="http://schemas.openxmlformats.org/drawingml/2006/main">
               <a:ext uri="{FF2B5EF4-FFF2-40B4-BE49-F238E27FC236}">
-                <a16:creationId xmlns:a16="http://schemas.microsoft.com/office/drawing/2014/main" id="{3FE13111-548B-4227-8183-7025668E9E89}"/>
+                <a16:creationId xmlns:a16="http://schemas.microsoft.com/office/drawing/2014/main" id="{62164D40-1AFC-46F9-9E6C-111E822D3D51}"/>
               </a:ext>
             </a:extLst>
           </p:cNvPr>
@@ -17284,7 +17320,7 @@
           <p:cNvPr id="7" name="715 broden per maand: het eerste aantal zonder verlies">
             <a:extLst xmlns:a="http://schemas.openxmlformats.org/drawingml/2006/main">
               <a:ext uri="{FF2B5EF4-FFF2-40B4-BE49-F238E27FC236}">
-                <a16:creationId xmlns:a16="http://schemas.microsoft.com/office/drawing/2014/main" id="{5FE2D720-9C9B-4BE3-8730-CC7F3C4B0666}"/>
+                <a16:creationId xmlns:a16="http://schemas.microsoft.com/office/drawing/2014/main" id="{3FE60080-96F1-41C1-B012-8430F1B0C447}"/>
               </a:ext>
             </a:extLst>
           </p:cNvPr>
@@ -17341,7 +17377,7 @@
           <p:cNvPr id="8" name="715 ≤ 1.000, dus dit past binnen de capaciteit.">
             <a:extLst xmlns:a="http://schemas.openxmlformats.org/drawingml/2006/main">
               <a:ext uri="{FF2B5EF4-FFF2-40B4-BE49-F238E27FC236}">
-                <a16:creationId xmlns:a16="http://schemas.microsoft.com/office/drawing/2014/main" id="{6CA7161F-E9E4-4F80-8CFA-68EE23FB06A6}"/>
+                <a16:creationId xmlns:a16="http://schemas.microsoft.com/office/drawing/2014/main" id="{4405C2C4-590E-4755-ACDB-E02987F554FC}"/>
               </a:ext>
             </a:extLst>
           </p:cNvPr>
@@ -17396,7 +17432,7 @@
     </p:spTree>
     <p:extLst>
       <p:ext uri="{BB962C8B-B14F-4D97-AF65-F5344CB8AC3E}">
-        <p14:creationId xmlns:p14="http://schemas.microsoft.com/office/powerpoint/2010/main" val="1329422476"/>
+        <p14:creationId xmlns:p14="http://schemas.microsoft.com/office/powerpoint/2010/main" val="111767220"/>
       </p:ext>
     </p:extLst>
   </p:cSld>
@@ -17427,7 +17463,7 @@
           <p:cNvPr id="9" name="Opgave 8d · Punten voor de grafiek">
             <a:extLst xmlns:a="http://schemas.openxmlformats.org/drawingml/2006/main">
               <a:ext uri="{FF2B5EF4-FFF2-40B4-BE49-F238E27FC236}">
-                <a16:creationId xmlns:a16="http://schemas.microsoft.com/office/drawing/2014/main" id="{6D9B87D7-D7BB-4AD3-8750-004B7647A25B}"/>
+                <a16:creationId xmlns:a16="http://schemas.microsoft.com/office/drawing/2014/main" id="{A6396AA5-CE5F-4878-8D88-FFC9802EF28C}"/>
               </a:ext>
             </a:extLst>
           </p:cNvPr>
@@ -17484,7 +17520,7 @@
           <p:cNvPr id="2" name="">
             <a:extLst xmlns:a="http://schemas.openxmlformats.org/drawingml/2006/main">
               <a:ext uri="{FF2B5EF4-FFF2-40B4-BE49-F238E27FC236}">
-                <a16:creationId xmlns:a16="http://schemas.microsoft.com/office/drawing/2014/main" id="{D36C7298-08B3-45DF-A4C2-C9106792F3A9}"/>
+                <a16:creationId xmlns:a16="http://schemas.microsoft.com/office/drawing/2014/main" id="{0A7C7EBC-6C33-4EDE-8D4C-51BA50524C6C}"/>
               </a:ext>
             </a:extLst>
           </p:cNvPr>
@@ -17513,7 +17549,7 @@
           <p:cNvPr id="3" name="§2.1.2 Opbrengsten, winst en break-even · Opgave 8 · Boekpag">
             <a:extLst xmlns:a="http://schemas.openxmlformats.org/drawingml/2006/main">
               <a:ext uri="{FF2B5EF4-FFF2-40B4-BE49-F238E27FC236}">
-                <a16:creationId xmlns:a16="http://schemas.microsoft.com/office/drawing/2014/main" id="{B73BB13A-A377-4EC4-9BA9-5B691E868689}"/>
+                <a16:creationId xmlns:a16="http://schemas.microsoft.com/office/drawing/2014/main" id="{0290C391-1051-468E-AC6B-BEBE9006CDF5}"/>
               </a:ext>
             </a:extLst>
           </p:cNvPr>
@@ -17570,7 +17606,7 @@
           <p:cNvPr id="4" name="23">
             <a:extLst xmlns:a="http://schemas.openxmlformats.org/drawingml/2006/main">
               <a:ext uri="{FF2B5EF4-FFF2-40B4-BE49-F238E27FC236}">
-                <a16:creationId xmlns:a16="http://schemas.microsoft.com/office/drawing/2014/main" id="{30B07124-933A-4917-8928-98FB1CDEC86D}"/>
+                <a16:creationId xmlns:a16="http://schemas.microsoft.com/office/drawing/2014/main" id="{9A6627EF-8B88-4047-96BD-7029A967C140}"/>
               </a:ext>
             </a:extLst>
           </p:cNvPr>
@@ -17872,7 +17908,7 @@
           <p:cNvPr id="6" name="Horizontaal: Q, broden per maand">
             <a:extLst xmlns:a="http://schemas.openxmlformats.org/drawingml/2006/main">
               <a:ext uri="{FF2B5EF4-FFF2-40B4-BE49-F238E27FC236}">
-                <a16:creationId xmlns:a16="http://schemas.microsoft.com/office/drawing/2014/main" id="{85EC6865-C2A8-4EE9-B479-E62BCA92543D}"/>
+                <a16:creationId xmlns:a16="http://schemas.microsoft.com/office/drawing/2014/main" id="{8302E549-D92E-4DC1-8314-50AA4F41AAD0}"/>
               </a:ext>
             </a:extLst>
           </p:cNvPr>
@@ -17929,7 +17965,7 @@
           <p:cNvPr id="7" name="Verticaal: TO en TK, euro per maand">
             <a:extLst xmlns:a="http://schemas.openxmlformats.org/drawingml/2006/main">
               <a:ext uri="{FF2B5EF4-FFF2-40B4-BE49-F238E27FC236}">
-                <a16:creationId xmlns:a16="http://schemas.microsoft.com/office/drawing/2014/main" id="{7DAAA0B4-7F55-4AF3-874A-A6D120822944}"/>
+                <a16:creationId xmlns:a16="http://schemas.microsoft.com/office/drawing/2014/main" id="{2A2B5183-7EC1-4D4D-8CEE-E74852327A3F}"/>
               </a:ext>
             </a:extLst>
           </p:cNvPr>
@@ -17986,7 +18022,7 @@
           <p:cNvPr id="8" name="De lijnen stoppen bij 1.000 broden per maand.">
             <a:extLst xmlns:a="http://schemas.openxmlformats.org/drawingml/2006/main">
               <a:ext uri="{FF2B5EF4-FFF2-40B4-BE49-F238E27FC236}">
-                <a16:creationId xmlns:a16="http://schemas.microsoft.com/office/drawing/2014/main" id="{67A2A9DC-8106-4DBF-A450-0F8545F33EDC}"/>
+                <a16:creationId xmlns:a16="http://schemas.microsoft.com/office/drawing/2014/main" id="{827066B4-B252-40DA-B0BE-DC4A0766D3DA}"/>
               </a:ext>
             </a:extLst>
           </p:cNvPr>
@@ -18041,7 +18077,7 @@
     </p:spTree>
     <p:extLst>
       <p:ext uri="{BB962C8B-B14F-4D97-AF65-F5344CB8AC3E}">
-        <p14:creationId xmlns:p14="http://schemas.microsoft.com/office/powerpoint/2010/main" val="815083449"/>
+        <p14:creationId xmlns:p14="http://schemas.microsoft.com/office/powerpoint/2010/main" val="1519898008"/>
       </p:ext>
     </p:extLst>
   </p:cSld>
@@ -18072,7 +18108,7 @@
           <p:cNvPr id="9" name="Opgave 8d · Eerst TK">
             <a:extLst xmlns:a="http://schemas.openxmlformats.org/drawingml/2006/main">
               <a:ext uri="{FF2B5EF4-FFF2-40B4-BE49-F238E27FC236}">
-                <a16:creationId xmlns:a16="http://schemas.microsoft.com/office/drawing/2014/main" id="{CD12388B-AEBE-4A10-9487-177411E37CFE}"/>
+                <a16:creationId xmlns:a16="http://schemas.microsoft.com/office/drawing/2014/main" id="{86C62981-3111-4143-A164-A60DB82B184D}"/>
               </a:ext>
             </a:extLst>
           </p:cNvPr>
@@ -18129,7 +18165,7 @@
           <p:cNvPr id="2" name="">
             <a:extLst xmlns:a="http://schemas.openxmlformats.org/drawingml/2006/main">
               <a:ext uri="{FF2B5EF4-FFF2-40B4-BE49-F238E27FC236}">
-                <a16:creationId xmlns:a16="http://schemas.microsoft.com/office/drawing/2014/main" id="{D34E3EC6-804E-43F9-B3A2-270D16E2DD9C}"/>
+                <a16:creationId xmlns:a16="http://schemas.microsoft.com/office/drawing/2014/main" id="{26DF6338-62F3-4B0F-8559-30D361AE738C}"/>
               </a:ext>
             </a:extLst>
           </p:cNvPr>
@@ -18158,7 +18194,7 @@
           <p:cNvPr id="3" name="§2.1.2 Opbrengsten, winst en break-even · Opgave 8 · Boekpag">
             <a:extLst xmlns:a="http://schemas.openxmlformats.org/drawingml/2006/main">
               <a:ext uri="{FF2B5EF4-FFF2-40B4-BE49-F238E27FC236}">
-                <a16:creationId xmlns:a16="http://schemas.microsoft.com/office/drawing/2014/main" id="{F54613E9-34DF-4B05-B38F-6493AFBC310F}"/>
+                <a16:creationId xmlns:a16="http://schemas.microsoft.com/office/drawing/2014/main" id="{A372F630-1281-41D3-AA9D-C47BDA570AAC}"/>
               </a:ext>
             </a:extLst>
           </p:cNvPr>
@@ -18215,7 +18251,7 @@
           <p:cNvPr id="4" name="24">
             <a:extLst xmlns:a="http://schemas.openxmlformats.org/drawingml/2006/main">
               <a:ext uri="{FF2B5EF4-FFF2-40B4-BE49-F238E27FC236}">
-                <a16:creationId xmlns:a16="http://schemas.microsoft.com/office/drawing/2014/main" id="{447D0441-E84C-4625-9301-2B3E40DEE822}"/>
+                <a16:creationId xmlns:a16="http://schemas.microsoft.com/office/drawing/2014/main" id="{11908978-9293-4470-8867-8F5B368FE3E7}"/>
               </a:ext>
             </a:extLst>
           </p:cNvPr>
@@ -18279,7 +18315,7 @@
         </p:xfrm>
         <a:graphic xmlns:a="http://schemas.openxmlformats.org/drawingml/2006/main">
           <a:graphicData uri="http://schemas.openxmlformats.org/drawingml/2006/chart">
-            <c:chart xmlns:r="http://schemas.openxmlformats.org/officeDocument/2006/relationships" xmlns:c="http://schemas.openxmlformats.org/drawingml/2006/chart" r:id="R6cb5919f93c047ae"/>
+            <c:chart xmlns:r="http://schemas.openxmlformats.org/officeDocument/2006/relationships" xmlns:c="http://schemas.openxmlformats.org/drawingml/2006/chart" r:id="Re522a6636771479d"/>
           </a:graphicData>
         </a:graphic>
       </p:graphicFrame>
@@ -18288,7 +18324,7 @@
           <p:cNvPr id="6" name="TK = 500 + 0,80Q">
             <a:extLst xmlns:a="http://schemas.openxmlformats.org/drawingml/2006/main">
               <a:ext uri="{FF2B5EF4-FFF2-40B4-BE49-F238E27FC236}">
-                <a16:creationId xmlns:a16="http://schemas.microsoft.com/office/drawing/2014/main" id="{68A5A6CF-4C57-4148-AD0B-DE84B7898C31}"/>
+                <a16:creationId xmlns:a16="http://schemas.microsoft.com/office/drawing/2014/main" id="{40276F02-4F75-4962-8E40-C70240F2E544}"/>
               </a:ext>
             </a:extLst>
           </p:cNvPr>
@@ -18345,7 +18381,7 @@
           <p:cNvPr id="7" name="Bij Q = 0:&#10;€ 500 kosten.">
             <a:extLst xmlns:a="http://schemas.openxmlformats.org/drawingml/2006/main">
               <a:ext uri="{FF2B5EF4-FFF2-40B4-BE49-F238E27FC236}">
-                <a16:creationId xmlns:a16="http://schemas.microsoft.com/office/drawing/2014/main" id="{D4A0F208-9DEE-4BD2-90F1-A8371D25F9DA}"/>
+                <a16:creationId xmlns:a16="http://schemas.microsoft.com/office/drawing/2014/main" id="{8325661A-2E4B-4D88-86A7-2BB52EAE21FB}"/>
               </a:ext>
             </a:extLst>
           </p:cNvPr>
@@ -18425,7 +18461,7 @@
           <p:cNvPr id="8" name="Capaciteit:&#10;1.000 broden&#10;per maand">
             <a:extLst xmlns:a="http://schemas.openxmlformats.org/drawingml/2006/main">
               <a:ext uri="{FF2B5EF4-FFF2-40B4-BE49-F238E27FC236}">
-                <a16:creationId xmlns:a16="http://schemas.microsoft.com/office/drawing/2014/main" id="{78126415-C0D6-4D5E-A5BF-94B8EA4C1851}"/>
+                <a16:creationId xmlns:a16="http://schemas.microsoft.com/office/drawing/2014/main" id="{626B9C06-9DC1-434E-96C2-5F148D382C8C}"/>
               </a:ext>
             </a:extLst>
           </p:cNvPr>
@@ -18526,7 +18562,7 @@
     </p:spTree>
     <p:extLst>
       <p:ext uri="{BB962C8B-B14F-4D97-AF65-F5344CB8AC3E}">
-        <p14:creationId xmlns:p14="http://schemas.microsoft.com/office/powerpoint/2010/main" val="1834960421"/>
+        <p14:creationId xmlns:p14="http://schemas.microsoft.com/office/powerpoint/2010/main" val="1168531762"/>
       </p:ext>
     </p:extLst>
   </p:cSld>
@@ -18557,7 +18593,7 @@
           <p:cNvPr id="9" name="Opgave 8d · TO en het snijpunt">
             <a:extLst xmlns:a="http://schemas.openxmlformats.org/drawingml/2006/main">
               <a:ext uri="{FF2B5EF4-FFF2-40B4-BE49-F238E27FC236}">
-                <a16:creationId xmlns:a16="http://schemas.microsoft.com/office/drawing/2014/main" id="{2140D2F1-2639-4BC6-AFB3-629FF7C1E2BE}"/>
+                <a16:creationId xmlns:a16="http://schemas.microsoft.com/office/drawing/2014/main" id="{F980DAB2-89EB-47B7-8317-E135CE0D24C7}"/>
               </a:ext>
             </a:extLst>
           </p:cNvPr>
@@ -18614,7 +18650,7 @@
           <p:cNvPr id="2" name="">
             <a:extLst xmlns:a="http://schemas.openxmlformats.org/drawingml/2006/main">
               <a:ext uri="{FF2B5EF4-FFF2-40B4-BE49-F238E27FC236}">
-                <a16:creationId xmlns:a16="http://schemas.microsoft.com/office/drawing/2014/main" id="{B1799AA0-8369-4AF4-81E2-266AC6EB06B2}"/>
+                <a16:creationId xmlns:a16="http://schemas.microsoft.com/office/drawing/2014/main" id="{5B30B2DF-4930-493F-8900-C4E2D234053B}"/>
               </a:ext>
             </a:extLst>
           </p:cNvPr>
@@ -18643,7 +18679,7 @@
           <p:cNvPr id="3" name="§2.1.2 Opbrengsten, winst en break-even · Opgave 8 · Boekpag">
             <a:extLst xmlns:a="http://schemas.openxmlformats.org/drawingml/2006/main">
               <a:ext uri="{FF2B5EF4-FFF2-40B4-BE49-F238E27FC236}">
-                <a16:creationId xmlns:a16="http://schemas.microsoft.com/office/drawing/2014/main" id="{6928720A-CF3D-4F75-B271-A7CE576461A0}"/>
+                <a16:creationId xmlns:a16="http://schemas.microsoft.com/office/drawing/2014/main" id="{180BFAF9-2E4A-4E24-8673-92801EE4BF0A}"/>
               </a:ext>
             </a:extLst>
           </p:cNvPr>
@@ -18700,7 +18736,7 @@
           <p:cNvPr id="4" name="25">
             <a:extLst xmlns:a="http://schemas.openxmlformats.org/drawingml/2006/main">
               <a:ext uri="{FF2B5EF4-FFF2-40B4-BE49-F238E27FC236}">
-                <a16:creationId xmlns:a16="http://schemas.microsoft.com/office/drawing/2014/main" id="{DBB56F24-F1FA-4355-8E79-C6A31BA2A03D}"/>
+                <a16:creationId xmlns:a16="http://schemas.microsoft.com/office/drawing/2014/main" id="{179546A5-7454-49DB-A81E-C8DC3CBAC996}"/>
               </a:ext>
             </a:extLst>
           </p:cNvPr>
@@ -18764,7 +18800,7 @@
         </p:xfrm>
         <a:graphic xmlns:a="http://schemas.openxmlformats.org/drawingml/2006/main">
           <a:graphicData uri="http://schemas.openxmlformats.org/drawingml/2006/chart">
-            <c:chart xmlns:r="http://schemas.openxmlformats.org/officeDocument/2006/relationships" xmlns:c="http://schemas.openxmlformats.org/drawingml/2006/chart" r:id="Re47e3c58b3b54cca"/>
+            <c:chart xmlns:r="http://schemas.openxmlformats.org/officeDocument/2006/relationships" xmlns:c="http://schemas.openxmlformats.org/drawingml/2006/chart" r:id="Rbe5c9ce5b2f64de0"/>
           </a:graphicData>
         </a:graphic>
       </p:graphicFrame>
@@ -18773,7 +18809,7 @@
           <p:cNvPr id="6" name="Break-even">
             <a:extLst xmlns:a="http://schemas.openxmlformats.org/drawingml/2006/main">
               <a:ext uri="{FF2B5EF4-FFF2-40B4-BE49-F238E27FC236}">
-                <a16:creationId xmlns:a16="http://schemas.microsoft.com/office/drawing/2014/main" id="{0DB83DE3-855E-4517-8AA3-9D187DB97CD2}"/>
+                <a16:creationId xmlns:a16="http://schemas.microsoft.com/office/drawing/2014/main" id="{8569B8A7-6703-4C5B-B088-02B0CB706D8D}"/>
               </a:ext>
             </a:extLst>
           </p:cNvPr>
@@ -18830,7 +18866,7 @@
           <p:cNvPr id="7" name="Q ≈ 714,29&#10;TO = TK&#10;≈ € 1.071,43">
             <a:extLst xmlns:a="http://schemas.openxmlformats.org/drawingml/2006/main">
               <a:ext uri="{FF2B5EF4-FFF2-40B4-BE49-F238E27FC236}">
-                <a16:creationId xmlns:a16="http://schemas.microsoft.com/office/drawing/2014/main" id="{04872500-97F9-44BB-9661-F31B4C6B256B}"/>
+                <a16:creationId xmlns:a16="http://schemas.microsoft.com/office/drawing/2014/main" id="{B465B078-BB54-474C-A90E-DB565B17B167}"/>
               </a:ext>
             </a:extLst>
           </p:cNvPr>
@@ -18933,7 +18969,7 @@
           <p:cNvPr id="8" name="Links: verlies&#10;TO &lt; TK&#10;&#10;Rechts: winst&#10;TO &gt; TK">
             <a:extLst xmlns:a="http://schemas.openxmlformats.org/drawingml/2006/main">
               <a:ext uri="{FF2B5EF4-FFF2-40B4-BE49-F238E27FC236}">
-                <a16:creationId xmlns:a16="http://schemas.microsoft.com/office/drawing/2014/main" id="{AF56A11E-2E31-4E3E-8C1B-494AB9555E7D}"/>
+                <a16:creationId xmlns:a16="http://schemas.microsoft.com/office/drawing/2014/main" id="{97D77AD1-68E4-4ADF-B333-A36A9E294C9B}"/>
               </a:ext>
             </a:extLst>
           </p:cNvPr>
@@ -19062,7 +19098,7 @@
     </p:spTree>
     <p:extLst>
       <p:ext uri="{BB962C8B-B14F-4D97-AF65-F5344CB8AC3E}">
-        <p14:creationId xmlns:p14="http://schemas.microsoft.com/office/powerpoint/2010/main" val="926393557"/>
+        <p14:creationId xmlns:p14="http://schemas.microsoft.com/office/powerpoint/2010/main" val="614207351"/>
       </p:ext>
     </p:extLst>
   </p:cSld>
@@ -19093,7 +19129,7 @@
           <p:cNvPr id="9" name="Opgave 8d · Winst als verticale afstand">
             <a:extLst xmlns:a="http://schemas.openxmlformats.org/drawingml/2006/main">
               <a:ext uri="{FF2B5EF4-FFF2-40B4-BE49-F238E27FC236}">
-                <a16:creationId xmlns:a16="http://schemas.microsoft.com/office/drawing/2014/main" id="{82E8BD05-FD9F-4364-B8D6-12796721B6CF}"/>
+                <a16:creationId xmlns:a16="http://schemas.microsoft.com/office/drawing/2014/main" id="{70534C71-CCDE-4711-8313-3418D0B11C40}"/>
               </a:ext>
             </a:extLst>
           </p:cNvPr>
@@ -19150,7 +19186,7 @@
           <p:cNvPr id="2" name="">
             <a:extLst xmlns:a="http://schemas.openxmlformats.org/drawingml/2006/main">
               <a:ext uri="{FF2B5EF4-FFF2-40B4-BE49-F238E27FC236}">
-                <a16:creationId xmlns:a16="http://schemas.microsoft.com/office/drawing/2014/main" id="{E341EF12-1156-401B-BAF1-4938800DA651}"/>
+                <a16:creationId xmlns:a16="http://schemas.microsoft.com/office/drawing/2014/main" id="{DC736C7B-C7A8-4CD2-B2B9-9F624E19331E}"/>
               </a:ext>
             </a:extLst>
           </p:cNvPr>
@@ -19179,7 +19215,7 @@
           <p:cNvPr id="3" name="§2.1.2 Opbrengsten, winst en break-even · Opgave 8 · Boekpag">
             <a:extLst xmlns:a="http://schemas.openxmlformats.org/drawingml/2006/main">
               <a:ext uri="{FF2B5EF4-FFF2-40B4-BE49-F238E27FC236}">
-                <a16:creationId xmlns:a16="http://schemas.microsoft.com/office/drawing/2014/main" id="{29CBB630-2F6F-4B2A-AC52-7C5658C51EE8}"/>
+                <a16:creationId xmlns:a16="http://schemas.microsoft.com/office/drawing/2014/main" id="{9E19F069-70A7-4747-80A4-A5BE1DBDB623}"/>
               </a:ext>
             </a:extLst>
           </p:cNvPr>
@@ -19236,7 +19272,7 @@
           <p:cNvPr id="4" name="26">
             <a:extLst xmlns:a="http://schemas.openxmlformats.org/drawingml/2006/main">
               <a:ext uri="{FF2B5EF4-FFF2-40B4-BE49-F238E27FC236}">
-                <a16:creationId xmlns:a16="http://schemas.microsoft.com/office/drawing/2014/main" id="{D1D1AB98-A018-4CE1-8D83-545CAE6E2E12}"/>
+                <a16:creationId xmlns:a16="http://schemas.microsoft.com/office/drawing/2014/main" id="{E937D918-8D86-4B0A-BE2A-3170AE8EFC4B}"/>
               </a:ext>
             </a:extLst>
           </p:cNvPr>
@@ -19300,7 +19336,7 @@
         </p:xfrm>
         <a:graphic xmlns:a="http://schemas.openxmlformats.org/drawingml/2006/main">
           <a:graphicData uri="http://schemas.openxmlformats.org/drawingml/2006/chart">
-            <c:chart xmlns:r="http://schemas.openxmlformats.org/officeDocument/2006/relationships" xmlns:c="http://schemas.openxmlformats.org/drawingml/2006/chart" r:id="R9e677fa3dd0f4178"/>
+            <c:chart xmlns:r="http://schemas.openxmlformats.org/officeDocument/2006/relationships" xmlns:c="http://schemas.openxmlformats.org/drawingml/2006/chart" r:id="Rcf7066f31bff4ce7"/>
           </a:graphicData>
         </a:graphic>
       </p:graphicFrame>
@@ -19309,7 +19345,7 @@
           <p:cNvPr id="6" name="Bij Q = 1.000">
             <a:extLst xmlns:a="http://schemas.openxmlformats.org/drawingml/2006/main">
               <a:ext uri="{FF2B5EF4-FFF2-40B4-BE49-F238E27FC236}">
-                <a16:creationId xmlns:a16="http://schemas.microsoft.com/office/drawing/2014/main" id="{B832AD18-3BAB-42D2-85E4-6C0EC88BA76E}"/>
+                <a16:creationId xmlns:a16="http://schemas.microsoft.com/office/drawing/2014/main" id="{AB560EA4-225D-49D8-A714-306FC4BE1B81}"/>
               </a:ext>
             </a:extLst>
           </p:cNvPr>
@@ -19366,7 +19402,7 @@
           <p:cNvPr id="7" name="TO = € 1.500&#10;TK = € 1.300&#10;Winst = € 200">
             <a:extLst xmlns:a="http://schemas.openxmlformats.org/drawingml/2006/main">
               <a:ext uri="{FF2B5EF4-FFF2-40B4-BE49-F238E27FC236}">
-                <a16:creationId xmlns:a16="http://schemas.microsoft.com/office/drawing/2014/main" id="{74C7CA2D-9C3E-47F0-9A24-2AE816268001}"/>
+                <a16:creationId xmlns:a16="http://schemas.microsoft.com/office/drawing/2014/main" id="{B3577A87-DDFC-463C-B2F0-181D09A4325C}"/>
               </a:ext>
             </a:extLst>
           </p:cNvPr>
@@ -19469,7 +19505,7 @@
           <p:cNvPr id="8" name="Per maand.&#10;De verticale afstand&#10;is TO − TK.">
             <a:extLst xmlns:a="http://schemas.openxmlformats.org/drawingml/2006/main">
               <a:ext uri="{FF2B5EF4-FFF2-40B4-BE49-F238E27FC236}">
-                <a16:creationId xmlns:a16="http://schemas.microsoft.com/office/drawing/2014/main" id="{DC87BBF9-C9D3-4AA6-8C9D-021447930A9C}"/>
+                <a16:creationId xmlns:a16="http://schemas.microsoft.com/office/drawing/2014/main" id="{40404194-35FD-47D7-A0CE-BB9F37F3D569}"/>
               </a:ext>
             </a:extLst>
           </p:cNvPr>
@@ -19570,7 +19606,7 @@
     </p:spTree>
     <p:extLst>
       <p:ext uri="{BB962C8B-B14F-4D97-AF65-F5344CB8AC3E}">
-        <p14:creationId xmlns:p14="http://schemas.microsoft.com/office/powerpoint/2010/main" val="2069060673"/>
+        <p14:creationId xmlns:p14="http://schemas.microsoft.com/office/powerpoint/2010/main" val="1405799269"/>
       </p:ext>
     </p:extLst>
   </p:cSld>
@@ -19601,7 +19637,7 @@
           <p:cNvPr id="14" name="Antwoordcontrole bij opgave 8">
             <a:extLst xmlns:a="http://schemas.openxmlformats.org/drawingml/2006/main">
               <a:ext uri="{FF2B5EF4-FFF2-40B4-BE49-F238E27FC236}">
-                <a16:creationId xmlns:a16="http://schemas.microsoft.com/office/drawing/2014/main" id="{BD4CD6B2-F4E9-42A1-B0C5-54A917038C16}"/>
+                <a16:creationId xmlns:a16="http://schemas.microsoft.com/office/drawing/2014/main" id="{8D4B572F-B39E-4849-9CE9-2129C8DEFEEE}"/>
               </a:ext>
             </a:extLst>
           </p:cNvPr>
@@ -19658,7 +19694,7 @@
           <p:cNvPr id="2" name="">
             <a:extLst xmlns:a="http://schemas.openxmlformats.org/drawingml/2006/main">
               <a:ext uri="{FF2B5EF4-FFF2-40B4-BE49-F238E27FC236}">
-                <a16:creationId xmlns:a16="http://schemas.microsoft.com/office/drawing/2014/main" id="{BB005695-893B-4083-938F-2546ECEB0332}"/>
+                <a16:creationId xmlns:a16="http://schemas.microsoft.com/office/drawing/2014/main" id="{BDE9167C-368E-4564-822C-6649F8036735}"/>
               </a:ext>
             </a:extLst>
           </p:cNvPr>
@@ -19687,7 +19723,7 @@
           <p:cNvPr id="3" name="§2.1.2 Opbrengsten, winst en break-even">
             <a:extLst xmlns:a="http://schemas.openxmlformats.org/drawingml/2006/main">
               <a:ext uri="{FF2B5EF4-FFF2-40B4-BE49-F238E27FC236}">
-                <a16:creationId xmlns:a16="http://schemas.microsoft.com/office/drawing/2014/main" id="{97E0F97D-8AF1-45AC-A2E3-A227413C95D0}"/>
+                <a16:creationId xmlns:a16="http://schemas.microsoft.com/office/drawing/2014/main" id="{6A951624-43EB-4E48-897E-F693549A9FE1}"/>
               </a:ext>
             </a:extLst>
           </p:cNvPr>
@@ -19744,7 +19780,7 @@
           <p:cNvPr id="4" name="27">
             <a:extLst xmlns:a="http://schemas.openxmlformats.org/drawingml/2006/main">
               <a:ext uri="{FF2B5EF4-FFF2-40B4-BE49-F238E27FC236}">
-                <a16:creationId xmlns:a16="http://schemas.microsoft.com/office/drawing/2014/main" id="{CAA63131-1FB3-482C-A27E-68EB4DD0D430}"/>
+                <a16:creationId xmlns:a16="http://schemas.microsoft.com/office/drawing/2014/main" id="{59A83D72-FD3F-43A5-8A70-6AF70A59FDAD}"/>
               </a:ext>
             </a:extLst>
           </p:cNvPr>
@@ -19801,7 +19837,7 @@
           <p:cNvPr id="5" name="a · Opbrengsten">
             <a:extLst xmlns:a="http://schemas.openxmlformats.org/drawingml/2006/main">
               <a:ext uri="{FF2B5EF4-FFF2-40B4-BE49-F238E27FC236}">
-                <a16:creationId xmlns:a16="http://schemas.microsoft.com/office/drawing/2014/main" id="{CDCF23C0-9ACB-42C0-BDB8-C707544B816E}"/>
+                <a16:creationId xmlns:a16="http://schemas.microsoft.com/office/drawing/2014/main" id="{EEC106FD-B86F-44C4-B199-7507B1AF9B40}"/>
               </a:ext>
             </a:extLst>
           </p:cNvPr>
@@ -19858,7 +19894,7 @@
           <p:cNvPr id="6" name="TO = 1,50Q en GO = € 1,50 per brood, met verklaring.">
             <a:extLst xmlns:a="http://schemas.openxmlformats.org/drawingml/2006/main">
               <a:ext uri="{FF2B5EF4-FFF2-40B4-BE49-F238E27FC236}">
-                <a16:creationId xmlns:a16="http://schemas.microsoft.com/office/drawing/2014/main" id="{BC4C125E-792D-4586-90B7-8370613A28E0}"/>
+                <a16:creationId xmlns:a16="http://schemas.microsoft.com/office/drawing/2014/main" id="{99D098E1-BF77-4074-8536-363E1D3F71D5}"/>
               </a:ext>
             </a:extLst>
           </p:cNvPr>
@@ -19915,7 +19951,7 @@
           <p:cNvPr id="7" name="b · Winst">
             <a:extLst xmlns:a="http://schemas.openxmlformats.org/drawingml/2006/main">
               <a:ext uri="{FF2B5EF4-FFF2-40B4-BE49-F238E27FC236}">
-                <a16:creationId xmlns:a16="http://schemas.microsoft.com/office/drawing/2014/main" id="{7EC19BEB-281E-4884-BF3E-7521889166EB}"/>
+                <a16:creationId xmlns:a16="http://schemas.microsoft.com/office/drawing/2014/main" id="{244098D0-8EE1-40B3-A6EE-1D595180E247}"/>
               </a:ext>
             </a:extLst>
           </p:cNvPr>
@@ -19972,7 +20008,7 @@
           <p:cNvPr id="8" name="Bij 500: −€ 150. Bij 1.000: +€ 200 per maand.">
             <a:extLst xmlns:a="http://schemas.openxmlformats.org/drawingml/2006/main">
               <a:ext uri="{FF2B5EF4-FFF2-40B4-BE49-F238E27FC236}">
-                <a16:creationId xmlns:a16="http://schemas.microsoft.com/office/drawing/2014/main" id="{0EE8AECD-DA82-402A-99C6-7F93ABCAA6E4}"/>
+                <a16:creationId xmlns:a16="http://schemas.microsoft.com/office/drawing/2014/main" id="{0065B59B-0F1C-4647-9047-8F255C392262}"/>
               </a:ext>
             </a:extLst>
           </p:cNvPr>
@@ -20029,7 +20065,7 @@
           <p:cNvPr id="9" name="c · Break-even">
             <a:extLst xmlns:a="http://schemas.openxmlformats.org/drawingml/2006/main">
               <a:ext uri="{FF2B5EF4-FFF2-40B4-BE49-F238E27FC236}">
-                <a16:creationId xmlns:a16="http://schemas.microsoft.com/office/drawing/2014/main" id="{F25631A0-9E17-4647-BD86-A29D7826DCDB}"/>
+                <a16:creationId xmlns:a16="http://schemas.microsoft.com/office/drawing/2014/main" id="{4F526467-68C2-47E7-A0BD-E68CBAC5A109}"/>
               </a:ext>
             </a:extLst>
           </p:cNvPr>
@@ -20086,7 +20122,7 @@
           <p:cNvPr id="10" name="Modelgrens ≈ 714,29. Eerste gehele aantal: 715 broden.">
             <a:extLst xmlns:a="http://schemas.openxmlformats.org/drawingml/2006/main">
               <a:ext uri="{FF2B5EF4-FFF2-40B4-BE49-F238E27FC236}">
-                <a16:creationId xmlns:a16="http://schemas.microsoft.com/office/drawing/2014/main" id="{B98A3C62-B48F-4ACA-B4BF-7223A759D2B5}"/>
+                <a16:creationId xmlns:a16="http://schemas.microsoft.com/office/drawing/2014/main" id="{4B732574-74BA-4D0C-84A7-40080732257E}"/>
               </a:ext>
             </a:extLst>
           </p:cNvPr>
@@ -20143,7 +20179,7 @@
           <p:cNvPr id="11" name="d · Grafiek">
             <a:extLst xmlns:a="http://schemas.openxmlformats.org/drawingml/2006/main">
               <a:ext uri="{FF2B5EF4-FFF2-40B4-BE49-F238E27FC236}">
-                <a16:creationId xmlns:a16="http://schemas.microsoft.com/office/drawing/2014/main" id="{369C3CF8-1FF4-4BFC-BA23-FE59DB287A86}"/>
+                <a16:creationId xmlns:a16="http://schemas.microsoft.com/office/drawing/2014/main" id="{B8912DCB-431F-46D6-8C4F-FBFFAF4B68F1}"/>
               </a:ext>
             </a:extLst>
           </p:cNvPr>
@@ -20200,7 +20236,7 @@
           <p:cNvPr id="12" name="Assen, lijnen, snijpunt, winst/verlies en verticale € 200.">
             <a:extLst xmlns:a="http://schemas.openxmlformats.org/drawingml/2006/main">
               <a:ext uri="{FF2B5EF4-FFF2-40B4-BE49-F238E27FC236}">
-                <a16:creationId xmlns:a16="http://schemas.microsoft.com/office/drawing/2014/main" id="{D96D9A37-4444-4417-B0E0-C5400ED77BC5}"/>
+                <a16:creationId xmlns:a16="http://schemas.microsoft.com/office/drawing/2014/main" id="{520BAC86-D28A-4827-B517-40414B7B26A2}"/>
               </a:ext>
             </a:extLst>
           </p:cNvPr>
@@ -20257,7 +20293,7 @@
           <p:cNvPr id="13" name="Verbeter één ontbrekende stap of uitleg in je eigen antwoord">
             <a:extLst xmlns:a="http://schemas.openxmlformats.org/drawingml/2006/main">
               <a:ext uri="{FF2B5EF4-FFF2-40B4-BE49-F238E27FC236}">
-                <a16:creationId xmlns:a16="http://schemas.microsoft.com/office/drawing/2014/main" id="{28A3DDDF-0163-4BCA-9278-49F030518C6C}"/>
+                <a16:creationId xmlns:a16="http://schemas.microsoft.com/office/drawing/2014/main" id="{54DE5A52-7A5D-4B09-B5AF-C2FEDF20D4FE}"/>
               </a:ext>
             </a:extLst>
           </p:cNvPr>
@@ -20312,7 +20348,7 @@
     </p:spTree>
     <p:extLst>
       <p:ext uri="{BB962C8B-B14F-4D97-AF65-F5344CB8AC3E}">
-        <p14:creationId xmlns:p14="http://schemas.microsoft.com/office/powerpoint/2010/main" val="755231682"/>
+        <p14:creationId xmlns:p14="http://schemas.microsoft.com/office/powerpoint/2010/main" val="1098978413"/>
       </p:ext>
     </p:extLst>
   </p:cSld>
@@ -20343,7 +20379,7 @@
           <p:cNvPr id="29" name="Deze les: §2.1.2 Opbrengsten, winst en break-even">
             <a:extLst xmlns:a="http://schemas.openxmlformats.org/drawingml/2006/main">
               <a:ext uri="{FF2B5EF4-FFF2-40B4-BE49-F238E27FC236}">
-                <a16:creationId xmlns:a16="http://schemas.microsoft.com/office/drawing/2014/main" id="{03A81015-865C-48E0-A6ED-1231E1ADA987}"/>
+                <a16:creationId xmlns:a16="http://schemas.microsoft.com/office/drawing/2014/main" id="{72E2A262-CC67-4B7F-B1E3-F7ACF1C70B20}"/>
               </a:ext>
             </a:extLst>
           </p:cNvPr>
@@ -20400,7 +20436,7 @@
           <p:cNvPr id="2" name="">
             <a:extLst xmlns:a="http://schemas.openxmlformats.org/drawingml/2006/main">
               <a:ext uri="{FF2B5EF4-FFF2-40B4-BE49-F238E27FC236}">
-                <a16:creationId xmlns:a16="http://schemas.microsoft.com/office/drawing/2014/main" id="{BF8E38AB-5A66-42AD-A74F-B6815653F481}"/>
+                <a16:creationId xmlns:a16="http://schemas.microsoft.com/office/drawing/2014/main" id="{31200CAD-3E9F-4E0A-AFB8-2A8BC49DD917}"/>
               </a:ext>
             </a:extLst>
           </p:cNvPr>
@@ -20429,7 +20465,7 @@
           <p:cNvPr id="3" name="§2.1.2 Opbrengsten, winst en break-even">
             <a:extLst xmlns:a="http://schemas.openxmlformats.org/drawingml/2006/main">
               <a:ext uri="{FF2B5EF4-FFF2-40B4-BE49-F238E27FC236}">
-                <a16:creationId xmlns:a16="http://schemas.microsoft.com/office/drawing/2014/main" id="{215D56F6-F636-4451-AD97-90EC9A36F549}"/>
+                <a16:creationId xmlns:a16="http://schemas.microsoft.com/office/drawing/2014/main" id="{028252D3-2539-41B6-8251-B98D18B51867}"/>
               </a:ext>
             </a:extLst>
           </p:cNvPr>
@@ -20486,7 +20522,7 @@
           <p:cNvPr id="4" name="28">
             <a:extLst xmlns:a="http://schemas.openxmlformats.org/drawingml/2006/main">
               <a:ext uri="{FF2B5EF4-FFF2-40B4-BE49-F238E27FC236}">
-                <a16:creationId xmlns:a16="http://schemas.microsoft.com/office/drawing/2014/main" id="{D33E56E9-2DD6-4070-8C71-53BD26A5728B}"/>
+                <a16:creationId xmlns:a16="http://schemas.microsoft.com/office/drawing/2014/main" id="{3F99C472-A14A-404B-924A-B986E917BBEA}"/>
               </a:ext>
             </a:extLst>
           </p:cNvPr>
@@ -20543,7 +20579,7 @@
           <p:cNvPr id="5" name="phase">
             <a:extLst xmlns:a="http://schemas.openxmlformats.org/drawingml/2006/main">
               <a:ext uri="{FF2B5EF4-FFF2-40B4-BE49-F238E27FC236}">
-                <a16:creationId xmlns:a16="http://schemas.microsoft.com/office/drawing/2014/main" id="{321EA89B-8750-41F7-B0DF-76CCBD89CB82}"/>
+                <a16:creationId xmlns:a16="http://schemas.microsoft.com/office/drawing/2014/main" id="{FBD87839-8E6E-4179-9212-DF7DFD53727F}"/>
               </a:ext>
             </a:extLst>
           </p:cNvPr>
@@ -20600,7 +20636,7 @@
           <p:cNvPr id="6" name="Lesroute">
             <a:extLst xmlns:a="http://schemas.openxmlformats.org/drawingml/2006/main">
               <a:ext uri="{FF2B5EF4-FFF2-40B4-BE49-F238E27FC236}">
-                <a16:creationId xmlns:a16="http://schemas.microsoft.com/office/drawing/2014/main" id="{63E3CF80-7730-4DC8-8F19-CEE323B7BF2C}"/>
+                <a16:creationId xmlns:a16="http://schemas.microsoft.com/office/drawing/2014/main" id="{B0977FE4-ACB4-42E6-B0DB-8E00454F0951}"/>
               </a:ext>
             </a:extLst>
           </p:cNvPr>
@@ -20657,7 +20693,7 @@
           <p:cNvPr id="7" name="route-number-1">
             <a:extLst xmlns:a="http://schemas.openxmlformats.org/drawingml/2006/main">
               <a:ext uri="{FF2B5EF4-FFF2-40B4-BE49-F238E27FC236}">
-                <a16:creationId xmlns:a16="http://schemas.microsoft.com/office/drawing/2014/main" id="{2EA12E6F-78D4-47A2-8BB6-0E6DAE29C612}"/>
+                <a16:creationId xmlns:a16="http://schemas.microsoft.com/office/drawing/2014/main" id="{87EE3F40-E853-4295-B9C3-AF59CA6D6D09}"/>
               </a:ext>
             </a:extLst>
           </p:cNvPr>
@@ -20714,7 +20750,7 @@
           <p:cNvPr id="8" name="route-1">
             <a:extLst xmlns:a="http://schemas.openxmlformats.org/drawingml/2006/main">
               <a:ext uri="{FF2B5EF4-FFF2-40B4-BE49-F238E27FC236}">
-                <a16:creationId xmlns:a16="http://schemas.microsoft.com/office/drawing/2014/main" id="{41D2FA8D-19CC-4E48-9EE5-7EAE9C045A01}"/>
+                <a16:creationId xmlns:a16="http://schemas.microsoft.com/office/drawing/2014/main" id="{CE3F15EB-DDBD-47A2-9DB0-8416E618B128}"/>
               </a:ext>
             </a:extLst>
           </p:cNvPr>
@@ -20771,7 +20807,7 @@
           <p:cNvPr id="9" name="route-number-2">
             <a:extLst xmlns:a="http://schemas.openxmlformats.org/drawingml/2006/main">
               <a:ext uri="{FF2B5EF4-FFF2-40B4-BE49-F238E27FC236}">
-                <a16:creationId xmlns:a16="http://schemas.microsoft.com/office/drawing/2014/main" id="{7854CED5-CDF8-4360-916B-69BEEF40F397}"/>
+                <a16:creationId xmlns:a16="http://schemas.microsoft.com/office/drawing/2014/main" id="{D3437325-B5A3-49C0-B006-F0AF38BD9EB2}"/>
               </a:ext>
             </a:extLst>
           </p:cNvPr>
@@ -20828,7 +20864,7 @@
           <p:cNvPr id="10" name="route-2">
             <a:extLst xmlns:a="http://schemas.openxmlformats.org/drawingml/2006/main">
               <a:ext uri="{FF2B5EF4-FFF2-40B4-BE49-F238E27FC236}">
-                <a16:creationId xmlns:a16="http://schemas.microsoft.com/office/drawing/2014/main" id="{340C86E3-3DA5-4D44-A054-D8A386E78D0A}"/>
+                <a16:creationId xmlns:a16="http://schemas.microsoft.com/office/drawing/2014/main" id="{2BFEC224-9BB4-4102-910C-FAC4FEB0F5F1}"/>
               </a:ext>
             </a:extLst>
           </p:cNvPr>
@@ -20885,7 +20921,7 @@
           <p:cNvPr id="11" name="route-number-3">
             <a:extLst xmlns:a="http://schemas.openxmlformats.org/drawingml/2006/main">
               <a:ext uri="{FF2B5EF4-FFF2-40B4-BE49-F238E27FC236}">
-                <a16:creationId xmlns:a16="http://schemas.microsoft.com/office/drawing/2014/main" id="{DE968964-8E19-4379-BA36-0988FE600D43}"/>
+                <a16:creationId xmlns:a16="http://schemas.microsoft.com/office/drawing/2014/main" id="{0AD364FA-29C9-4B16-96E1-6DCFD4A2CD13}"/>
               </a:ext>
             </a:extLst>
           </p:cNvPr>
@@ -20942,7 +20978,7 @@
           <p:cNvPr id="12" name="route-3">
             <a:extLst xmlns:a="http://schemas.openxmlformats.org/drawingml/2006/main">
               <a:ext uri="{FF2B5EF4-FFF2-40B4-BE49-F238E27FC236}">
-                <a16:creationId xmlns:a16="http://schemas.microsoft.com/office/drawing/2014/main" id="{9905FD10-0292-46FD-985B-C75CD0490DF5}"/>
+                <a16:creationId xmlns:a16="http://schemas.microsoft.com/office/drawing/2014/main" id="{DF69FDAE-FE33-4779-96EC-023D3E674B9D}"/>
               </a:ext>
             </a:extLst>
           </p:cNvPr>
@@ -20999,7 +21035,7 @@
           <p:cNvPr id="13" name="route-number-4">
             <a:extLst xmlns:a="http://schemas.openxmlformats.org/drawingml/2006/main">
               <a:ext uri="{FF2B5EF4-FFF2-40B4-BE49-F238E27FC236}">
-                <a16:creationId xmlns:a16="http://schemas.microsoft.com/office/drawing/2014/main" id="{7C8B26EC-F247-44AF-91E7-EBC11EEED0FE}"/>
+                <a16:creationId xmlns:a16="http://schemas.microsoft.com/office/drawing/2014/main" id="{265D0FEC-E36E-4DD8-AEBB-31CB9C22F42B}"/>
               </a:ext>
             </a:extLst>
           </p:cNvPr>
@@ -21056,7 +21092,7 @@
           <p:cNvPr id="14" name="route-4">
             <a:extLst xmlns:a="http://schemas.openxmlformats.org/drawingml/2006/main">
               <a:ext uri="{FF2B5EF4-FFF2-40B4-BE49-F238E27FC236}">
-                <a16:creationId xmlns:a16="http://schemas.microsoft.com/office/drawing/2014/main" id="{38AB2088-FBB2-49C1-9045-A55264E6A66E}"/>
+                <a16:creationId xmlns:a16="http://schemas.microsoft.com/office/drawing/2014/main" id="{23AD78BB-F7E7-4FFA-B93C-9E36448D8F19}"/>
               </a:ext>
             </a:extLst>
           </p:cNvPr>
@@ -21113,7 +21149,7 @@
           <p:cNvPr id="15" name="route-number-5">
             <a:extLst xmlns:a="http://schemas.openxmlformats.org/drawingml/2006/main">
               <a:ext uri="{FF2B5EF4-FFF2-40B4-BE49-F238E27FC236}">
-                <a16:creationId xmlns:a16="http://schemas.microsoft.com/office/drawing/2014/main" id="{DC43237A-46D2-4C21-AFE1-860DDCE601B9}"/>
+                <a16:creationId xmlns:a16="http://schemas.microsoft.com/office/drawing/2014/main" id="{2C1795B0-9BD0-4077-9311-641FD5B5697B}"/>
               </a:ext>
             </a:extLst>
           </p:cNvPr>
@@ -21170,7 +21206,7 @@
           <p:cNvPr id="16" name="route-5">
             <a:extLst xmlns:a="http://schemas.openxmlformats.org/drawingml/2006/main">
               <a:ext uri="{FF2B5EF4-FFF2-40B4-BE49-F238E27FC236}">
-                <a16:creationId xmlns:a16="http://schemas.microsoft.com/office/drawing/2014/main" id="{8B42C1B0-C733-490D-98CC-B7A1E068D43D}"/>
+                <a16:creationId xmlns:a16="http://schemas.microsoft.com/office/drawing/2014/main" id="{640D8A9F-C8BE-46D2-8A80-868FFAFDF0D4}"/>
               </a:ext>
             </a:extLst>
           </p:cNvPr>
@@ -21227,7 +21263,7 @@
           <p:cNvPr id="17" name="route-number-6">
             <a:extLst xmlns:a="http://schemas.openxmlformats.org/drawingml/2006/main">
               <a:ext uri="{FF2B5EF4-FFF2-40B4-BE49-F238E27FC236}">
-                <a16:creationId xmlns:a16="http://schemas.microsoft.com/office/drawing/2014/main" id="{03032DC0-0F34-444A-8592-D158B121023E}"/>
+                <a16:creationId xmlns:a16="http://schemas.microsoft.com/office/drawing/2014/main" id="{64A970CC-D2DF-43FF-A52E-5686456AA870}"/>
               </a:ext>
             </a:extLst>
           </p:cNvPr>
@@ -21284,7 +21320,7 @@
           <p:cNvPr id="18" name="route-6">
             <a:extLst xmlns:a="http://schemas.openxmlformats.org/drawingml/2006/main">
               <a:ext uri="{FF2B5EF4-FFF2-40B4-BE49-F238E27FC236}">
-                <a16:creationId xmlns:a16="http://schemas.microsoft.com/office/drawing/2014/main" id="{41FC01BE-4676-457F-B71B-DBAED8C85837}"/>
+                <a16:creationId xmlns:a16="http://schemas.microsoft.com/office/drawing/2014/main" id="{B6C1C4C4-0300-4AA9-A444-7189CA154B39}"/>
               </a:ext>
             </a:extLst>
           </p:cNvPr>
@@ -21341,7 +21377,7 @@
           <p:cNvPr id="19" name="route-number-7">
             <a:extLst xmlns:a="http://schemas.openxmlformats.org/drawingml/2006/main">
               <a:ext uri="{FF2B5EF4-FFF2-40B4-BE49-F238E27FC236}">
-                <a16:creationId xmlns:a16="http://schemas.microsoft.com/office/drawing/2014/main" id="{81B2B3B1-5305-4799-A617-E294B7889F8B}"/>
+                <a16:creationId xmlns:a16="http://schemas.microsoft.com/office/drawing/2014/main" id="{DE9793FF-2EC6-4AE6-AF2F-EE96969766EB}"/>
               </a:ext>
             </a:extLst>
           </p:cNvPr>
@@ -21398,7 +21434,7 @@
           <p:cNvPr id="20" name="route-7">
             <a:extLst xmlns:a="http://schemas.openxmlformats.org/drawingml/2006/main">
               <a:ext uri="{FF2B5EF4-FFF2-40B4-BE49-F238E27FC236}">
-                <a16:creationId xmlns:a16="http://schemas.microsoft.com/office/drawing/2014/main" id="{A27B6593-2041-40D9-8C0F-753718AB5B47}"/>
+                <a16:creationId xmlns:a16="http://schemas.microsoft.com/office/drawing/2014/main" id="{2A5576CA-BE83-4A36-8EAE-30BBB0BA272E}"/>
               </a:ext>
             </a:extLst>
           </p:cNvPr>
@@ -21455,7 +21491,7 @@
           <p:cNvPr id="21" name="Lesdoelen">
             <a:extLst xmlns:a="http://schemas.openxmlformats.org/drawingml/2006/main">
               <a:ext uri="{FF2B5EF4-FFF2-40B4-BE49-F238E27FC236}">
-                <a16:creationId xmlns:a16="http://schemas.microsoft.com/office/drawing/2014/main" id="{F9ED49F1-C121-4BEA-AD01-9F6C36BEA91A}"/>
+                <a16:creationId xmlns:a16="http://schemas.microsoft.com/office/drawing/2014/main" id="{DFB3F242-1BA2-45DC-9694-A1EA4197A106}"/>
               </a:ext>
             </a:extLst>
           </p:cNvPr>
@@ -21512,7 +21548,7 @@
           <p:cNvPr id="22" name="overview-goals">
             <a:extLst xmlns:a="http://schemas.openxmlformats.org/drawingml/2006/main">
               <a:ext uri="{FF2B5EF4-FFF2-40B4-BE49-F238E27FC236}">
-                <a16:creationId xmlns:a16="http://schemas.microsoft.com/office/drawing/2014/main" id="{48D9A3AF-D906-4F2D-BA4C-09342B7908D8}"/>
+                <a16:creationId xmlns:a16="http://schemas.microsoft.com/office/drawing/2014/main" id="{58ADB7C7-8B49-4891-8E4A-D5755C46D17B}"/>
               </a:ext>
             </a:extLst>
           </p:cNvPr>
@@ -21615,7 +21651,7 @@
           <p:cNvPr id="23" name="">
             <a:extLst xmlns:a="http://schemas.openxmlformats.org/drawingml/2006/main">
               <a:ext uri="{FF2B5EF4-FFF2-40B4-BE49-F238E27FC236}">
-                <a16:creationId xmlns:a16="http://schemas.microsoft.com/office/drawing/2014/main" id="{686AB425-53E8-460C-8FC9-0B3FB6D4C286}"/>
+                <a16:creationId xmlns:a16="http://schemas.microsoft.com/office/drawing/2014/main" id="{316C2C6F-B76A-459C-A93D-4C214DB979E6}"/>
               </a:ext>
             </a:extLst>
           </p:cNvPr>
@@ -21644,7 +21680,7 @@
           <p:cNvPr id="24" name="Startopdracht">
             <a:extLst xmlns:a="http://schemas.openxmlformats.org/drawingml/2006/main">
               <a:ext uri="{FF2B5EF4-FFF2-40B4-BE49-F238E27FC236}">
-                <a16:creationId xmlns:a16="http://schemas.microsoft.com/office/drawing/2014/main" id="{A4758CF8-F104-42FA-A10D-0D8EB5228B2C}"/>
+                <a16:creationId xmlns:a16="http://schemas.microsoft.com/office/drawing/2014/main" id="{13E505DB-F172-4C9B-A684-CD55127F9322}"/>
               </a:ext>
             </a:extLst>
           </p:cNvPr>
@@ -21701,7 +21737,7 @@
           <p:cNvPr id="25" name="overview-start">
             <a:extLst xmlns:a="http://schemas.openxmlformats.org/drawingml/2006/main">
               <a:ext uri="{FF2B5EF4-FFF2-40B4-BE49-F238E27FC236}">
-                <a16:creationId xmlns:a16="http://schemas.microsoft.com/office/drawing/2014/main" id="{42B83906-5C56-416E-BC4D-FA9651A35A9D}"/>
+                <a16:creationId xmlns:a16="http://schemas.microsoft.com/office/drawing/2014/main" id="{3FFF22CA-38D8-4D38-ADF5-29E9CF4B0B57}"/>
               </a:ext>
             </a:extLst>
           </p:cNvPr>
@@ -21730,48 +21766,48 @@
           <a:lstStyle xmlns:a="http://schemas.openxmlformats.org/drawingml/2006/main"/>
           <a:p xmlns:a="http://schemas.openxmlformats.org/drawingml/2006/main">
             <a:pPr algn="l">
-              <a:defRPr sz="2475" b="0">
-                <a:solidFill>
-                  <a:srgbClr val="183247"/>
-                </a:solidFill>
-                <a:latin typeface="Arial"/>
-                <a:ea typeface="Arial"/>
-                <a:cs typeface="Arial"/>
-              </a:defRPr>
-            </a:pPr>
-            <a:r>
-              <a:rPr sz="2475" b="0">
-                <a:solidFill>
-                  <a:srgbClr val="183247"/>
-                </a:solidFill>
-                <a:latin typeface="Arial"/>
-                <a:ea typeface="Arial"/>
-                <a:cs typeface="Arial"/>
-              </a:rPr>
-              <a:t>Pagina 14</a:t>
-            </a:r>
-          </a:p>
-          <a:p xmlns:a="http://schemas.openxmlformats.org/drawingml/2006/main">
-            <a:pPr algn="l">
-              <a:defRPr sz="2475" b="0">
-                <a:solidFill>
-                  <a:srgbClr val="183247"/>
-                </a:solidFill>
-                <a:latin typeface="Arial"/>
-                <a:ea typeface="Arial"/>
-                <a:cs typeface="Arial"/>
-              </a:defRPr>
-            </a:pPr>
-            <a:r>
-              <a:rPr sz="2475" b="0">
-                <a:solidFill>
-                  <a:srgbClr val="183247"/>
-                </a:solidFill>
-                <a:latin typeface="Arial"/>
-                <a:ea typeface="Arial"/>
-                <a:cs typeface="Arial"/>
-              </a:rPr>
-              <a:t>Opgaven 1 en 2</a:t>
+              <a:defRPr sz="2250" b="0">
+                <a:solidFill>
+                  <a:srgbClr val="183247"/>
+                </a:solidFill>
+                <a:latin typeface="Arial"/>
+                <a:ea typeface="Arial"/>
+                <a:cs typeface="Arial"/>
+              </a:defRPr>
+            </a:pPr>
+            <a:r>
+              <a:rPr sz="2250" b="0">
+                <a:solidFill>
+                  <a:srgbClr val="183247"/>
+                </a:solidFill>
+                <a:latin typeface="Arial"/>
+                <a:ea typeface="Arial"/>
+                <a:cs typeface="Arial"/>
+              </a:rPr>
+              <a:t>Pagina 14 · Opgaven 1 en 2</a:t>
+            </a:r>
+          </a:p>
+          <a:p xmlns:a="http://schemas.openxmlformats.org/drawingml/2006/main">
+            <a:pPr algn="l">
+              <a:defRPr sz="2250" b="0">
+                <a:solidFill>
+                  <a:srgbClr val="183247"/>
+                </a:solidFill>
+                <a:latin typeface="Arial"/>
+                <a:ea typeface="Arial"/>
+                <a:cs typeface="Arial"/>
+              </a:defRPr>
+            </a:pPr>
+            <a:r>
+              <a:rPr sz="2250" b="0">
+                <a:solidFill>
+                  <a:srgbClr val="183247"/>
+                </a:solidFill>
+                <a:latin typeface="Arial"/>
+                <a:ea typeface="Arial"/>
+                <a:cs typeface="Arial"/>
+              </a:rPr>
+              <a:t>2: verkennen, theorie p. 10–11</a:t>
             </a:r>
           </a:p>
         </p:txBody>
@@ -21781,7 +21817,7 @@
           <p:cNvPr id="26" name="">
             <a:extLst xmlns:a="http://schemas.openxmlformats.org/drawingml/2006/main">
               <a:ext uri="{FF2B5EF4-FFF2-40B4-BE49-F238E27FC236}">
-                <a16:creationId xmlns:a16="http://schemas.microsoft.com/office/drawing/2014/main" id="{E78CD375-18AC-487B-9497-CC4C60F34F43}"/>
+                <a16:creationId xmlns:a16="http://schemas.microsoft.com/office/drawing/2014/main" id="{D6913B03-199B-4DF5-B0B8-484DD9DD3428}"/>
               </a:ext>
             </a:extLst>
           </p:cNvPr>
@@ -21810,7 +21846,7 @@
           <p:cNvPr id="27" name="Huiswerk">
             <a:extLst xmlns:a="http://schemas.openxmlformats.org/drawingml/2006/main">
               <a:ext uri="{FF2B5EF4-FFF2-40B4-BE49-F238E27FC236}">
-                <a16:creationId xmlns:a16="http://schemas.microsoft.com/office/drawing/2014/main" id="{D5094A2F-BD68-4D2F-8DBA-15CC9AC6F5BB}"/>
+                <a16:creationId xmlns:a16="http://schemas.microsoft.com/office/drawing/2014/main" id="{A6BEB97D-AE97-42AC-8D7C-A95FADA86522}"/>
               </a:ext>
             </a:extLst>
           </p:cNvPr>
@@ -21867,7 +21903,7 @@
           <p:cNvPr id="28" name="overview-homework">
             <a:extLst xmlns:a="http://schemas.openxmlformats.org/drawingml/2006/main">
               <a:ext uri="{FF2B5EF4-FFF2-40B4-BE49-F238E27FC236}">
-                <a16:creationId xmlns:a16="http://schemas.microsoft.com/office/drawing/2014/main" id="{0C39F956-D507-4D47-9B22-16D072F4C9B2}"/>
+                <a16:creationId xmlns:a16="http://schemas.microsoft.com/office/drawing/2014/main" id="{0EC7137E-27C1-4923-96DE-7D5DDF3FC3D2}"/>
               </a:ext>
             </a:extLst>
           </p:cNvPr>
@@ -22014,7 +22050,7 @@
     </p:spTree>
     <p:extLst>
       <p:ext uri="{BB962C8B-B14F-4D97-AF65-F5344CB8AC3E}">
-        <p14:creationId xmlns:p14="http://schemas.microsoft.com/office/powerpoint/2010/main" val="876842947"/>
+        <p14:creationId xmlns:p14="http://schemas.microsoft.com/office/powerpoint/2010/main" val="1212843443"/>
       </p:ext>
     </p:extLst>
   </p:cSld>
@@ -22045,7 +22081,7 @@
           <p:cNvPr id="9" name="WafelWagen: opbrengst totaal en per wafel">
             <a:extLst xmlns:a="http://schemas.openxmlformats.org/drawingml/2006/main">
               <a:ext uri="{FF2B5EF4-FFF2-40B4-BE49-F238E27FC236}">
-                <a16:creationId xmlns:a16="http://schemas.microsoft.com/office/drawing/2014/main" id="{652B1926-FD27-4A64-87FE-085CBDFAF549}"/>
+                <a16:creationId xmlns:a16="http://schemas.microsoft.com/office/drawing/2014/main" id="{8C5690E2-8277-46BE-927D-D669FD15C4EF}"/>
               </a:ext>
             </a:extLst>
           </p:cNvPr>
@@ -22102,7 +22138,7 @@
           <p:cNvPr id="2" name="">
             <a:extLst xmlns:a="http://schemas.openxmlformats.org/drawingml/2006/main">
               <a:ext uri="{FF2B5EF4-FFF2-40B4-BE49-F238E27FC236}">
-                <a16:creationId xmlns:a16="http://schemas.microsoft.com/office/drawing/2014/main" id="{E3B44D44-AD32-480B-903C-0B4119A65918}"/>
+                <a16:creationId xmlns:a16="http://schemas.microsoft.com/office/drawing/2014/main" id="{4516DB3E-26BE-4D22-A669-46F651FCA296}"/>
               </a:ext>
             </a:extLst>
           </p:cNvPr>
@@ -22131,7 +22167,7 @@
           <p:cNvPr id="3" name="§2.1.2 Opbrengsten, winst en break-even">
             <a:extLst xmlns:a="http://schemas.openxmlformats.org/drawingml/2006/main">
               <a:ext uri="{FF2B5EF4-FFF2-40B4-BE49-F238E27FC236}">
-                <a16:creationId xmlns:a16="http://schemas.microsoft.com/office/drawing/2014/main" id="{4AF093A3-F9E1-42C6-A7DD-1CBCB086570F}"/>
+                <a16:creationId xmlns:a16="http://schemas.microsoft.com/office/drawing/2014/main" id="{42B84E9C-3EEA-4F18-837F-4462DD2A3C2A}"/>
               </a:ext>
             </a:extLst>
           </p:cNvPr>
@@ -22188,7 +22224,7 @@
           <p:cNvPr id="4" name="3">
             <a:extLst xmlns:a="http://schemas.openxmlformats.org/drawingml/2006/main">
               <a:ext uri="{FF2B5EF4-FFF2-40B4-BE49-F238E27FC236}">
-                <a16:creationId xmlns:a16="http://schemas.microsoft.com/office/drawing/2014/main" id="{2E09C940-B98E-49E5-8050-86CBD2DD5723}"/>
+                <a16:creationId xmlns:a16="http://schemas.microsoft.com/office/drawing/2014/main" id="{D5917822-59D9-45BD-8D4A-8D54E2AFE496}"/>
               </a:ext>
             </a:extLst>
           </p:cNvPr>
@@ -22245,7 +22281,7 @@
           <p:cNvPr id="5" name="Vaste prijs: € 5 per wafel. Capaciteit: 150 wafels per dag.">
             <a:extLst xmlns:a="http://schemas.openxmlformats.org/drawingml/2006/main">
               <a:ext uri="{FF2B5EF4-FFF2-40B4-BE49-F238E27FC236}">
-                <a16:creationId xmlns:a16="http://schemas.microsoft.com/office/drawing/2014/main" id="{D66E29A0-84CF-4BD3-8649-9358A97E6019}"/>
+                <a16:creationId xmlns:a16="http://schemas.microsoft.com/office/drawing/2014/main" id="{90F5D552-51C0-4538-95BC-72EAE7ECBB71}"/>
               </a:ext>
             </a:extLst>
           </p:cNvPr>
@@ -22547,7 +22583,7 @@
           <p:cNvPr id="7" name="TO = P × Q">
             <a:extLst xmlns:a="http://schemas.openxmlformats.org/drawingml/2006/main">
               <a:ext uri="{FF2B5EF4-FFF2-40B4-BE49-F238E27FC236}">
-                <a16:creationId xmlns:a16="http://schemas.microsoft.com/office/drawing/2014/main" id="{D24D01AF-12BF-45B8-AC0F-7A830CEC8F2B}"/>
+                <a16:creationId xmlns:a16="http://schemas.microsoft.com/office/drawing/2014/main" id="{1F4A5ABE-386D-4CB2-B9D4-2D2EBDB31045}"/>
               </a:ext>
             </a:extLst>
           </p:cNvPr>
@@ -22604,7 +22640,7 @@
           <p:cNvPr id="8" name="GO = P bij Q &gt; 0">
             <a:extLst xmlns:a="http://schemas.openxmlformats.org/drawingml/2006/main">
               <a:ext uri="{FF2B5EF4-FFF2-40B4-BE49-F238E27FC236}">
-                <a16:creationId xmlns:a16="http://schemas.microsoft.com/office/drawing/2014/main" id="{134F765B-3448-46F9-84E2-EEA98551ABBC}"/>
+                <a16:creationId xmlns:a16="http://schemas.microsoft.com/office/drawing/2014/main" id="{1EB021A9-17E7-4BBC-A03E-E8EC701EB670}"/>
               </a:ext>
             </a:extLst>
           </p:cNvPr>
@@ -22659,7 +22695,7 @@
     </p:spTree>
     <p:extLst>
       <p:ext uri="{BB962C8B-B14F-4D97-AF65-F5344CB8AC3E}">
-        <p14:creationId xmlns:p14="http://schemas.microsoft.com/office/powerpoint/2010/main" val="979851877"/>
+        <p14:creationId xmlns:p14="http://schemas.microsoft.com/office/powerpoint/2010/main" val="2004103535"/>
       </p:ext>
     </p:extLst>
   </p:cSld>
@@ -22690,7 +22726,7 @@
           <p:cNvPr id="9" name="Winst: opbrengst na aftrek van alle kosten">
             <a:extLst xmlns:a="http://schemas.openxmlformats.org/drawingml/2006/main">
               <a:ext uri="{FF2B5EF4-FFF2-40B4-BE49-F238E27FC236}">
-                <a16:creationId xmlns:a16="http://schemas.microsoft.com/office/drawing/2014/main" id="{A748A413-A451-4BD3-B15E-6F018B204F73}"/>
+                <a16:creationId xmlns:a16="http://schemas.microsoft.com/office/drawing/2014/main" id="{F849B747-05DC-46C7-BFA6-AE4CD21CE46A}"/>
               </a:ext>
             </a:extLst>
           </p:cNvPr>
@@ -22747,7 +22783,7 @@
           <p:cNvPr id="2" name="">
             <a:extLst xmlns:a="http://schemas.openxmlformats.org/drawingml/2006/main">
               <a:ext uri="{FF2B5EF4-FFF2-40B4-BE49-F238E27FC236}">
-                <a16:creationId xmlns:a16="http://schemas.microsoft.com/office/drawing/2014/main" id="{92819462-4574-44F8-8040-40780E5C6416}"/>
+                <a16:creationId xmlns:a16="http://schemas.microsoft.com/office/drawing/2014/main" id="{747427A0-E5D0-46CD-A81C-49639F54569A}"/>
               </a:ext>
             </a:extLst>
           </p:cNvPr>
@@ -22776,7 +22812,7 @@
           <p:cNvPr id="3" name="§2.1.2 Opbrengsten, winst en break-even">
             <a:extLst xmlns:a="http://schemas.openxmlformats.org/drawingml/2006/main">
               <a:ext uri="{FF2B5EF4-FFF2-40B4-BE49-F238E27FC236}">
-                <a16:creationId xmlns:a16="http://schemas.microsoft.com/office/drawing/2014/main" id="{635B4021-7C1D-45E5-964A-EB8BD341ED49}"/>
+                <a16:creationId xmlns:a16="http://schemas.microsoft.com/office/drawing/2014/main" id="{907A3F98-8418-4344-B1FB-589F9F6EC02E}"/>
               </a:ext>
             </a:extLst>
           </p:cNvPr>
@@ -22833,7 +22869,7 @@
           <p:cNvPr id="4" name="4">
             <a:extLst xmlns:a="http://schemas.openxmlformats.org/drawingml/2006/main">
               <a:ext uri="{FF2B5EF4-FFF2-40B4-BE49-F238E27FC236}">
-                <a16:creationId xmlns:a16="http://schemas.microsoft.com/office/drawing/2014/main" id="{7ACA16E8-1782-4813-B1C9-60FA3E75235C}"/>
+                <a16:creationId xmlns:a16="http://schemas.microsoft.com/office/drawing/2014/main" id="{8E3A09A3-A85A-442D-8DE3-52DF63A18A3B}"/>
               </a:ext>
             </a:extLst>
           </p:cNvPr>
@@ -22890,7 +22926,7 @@
           <p:cNvPr id="5" name="WafelWagen: TO = 5Q en TK = 250 + 2Q">
             <a:extLst xmlns:a="http://schemas.openxmlformats.org/drawingml/2006/main">
               <a:ext uri="{FF2B5EF4-FFF2-40B4-BE49-F238E27FC236}">
-                <a16:creationId xmlns:a16="http://schemas.microsoft.com/office/drawing/2014/main" id="{ABA152C5-BFF9-4467-8740-C2DCC2D33E32}"/>
+                <a16:creationId xmlns:a16="http://schemas.microsoft.com/office/drawing/2014/main" id="{A8BDF310-4EF5-4D67-9726-42C8DC8D5B57}"/>
               </a:ext>
             </a:extLst>
           </p:cNvPr>
@@ -23265,7 +23301,7 @@
           <p:cNvPr id="7" name="Winst = TO − TK">
             <a:extLst xmlns:a="http://schemas.openxmlformats.org/drawingml/2006/main">
               <a:ext uri="{FF2B5EF4-FFF2-40B4-BE49-F238E27FC236}">
-                <a16:creationId xmlns:a16="http://schemas.microsoft.com/office/drawing/2014/main" id="{658FAFF1-AB95-46AC-8D9A-87CCE1B553AB}"/>
+                <a16:creationId xmlns:a16="http://schemas.microsoft.com/office/drawing/2014/main" id="{6A5D5B0C-EBFC-4EF0-AEAD-4CD7143ECC30}"/>
               </a:ext>
             </a:extLst>
           </p:cNvPr>
@@ -23322,7 +23358,7 @@
           <p:cNvPr id="8" name="Negatieve winst = verlies">
             <a:extLst xmlns:a="http://schemas.openxmlformats.org/drawingml/2006/main">
               <a:ext uri="{FF2B5EF4-FFF2-40B4-BE49-F238E27FC236}">
-                <a16:creationId xmlns:a16="http://schemas.microsoft.com/office/drawing/2014/main" id="{CBDD9075-1921-429F-8140-B874FDFB9F8A}"/>
+                <a16:creationId xmlns:a16="http://schemas.microsoft.com/office/drawing/2014/main" id="{1B054501-E6A6-4AC5-80C2-CA31DE59B928}"/>
               </a:ext>
             </a:extLst>
           </p:cNvPr>
@@ -23377,7 +23413,7 @@
     </p:spTree>
     <p:extLst>
       <p:ext uri="{BB962C8B-B14F-4D97-AF65-F5344CB8AC3E}">
-        <p14:creationId xmlns:p14="http://schemas.microsoft.com/office/powerpoint/2010/main" val="1148255946"/>
+        <p14:creationId xmlns:p14="http://schemas.microsoft.com/office/powerpoint/2010/main" val="1122302324"/>
       </p:ext>
     </p:extLst>
   </p:cSld>
@@ -23408,7 +23444,7 @@
           <p:cNvPr id="13" name="Break-even: de opbrengst dekt alle kosten">
             <a:extLst xmlns:a="http://schemas.openxmlformats.org/drawingml/2006/main">
               <a:ext uri="{FF2B5EF4-FFF2-40B4-BE49-F238E27FC236}">
-                <a16:creationId xmlns:a16="http://schemas.microsoft.com/office/drawing/2014/main" id="{BB23CA9E-4C16-49F1-A3F2-F8AD1601AE46}"/>
+                <a16:creationId xmlns:a16="http://schemas.microsoft.com/office/drawing/2014/main" id="{F50E0FB4-4653-422C-B5AF-41F811A4CA1B}"/>
               </a:ext>
             </a:extLst>
           </p:cNvPr>
@@ -23465,7 +23501,7 @@
           <p:cNvPr id="2" name="">
             <a:extLst xmlns:a="http://schemas.openxmlformats.org/drawingml/2006/main">
               <a:ext uri="{FF2B5EF4-FFF2-40B4-BE49-F238E27FC236}">
-                <a16:creationId xmlns:a16="http://schemas.microsoft.com/office/drawing/2014/main" id="{3D46AB16-4BAF-46F9-81AD-1800950E57AB}"/>
+                <a16:creationId xmlns:a16="http://schemas.microsoft.com/office/drawing/2014/main" id="{F196E2C1-AB74-41C2-B5D5-C322FE1122EF}"/>
               </a:ext>
             </a:extLst>
           </p:cNvPr>
@@ -23494,7 +23530,7 @@
           <p:cNvPr id="3" name="§2.1.2 Opbrengsten, winst en break-even">
             <a:extLst xmlns:a="http://schemas.openxmlformats.org/drawingml/2006/main">
               <a:ext uri="{FF2B5EF4-FFF2-40B4-BE49-F238E27FC236}">
-                <a16:creationId xmlns:a16="http://schemas.microsoft.com/office/drawing/2014/main" id="{3EE156DC-A949-4369-8E73-6ED74224573A}"/>
+                <a16:creationId xmlns:a16="http://schemas.microsoft.com/office/drawing/2014/main" id="{45740E58-38AB-4768-9A4F-E7CB7C4D158B}"/>
               </a:ext>
             </a:extLst>
           </p:cNvPr>
@@ -23551,7 +23587,7 @@
           <p:cNvPr id="4" name="5">
             <a:extLst xmlns:a="http://schemas.openxmlformats.org/drawingml/2006/main">
               <a:ext uri="{FF2B5EF4-FFF2-40B4-BE49-F238E27FC236}">
-                <a16:creationId xmlns:a16="http://schemas.microsoft.com/office/drawing/2014/main" id="{63885CEF-EEBB-4784-B517-03733737E282}"/>
+                <a16:creationId xmlns:a16="http://schemas.microsoft.com/office/drawing/2014/main" id="{220133CE-3207-4F37-BDAB-D98E60538E5B}"/>
               </a:ext>
             </a:extLst>
           </p:cNvPr>
@@ -23608,7 +23644,7 @@
           <p:cNvPr id="5" name="Alle producten samen">
             <a:extLst xmlns:a="http://schemas.openxmlformats.org/drawingml/2006/main">
               <a:ext uri="{FF2B5EF4-FFF2-40B4-BE49-F238E27FC236}">
-                <a16:creationId xmlns:a16="http://schemas.microsoft.com/office/drawing/2014/main" id="{053C5244-EFD4-46F6-8A35-E249E38A6198}"/>
+                <a16:creationId xmlns:a16="http://schemas.microsoft.com/office/drawing/2014/main" id="{98A927A0-1AD9-4F91-8A1F-B394398F95BB}"/>
               </a:ext>
             </a:extLst>
           </p:cNvPr>
@@ -23665,7 +23701,7 @@
           <p:cNvPr id="6" name="TO = TK">
             <a:extLst xmlns:a="http://schemas.openxmlformats.org/drawingml/2006/main">
               <a:ext uri="{FF2B5EF4-FFF2-40B4-BE49-F238E27FC236}">
-                <a16:creationId xmlns:a16="http://schemas.microsoft.com/office/drawing/2014/main" id="{0F92376F-4741-46CB-9327-0CC23A52EFD6}"/>
+                <a16:creationId xmlns:a16="http://schemas.microsoft.com/office/drawing/2014/main" id="{B1AB1AE1-F13C-4874-88C7-D63943EE37DB}"/>
               </a:ext>
             </a:extLst>
           </p:cNvPr>
@@ -23722,7 +23758,7 @@
           <p:cNvPr id="7" name="Winst = 0">
             <a:extLst xmlns:a="http://schemas.openxmlformats.org/drawingml/2006/main">
               <a:ext uri="{FF2B5EF4-FFF2-40B4-BE49-F238E27FC236}">
-                <a16:creationId xmlns:a16="http://schemas.microsoft.com/office/drawing/2014/main" id="{7065FA78-851E-43B1-BB07-F8FC80F329C2}"/>
+                <a16:creationId xmlns:a16="http://schemas.microsoft.com/office/drawing/2014/main" id="{F2E3C5DE-2538-48FA-AE38-DD8B5CFE31C1}"/>
               </a:ext>
             </a:extLst>
           </p:cNvPr>
@@ -23779,7 +23815,7 @@
           <p:cNvPr id="8" name="Per product, bij Q &gt; 0">
             <a:extLst xmlns:a="http://schemas.openxmlformats.org/drawingml/2006/main">
               <a:ext uri="{FF2B5EF4-FFF2-40B4-BE49-F238E27FC236}">
-                <a16:creationId xmlns:a16="http://schemas.microsoft.com/office/drawing/2014/main" id="{29864278-39AE-455E-9771-E17003173402}"/>
+                <a16:creationId xmlns:a16="http://schemas.microsoft.com/office/drawing/2014/main" id="{D409232B-63EF-4CB8-8010-8F2EFA2C794F}"/>
               </a:ext>
             </a:extLst>
           </p:cNvPr>
@@ -23836,7 +23872,7 @@
           <p:cNvPr id="9" name="TO / Q = TK / Q">
             <a:extLst xmlns:a="http://schemas.openxmlformats.org/drawingml/2006/main">
               <a:ext uri="{FF2B5EF4-FFF2-40B4-BE49-F238E27FC236}">
-                <a16:creationId xmlns:a16="http://schemas.microsoft.com/office/drawing/2014/main" id="{5EEB119F-BEA6-433B-A59B-361D968895D6}"/>
+                <a16:creationId xmlns:a16="http://schemas.microsoft.com/office/drawing/2014/main" id="{D7D70F8C-DBA8-4676-89D8-716F08A94163}"/>
               </a:ext>
             </a:extLst>
           </p:cNvPr>
@@ -23893,7 +23929,7 @@
           <p:cNvPr id="10" name="GO = GTK">
             <a:extLst xmlns:a="http://schemas.openxmlformats.org/drawingml/2006/main">
               <a:ext uri="{FF2B5EF4-FFF2-40B4-BE49-F238E27FC236}">
-                <a16:creationId xmlns:a16="http://schemas.microsoft.com/office/drawing/2014/main" id="{F37C0993-1F35-4F9D-8406-A0DA5595DC29}"/>
+                <a16:creationId xmlns:a16="http://schemas.microsoft.com/office/drawing/2014/main" id="{D32CB1BE-B92C-4852-BAE8-10E6B34973B2}"/>
               </a:ext>
             </a:extLst>
           </p:cNvPr>
@@ -23950,7 +23986,7 @@
           <p:cNvPr id="11" name="">
             <a:extLst xmlns:a="http://schemas.openxmlformats.org/drawingml/2006/main">
               <a:ext uri="{FF2B5EF4-FFF2-40B4-BE49-F238E27FC236}">
-                <a16:creationId xmlns:a16="http://schemas.microsoft.com/office/drawing/2014/main" id="{0D138EFC-9EAE-42CD-8336-1F5C8F530E66}"/>
+                <a16:creationId xmlns:a16="http://schemas.microsoft.com/office/drawing/2014/main" id="{202D1F85-EF10-472D-989F-917435E261B1}"/>
               </a:ext>
             </a:extLst>
           </p:cNvPr>
@@ -23979,7 +24015,7 @@
           <p:cNvPr id="12" name="Bij een vaste prijs geldt hier ook P = GTK.">
             <a:extLst xmlns:a="http://schemas.openxmlformats.org/drawingml/2006/main">
               <a:ext uri="{FF2B5EF4-FFF2-40B4-BE49-F238E27FC236}">
-                <a16:creationId xmlns:a16="http://schemas.microsoft.com/office/drawing/2014/main" id="{28825D9E-F3EE-4CAC-8C8E-2ABB07A4E405}"/>
+                <a16:creationId xmlns:a16="http://schemas.microsoft.com/office/drawing/2014/main" id="{77FDBEAF-910F-403E-86E2-B960866C07B4}"/>
               </a:ext>
             </a:extLst>
           </p:cNvPr>
@@ -24034,7 +24070,7 @@
     </p:spTree>
     <p:extLst>
       <p:ext uri="{BB962C8B-B14F-4D97-AF65-F5344CB8AC3E}">
-        <p14:creationId xmlns:p14="http://schemas.microsoft.com/office/powerpoint/2010/main" val="243120864"/>
+        <p14:creationId xmlns:p14="http://schemas.microsoft.com/office/powerpoint/2010/main" val="1225847288"/>
       </p:ext>
     </p:extLst>
   </p:cSld>
@@ -24065,7 +24101,7 @@
           <p:cNvPr id="14" name="WafelWagen: break-even berekenen">
             <a:extLst xmlns:a="http://schemas.openxmlformats.org/drawingml/2006/main">
               <a:ext uri="{FF2B5EF4-FFF2-40B4-BE49-F238E27FC236}">
-                <a16:creationId xmlns:a16="http://schemas.microsoft.com/office/drawing/2014/main" id="{61FD58DB-CD60-460C-A889-27D515105262}"/>
+                <a16:creationId xmlns:a16="http://schemas.microsoft.com/office/drawing/2014/main" id="{2C0EAD17-1AEE-4B78-9636-460BFD767E27}"/>
               </a:ext>
             </a:extLst>
           </p:cNvPr>
@@ -24122,7 +24158,7 @@
           <p:cNvPr id="2" name="">
             <a:extLst xmlns:a="http://schemas.openxmlformats.org/drawingml/2006/main">
               <a:ext uri="{FF2B5EF4-FFF2-40B4-BE49-F238E27FC236}">
-                <a16:creationId xmlns:a16="http://schemas.microsoft.com/office/drawing/2014/main" id="{B65F6F2A-3FBF-450F-807B-99E5FDD254A9}"/>
+                <a16:creationId xmlns:a16="http://schemas.microsoft.com/office/drawing/2014/main" id="{CEA02AC5-F4BC-467A-8EEF-C7CE75AC23C7}"/>
               </a:ext>
             </a:extLst>
           </p:cNvPr>
@@ -24151,7 +24187,7 @@
           <p:cNvPr id="3" name="§2.1.2 Opbrengsten, winst en break-even">
             <a:extLst xmlns:a="http://schemas.openxmlformats.org/drawingml/2006/main">
               <a:ext uri="{FF2B5EF4-FFF2-40B4-BE49-F238E27FC236}">
-                <a16:creationId xmlns:a16="http://schemas.microsoft.com/office/drawing/2014/main" id="{ACA09E29-33AE-4E95-B1C1-19905313A400}"/>
+                <a16:creationId xmlns:a16="http://schemas.microsoft.com/office/drawing/2014/main" id="{1F8D75B8-3532-4080-A6BF-D06C5000199B}"/>
               </a:ext>
             </a:extLst>
           </p:cNvPr>
@@ -24208,7 +24244,7 @@
           <p:cNvPr id="4" name="6">
             <a:extLst xmlns:a="http://schemas.openxmlformats.org/drawingml/2006/main">
               <a:ext uri="{FF2B5EF4-FFF2-40B4-BE49-F238E27FC236}">
-                <a16:creationId xmlns:a16="http://schemas.microsoft.com/office/drawing/2014/main" id="{C3AEB3BC-F9D8-4B7D-A05D-2BF3281BD4EF}"/>
+                <a16:creationId xmlns:a16="http://schemas.microsoft.com/office/drawing/2014/main" id="{E8D1A974-9C7B-43ED-ABF4-7FE1E1F8EE89}"/>
               </a:ext>
             </a:extLst>
           </p:cNvPr>
@@ -24265,7 +24301,7 @@
           <p:cNvPr id="5" name="TO = TK">
             <a:extLst xmlns:a="http://schemas.openxmlformats.org/drawingml/2006/main">
               <a:ext uri="{FF2B5EF4-FFF2-40B4-BE49-F238E27FC236}">
-                <a16:creationId xmlns:a16="http://schemas.microsoft.com/office/drawing/2014/main" id="{FAB00A67-7E32-46A9-9883-5520CFB5F3BB}"/>
+                <a16:creationId xmlns:a16="http://schemas.microsoft.com/office/drawing/2014/main" id="{1F6F9A2D-7C08-49C5-A575-DA93D0449E86}"/>
               </a:ext>
             </a:extLst>
           </p:cNvPr>
@@ -24322,7 +24358,7 @@
           <p:cNvPr id="6" name="Opbrengst gelijk aan kosten">
             <a:extLst xmlns:a="http://schemas.openxmlformats.org/drawingml/2006/main">
               <a:ext uri="{FF2B5EF4-FFF2-40B4-BE49-F238E27FC236}">
-                <a16:creationId xmlns:a16="http://schemas.microsoft.com/office/drawing/2014/main" id="{75BC47D0-135B-4E49-9CC7-0BB02B5A6BA6}"/>
+                <a16:creationId xmlns:a16="http://schemas.microsoft.com/office/drawing/2014/main" id="{420EB196-723A-496C-8875-A1C56EE7FB7F}"/>
               </a:ext>
             </a:extLst>
           </p:cNvPr>
@@ -24379,7 +24415,7 @@
           <p:cNvPr id="7" name="5Q = 250 + 2Q">
             <a:extLst xmlns:a="http://schemas.openxmlformats.org/drawingml/2006/main">
               <a:ext uri="{FF2B5EF4-FFF2-40B4-BE49-F238E27FC236}">
-                <a16:creationId xmlns:a16="http://schemas.microsoft.com/office/drawing/2014/main" id="{2F195734-6CD7-474D-9F57-E05BDA4A531F}"/>
+                <a16:creationId xmlns:a16="http://schemas.microsoft.com/office/drawing/2014/main" id="{B3CDE248-3E5E-4087-8835-18A3F9EABC25}"/>
               </a:ext>
             </a:extLst>
           </p:cNvPr>
@@ -24436,7 +24472,7 @@
           <p:cNvPr id="8" name="Functies invullen">
             <a:extLst xmlns:a="http://schemas.openxmlformats.org/drawingml/2006/main">
               <a:ext uri="{FF2B5EF4-FFF2-40B4-BE49-F238E27FC236}">
-                <a16:creationId xmlns:a16="http://schemas.microsoft.com/office/drawing/2014/main" id="{089EBAD7-0D41-4830-926B-9CAAE5C6A323}"/>
+                <a16:creationId xmlns:a16="http://schemas.microsoft.com/office/drawing/2014/main" id="{02FE985A-19F6-41E2-B01E-5B97A7A8AD3D}"/>
               </a:ext>
             </a:extLst>
           </p:cNvPr>
@@ -24493,7 +24529,7 @@
           <p:cNvPr id="9" name="3Q = 250">
             <a:extLst xmlns:a="http://schemas.openxmlformats.org/drawingml/2006/main">
               <a:ext uri="{FF2B5EF4-FFF2-40B4-BE49-F238E27FC236}">
-                <a16:creationId xmlns:a16="http://schemas.microsoft.com/office/drawing/2014/main" id="{86157A43-ABFC-4C9F-AAF5-87BB897348AE}"/>
+                <a16:creationId xmlns:a16="http://schemas.microsoft.com/office/drawing/2014/main" id="{D64E72CB-0EB4-44D2-BC6F-A7250DD8CC8A}"/>
               </a:ext>
             </a:extLst>
           </p:cNvPr>
@@ -24550,7 +24586,7 @@
           <p:cNvPr id="10" name="Aan beide kanten 2Q aftrekken">
             <a:extLst xmlns:a="http://schemas.openxmlformats.org/drawingml/2006/main">
               <a:ext uri="{FF2B5EF4-FFF2-40B4-BE49-F238E27FC236}">
-                <a16:creationId xmlns:a16="http://schemas.microsoft.com/office/drawing/2014/main" id="{31A69D68-954F-4480-8DD0-FFBFA225EB19}"/>
+                <a16:creationId xmlns:a16="http://schemas.microsoft.com/office/drawing/2014/main" id="{6F945EC2-C880-438D-8EDE-0D6CA592278A}"/>
               </a:ext>
             </a:extLst>
           </p:cNvPr>
@@ -24607,7 +24643,7 @@
           <p:cNvPr id="11" name="Q = 250 / 3 = 83,333…">
             <a:extLst xmlns:a="http://schemas.openxmlformats.org/drawingml/2006/main">
               <a:ext uri="{FF2B5EF4-FFF2-40B4-BE49-F238E27FC236}">
-                <a16:creationId xmlns:a16="http://schemas.microsoft.com/office/drawing/2014/main" id="{EFAAC89F-8ADA-45C4-B06F-14E227713DE2}"/>
+                <a16:creationId xmlns:a16="http://schemas.microsoft.com/office/drawing/2014/main" id="{E6B2AA05-6E63-4912-B7A6-B1872FC8FE35}"/>
               </a:ext>
             </a:extLst>
           </p:cNvPr>
@@ -24664,7 +24700,7 @@
           <p:cNvPr id="12" name="Delen door 3">
             <a:extLst xmlns:a="http://schemas.openxmlformats.org/drawingml/2006/main">
               <a:ext uri="{FF2B5EF4-FFF2-40B4-BE49-F238E27FC236}">
-                <a16:creationId xmlns:a16="http://schemas.microsoft.com/office/drawing/2014/main" id="{7A77CBD3-9576-4952-A9CD-4B5338F376AD}"/>
+                <a16:creationId xmlns:a16="http://schemas.microsoft.com/office/drawing/2014/main" id="{F5A11345-E6CE-4984-8D5C-B10562C48C36}"/>
               </a:ext>
             </a:extLst>
           </p:cNvPr>
@@ -24721,7 +24757,7 @@
           <p:cNvPr id="13" name="Snijpunt: Q ≈ 83,33 wafels per dag">
             <a:extLst xmlns:a="http://schemas.openxmlformats.org/drawingml/2006/main">
               <a:ext uri="{FF2B5EF4-FFF2-40B4-BE49-F238E27FC236}">
-                <a16:creationId xmlns:a16="http://schemas.microsoft.com/office/drawing/2014/main" id="{112FEB8D-A3EB-4C66-B07E-C959FC8B9FA0}"/>
+                <a16:creationId xmlns:a16="http://schemas.microsoft.com/office/drawing/2014/main" id="{940EAD68-E0F1-4F88-AE53-96FC2EEAE9B5}"/>
               </a:ext>
             </a:extLst>
           </p:cNvPr>
@@ -24776,7 +24812,7 @@
     </p:spTree>
     <p:extLst>
       <p:ext uri="{BB962C8B-B14F-4D97-AF65-F5344CB8AC3E}">
-        <p14:creationId xmlns:p14="http://schemas.microsoft.com/office/powerpoint/2010/main" val="1120852497"/>
+        <p14:creationId xmlns:p14="http://schemas.microsoft.com/office/powerpoint/2010/main" val="1020509293"/>
       </p:ext>
     </p:extLst>
   </p:cSld>
@@ -24807,7 +24843,7 @@
           <p:cNvPr id="9" name="Hele wafels: het eerste aantal zonder verlies">
             <a:extLst xmlns:a="http://schemas.openxmlformats.org/drawingml/2006/main">
               <a:ext uri="{FF2B5EF4-FFF2-40B4-BE49-F238E27FC236}">
-                <a16:creationId xmlns:a16="http://schemas.microsoft.com/office/drawing/2014/main" id="{35A92D04-1794-4BB0-9E85-56552655174C}"/>
+                <a16:creationId xmlns:a16="http://schemas.microsoft.com/office/drawing/2014/main" id="{A1CB931B-3F59-435C-88EB-32C730A12F16}"/>
               </a:ext>
             </a:extLst>
           </p:cNvPr>
@@ -24864,7 +24900,7 @@
           <p:cNvPr id="2" name="">
             <a:extLst xmlns:a="http://schemas.openxmlformats.org/drawingml/2006/main">
               <a:ext uri="{FF2B5EF4-FFF2-40B4-BE49-F238E27FC236}">
-                <a16:creationId xmlns:a16="http://schemas.microsoft.com/office/drawing/2014/main" id="{816E834B-0FEB-47D1-92BA-7460805C8E0E}"/>
+                <a16:creationId xmlns:a16="http://schemas.microsoft.com/office/drawing/2014/main" id="{0C778F8B-85AC-4996-A3FF-DED851D42B09}"/>
               </a:ext>
             </a:extLst>
           </p:cNvPr>
@@ -24893,7 +24929,7 @@
           <p:cNvPr id="3" name="§2.1.2 Opbrengsten, winst en break-even">
             <a:extLst xmlns:a="http://schemas.openxmlformats.org/drawingml/2006/main">
               <a:ext uri="{FF2B5EF4-FFF2-40B4-BE49-F238E27FC236}">
-                <a16:creationId xmlns:a16="http://schemas.microsoft.com/office/drawing/2014/main" id="{8F3C2814-7040-4825-A524-3FBF830305CB}"/>
+                <a16:creationId xmlns:a16="http://schemas.microsoft.com/office/drawing/2014/main" id="{BCE70FDB-4B7B-48DC-A844-02BCA3919818}"/>
               </a:ext>
             </a:extLst>
           </p:cNvPr>
@@ -24950,7 +24986,7 @@
           <p:cNvPr id="4" name="7">
             <a:extLst xmlns:a="http://schemas.openxmlformats.org/drawingml/2006/main">
               <a:ext uri="{FF2B5EF4-FFF2-40B4-BE49-F238E27FC236}">
-                <a16:creationId xmlns:a16="http://schemas.microsoft.com/office/drawing/2014/main" id="{BD3AE4A7-BC90-4A4B-A75A-7F8A22221E34}"/>
+                <a16:creationId xmlns:a16="http://schemas.microsoft.com/office/drawing/2014/main" id="{6C555CE5-4A33-4B56-A9AB-A4298EF5A44E}"/>
               </a:ext>
             </a:extLst>
           </p:cNvPr>
@@ -25007,7 +25043,7 @@
           <p:cNvPr id="5" name="De berekende grens ligt tussen 83 en 84 wafels per dag.">
             <a:extLst xmlns:a="http://schemas.openxmlformats.org/drawingml/2006/main">
               <a:ext uri="{FF2B5EF4-FFF2-40B4-BE49-F238E27FC236}">
-                <a16:creationId xmlns:a16="http://schemas.microsoft.com/office/drawing/2014/main" id="{08CE0ECA-18C2-42F9-B70A-CF2660E42CF5}"/>
+                <a16:creationId xmlns:a16="http://schemas.microsoft.com/office/drawing/2014/main" id="{C6E998E0-4212-48F6-BC34-0DC0D56B4B78}"/>
               </a:ext>
             </a:extLst>
           </p:cNvPr>
@@ -25382,7 +25418,7 @@
           <p:cNvPr id="7" name="84 wafels: € 2 winst per dag">
             <a:extLst xmlns:a="http://schemas.openxmlformats.org/drawingml/2006/main">
               <a:ext uri="{FF2B5EF4-FFF2-40B4-BE49-F238E27FC236}">
-                <a16:creationId xmlns:a16="http://schemas.microsoft.com/office/drawing/2014/main" id="{F8E1763B-5047-4851-92B3-45FBC22E9B6D}"/>
+                <a16:creationId xmlns:a16="http://schemas.microsoft.com/office/drawing/2014/main" id="{54800DDA-8755-4D16-9D0A-FA832BA03FB9}"/>
               </a:ext>
             </a:extLst>
           </p:cNvPr>
@@ -25439,7 +25475,7 @@
           <p:cNvPr id="8" name="84 past binnen de capaciteit van 150 wafels per dag.">
             <a:extLst xmlns:a="http://schemas.openxmlformats.org/drawingml/2006/main">
               <a:ext uri="{FF2B5EF4-FFF2-40B4-BE49-F238E27FC236}">
-                <a16:creationId xmlns:a16="http://schemas.microsoft.com/office/drawing/2014/main" id="{F1897EC4-94E5-4B17-8913-3E920DA64493}"/>
+                <a16:creationId xmlns:a16="http://schemas.microsoft.com/office/drawing/2014/main" id="{63F682D6-F5AF-470E-946F-CADF9F83A498}"/>
               </a:ext>
             </a:extLst>
           </p:cNvPr>
@@ -25494,7 +25530,7 @@
     </p:spTree>
     <p:extLst>
       <p:ext uri="{BB962C8B-B14F-4D97-AF65-F5344CB8AC3E}">
-        <p14:creationId xmlns:p14="http://schemas.microsoft.com/office/powerpoint/2010/main" val="201935233"/>
+        <p14:creationId xmlns:p14="http://schemas.microsoft.com/office/powerpoint/2010/main" val="549498025"/>
       </p:ext>
     </p:extLst>
   </p:cSld>
@@ -25525,7 +25561,7 @@
           <p:cNvPr id="9" name="Twee punten bepalen iedere rechte lijn">
             <a:extLst xmlns:a="http://schemas.openxmlformats.org/drawingml/2006/main">
               <a:ext uri="{FF2B5EF4-FFF2-40B4-BE49-F238E27FC236}">
-                <a16:creationId xmlns:a16="http://schemas.microsoft.com/office/drawing/2014/main" id="{A2772398-2C0F-4DB9-B769-2471B4CE5AB4}"/>
+                <a16:creationId xmlns:a16="http://schemas.microsoft.com/office/drawing/2014/main" id="{8CE3E3FE-A96B-4ABE-8DB7-DB6697BB2965}"/>
               </a:ext>
             </a:extLst>
           </p:cNvPr>
@@ -25582,7 +25618,7 @@
           <p:cNvPr id="2" name="">
             <a:extLst xmlns:a="http://schemas.openxmlformats.org/drawingml/2006/main">
               <a:ext uri="{FF2B5EF4-FFF2-40B4-BE49-F238E27FC236}">
-                <a16:creationId xmlns:a16="http://schemas.microsoft.com/office/drawing/2014/main" id="{F55D0814-D756-416A-82B7-713FAE2C087A}"/>
+                <a16:creationId xmlns:a16="http://schemas.microsoft.com/office/drawing/2014/main" id="{995AF81D-225A-4825-9A8E-1588442978F6}"/>
               </a:ext>
             </a:extLst>
           </p:cNvPr>
@@ -25611,7 +25647,7 @@
           <p:cNvPr id="3" name="§2.1.2 Opbrengsten, winst en break-even">
             <a:extLst xmlns:a="http://schemas.openxmlformats.org/drawingml/2006/main">
               <a:ext uri="{FF2B5EF4-FFF2-40B4-BE49-F238E27FC236}">
-                <a16:creationId xmlns:a16="http://schemas.microsoft.com/office/drawing/2014/main" id="{FD56D5CB-2A5D-4160-A9C0-3304B408E206}"/>
+                <a16:creationId xmlns:a16="http://schemas.microsoft.com/office/drawing/2014/main" id="{53C809CE-6905-4F1C-AC76-996030BADD46}"/>
               </a:ext>
             </a:extLst>
           </p:cNvPr>
@@ -25668,7 +25704,7 @@
           <p:cNvPr id="4" name="8">
             <a:extLst xmlns:a="http://schemas.openxmlformats.org/drawingml/2006/main">
               <a:ext uri="{FF2B5EF4-FFF2-40B4-BE49-F238E27FC236}">
-                <a16:creationId xmlns:a16="http://schemas.microsoft.com/office/drawing/2014/main" id="{E0997AE7-B9A1-4652-9F8A-763F2996BFAD}"/>
+                <a16:creationId xmlns:a16="http://schemas.microsoft.com/office/drawing/2014/main" id="{662FB6CA-4903-48BB-90A8-824E9A918FC2}"/>
               </a:ext>
             </a:extLst>
           </p:cNvPr>
@@ -25725,7 +25761,7 @@
           <p:cNvPr id="5" name="WafelWagen: een punt is (Q; bedrag).">
             <a:extLst xmlns:a="http://schemas.openxmlformats.org/drawingml/2006/main">
               <a:ext uri="{FF2B5EF4-FFF2-40B4-BE49-F238E27FC236}">
-                <a16:creationId xmlns:a16="http://schemas.microsoft.com/office/drawing/2014/main" id="{E4E48231-1D8B-4DC0-B7B8-0DB467130A09}"/>
+                <a16:creationId xmlns:a16="http://schemas.microsoft.com/office/drawing/2014/main" id="{9084B4E3-34B5-4DD8-9603-B60545324F76}"/>
               </a:ext>
             </a:extLst>
           </p:cNvPr>
@@ -26027,7 +26063,7 @@
           <p:cNvPr id="7" name="Horizontaal: Q, wafels per dag">
             <a:extLst xmlns:a="http://schemas.openxmlformats.org/drawingml/2006/main">
               <a:ext uri="{FF2B5EF4-FFF2-40B4-BE49-F238E27FC236}">
-                <a16:creationId xmlns:a16="http://schemas.microsoft.com/office/drawing/2014/main" id="{3C7A9DD3-999C-4729-8C3C-AC6D85B5B3C6}"/>
+                <a16:creationId xmlns:a16="http://schemas.microsoft.com/office/drawing/2014/main" id="{27B88A64-558E-408D-8CCC-6302D3AA9EB9}"/>
               </a:ext>
             </a:extLst>
           </p:cNvPr>
@@ -26084,7 +26120,7 @@
           <p:cNvPr id="8" name="Verticaal: TO en TK, euro per dag">
             <a:extLst xmlns:a="http://schemas.openxmlformats.org/drawingml/2006/main">
               <a:ext uri="{FF2B5EF4-FFF2-40B4-BE49-F238E27FC236}">
-                <a16:creationId xmlns:a16="http://schemas.microsoft.com/office/drawing/2014/main" id="{EC73267B-950A-4AC2-813B-A1F4B236F082}"/>
+                <a16:creationId xmlns:a16="http://schemas.microsoft.com/office/drawing/2014/main" id="{698095E4-591B-42CD-A5C6-2162A0495451}"/>
               </a:ext>
             </a:extLst>
           </p:cNvPr>
@@ -26139,7 +26175,7 @@
     </p:spTree>
     <p:extLst>
       <p:ext uri="{BB962C8B-B14F-4D97-AF65-F5344CB8AC3E}">
-        <p14:creationId xmlns:p14="http://schemas.microsoft.com/office/powerpoint/2010/main" val="677287372"/>
+        <p14:creationId xmlns:p14="http://schemas.microsoft.com/office/powerpoint/2010/main" val="1719447796"/>
       </p:ext>
     </p:extLst>
   </p:cSld>
@@ -26170,7 +26206,7 @@
           <p:cNvPr id="9" name="WafelWagen: de kostenlijn">
             <a:extLst xmlns:a="http://schemas.openxmlformats.org/drawingml/2006/main">
               <a:ext uri="{FF2B5EF4-FFF2-40B4-BE49-F238E27FC236}">
-                <a16:creationId xmlns:a16="http://schemas.microsoft.com/office/drawing/2014/main" id="{ABE36ED6-7447-4C19-95E6-D89E7150A4CB}"/>
+                <a16:creationId xmlns:a16="http://schemas.microsoft.com/office/drawing/2014/main" id="{AFAF3279-F793-404F-8FE6-2069525DE550}"/>
               </a:ext>
             </a:extLst>
           </p:cNvPr>
@@ -26227,7 +26263,7 @@
           <p:cNvPr id="2" name="">
             <a:extLst xmlns:a="http://schemas.openxmlformats.org/drawingml/2006/main">
               <a:ext uri="{FF2B5EF4-FFF2-40B4-BE49-F238E27FC236}">
-                <a16:creationId xmlns:a16="http://schemas.microsoft.com/office/drawing/2014/main" id="{92DAFFA2-5841-4F64-BA73-2540D51DF840}"/>
+                <a16:creationId xmlns:a16="http://schemas.microsoft.com/office/drawing/2014/main" id="{44E17150-9DDA-4D22-B8BD-AF21EA156753}"/>
               </a:ext>
             </a:extLst>
           </p:cNvPr>
@@ -26256,7 +26292,7 @@
           <p:cNvPr id="3" name="§2.1.2 Opbrengsten, winst en break-even">
             <a:extLst xmlns:a="http://schemas.openxmlformats.org/drawingml/2006/main">
               <a:ext uri="{FF2B5EF4-FFF2-40B4-BE49-F238E27FC236}">
-                <a16:creationId xmlns:a16="http://schemas.microsoft.com/office/drawing/2014/main" id="{05E88721-5456-4ECC-974E-2AF15C0208CE}"/>
+                <a16:creationId xmlns:a16="http://schemas.microsoft.com/office/drawing/2014/main" id="{F15800F3-26E8-4DD7-9363-DF2D2E893C08}"/>
               </a:ext>
             </a:extLst>
           </p:cNvPr>
@@ -26313,7 +26349,7 @@
           <p:cNvPr id="4" name="9">
             <a:extLst xmlns:a="http://schemas.openxmlformats.org/drawingml/2006/main">
               <a:ext uri="{FF2B5EF4-FFF2-40B4-BE49-F238E27FC236}">
-                <a16:creationId xmlns:a16="http://schemas.microsoft.com/office/drawing/2014/main" id="{9A8E47E2-5745-449B-8F1D-4D0CBF3F332B}"/>
+                <a16:creationId xmlns:a16="http://schemas.microsoft.com/office/drawing/2014/main" id="{7BD34B80-F99E-4F96-8CC8-3E967083ABC1}"/>
               </a:ext>
             </a:extLst>
           </p:cNvPr>
@@ -26377,7 +26413,7 @@
         </p:xfrm>
         <a:graphic xmlns:a="http://schemas.openxmlformats.org/drawingml/2006/main">
           <a:graphicData uri="http://schemas.openxmlformats.org/drawingml/2006/chart">
-            <c:chart xmlns:r="http://schemas.openxmlformats.org/officeDocument/2006/relationships" xmlns:c="http://schemas.openxmlformats.org/drawingml/2006/chart" r:id="R8218abaf7b36457e"/>
+            <c:chart xmlns:r="http://schemas.openxmlformats.org/officeDocument/2006/relationships" xmlns:c="http://schemas.openxmlformats.org/drawingml/2006/chart" r:id="R021e7c9a78ac47b8"/>
           </a:graphicData>
         </a:graphic>
       </p:graphicFrame>
@@ -26386,7 +26422,7 @@
           <p:cNvPr id="6" name="TK = 250 + 2Q">
             <a:extLst xmlns:a="http://schemas.openxmlformats.org/drawingml/2006/main">
               <a:ext uri="{FF2B5EF4-FFF2-40B4-BE49-F238E27FC236}">
-                <a16:creationId xmlns:a16="http://schemas.microsoft.com/office/drawing/2014/main" id="{804EDB23-0AB1-450D-9CEE-23FC9FBC0984}"/>
+                <a16:creationId xmlns:a16="http://schemas.microsoft.com/office/drawing/2014/main" id="{E4FC04FC-FD0E-4F63-8E68-6799E49C090C}"/>
               </a:ext>
             </a:extLst>
           </p:cNvPr>
@@ -26443,7 +26479,7 @@
           <p:cNvPr id="7" name="Bij Q = 0:&#10;€ 250 kosten.">
             <a:extLst xmlns:a="http://schemas.openxmlformats.org/drawingml/2006/main">
               <a:ext uri="{FF2B5EF4-FFF2-40B4-BE49-F238E27FC236}">
-                <a16:creationId xmlns:a16="http://schemas.microsoft.com/office/drawing/2014/main" id="{CA304941-B720-4625-8AC5-7B6D27DAF14B}"/>
+                <a16:creationId xmlns:a16="http://schemas.microsoft.com/office/drawing/2014/main" id="{59A6CB11-27A7-46D0-8C0F-766AECCF724F}"/>
               </a:ext>
             </a:extLst>
           </p:cNvPr>
@@ -26523,7 +26559,7 @@
           <p:cNvPr id="8" name="Capaciteit:&#10;150 wafels&#10;per dag">
             <a:extLst xmlns:a="http://schemas.openxmlformats.org/drawingml/2006/main">
               <a:ext uri="{FF2B5EF4-FFF2-40B4-BE49-F238E27FC236}">
-                <a16:creationId xmlns:a16="http://schemas.microsoft.com/office/drawing/2014/main" id="{A8E7E683-FBC9-421B-9A99-9F2A01F5E215}"/>
+                <a16:creationId xmlns:a16="http://schemas.microsoft.com/office/drawing/2014/main" id="{22B9504A-9B0A-455C-BF2E-8A2DB34DD8C3}"/>
               </a:ext>
             </a:extLst>
           </p:cNvPr>
@@ -26624,7 +26660,7 @@
     </p:spTree>
     <p:extLst>
       <p:ext uri="{BB962C8B-B14F-4D97-AF65-F5344CB8AC3E}">
-        <p14:creationId xmlns:p14="http://schemas.microsoft.com/office/powerpoint/2010/main" val="2056325564"/>
+        <p14:creationId xmlns:p14="http://schemas.microsoft.com/office/powerpoint/2010/main" val="522394291"/>
       </p:ext>
     </p:extLst>
   </p:cSld>
